--- a/FieldBridge_TAIC.pptx
+++ b/FieldBridge_TAIC.pptx
@@ -3092,9 +3092,297 @@
         <p:nvPr/>
       </p:nvGrpSpPr>
       <p:grpSpPr/>
+      <p:sp>
+        <p:nvSpPr>
+          <p:cNvPr id="2" name="TextBox 1"/>
+          <p:cNvSpPr txBox="1"/>
+          <p:nvPr/>
+        </p:nvSpPr>
+        <p:spPr>
+          <a:xfrm>
+            <a:off x="406400" y="165100"/>
+            <a:ext cx="2540000" cy="127000"/>
+          </a:xfrm>
+          <a:prstGeom prst="rect">
+            <a:avLst/>
+          </a:prstGeom>
+          <a:noFill/>
+        </p:spPr>
+        <p:txBody>
+          <a:bodyPr wrap="square">
+            <a:spAutoFit/>
+          </a:bodyPr>
+          <a:lstStyle/>
+          <a:p>
+            <a:pPr algn="l"/>
+            <a:r>
+              <a:rPr sz="1000" b="0" i="0">
+                <a:solidFill>
+                  <a:srgbClr val="555555"/>
+                </a:solidFill>
+                <a:latin typeface="Noto Sans KR"/>
+              </a:rPr>
+              <a:t>2026.07.08.</a:t>
+            </a:r>
+          </a:p>
+        </p:txBody>
+      </p:sp>
+      <p:sp>
+        <p:nvSpPr>
+          <p:cNvPr id="3" name="TextBox 2"/>
+          <p:cNvSpPr txBox="1"/>
+          <p:nvPr/>
+        </p:nvSpPr>
+        <p:spPr>
+          <a:xfrm>
+            <a:off x="8318500" y="139700"/>
+            <a:ext cx="419100" cy="165100"/>
+          </a:xfrm>
+          <a:prstGeom prst="rect">
+            <a:avLst/>
+          </a:prstGeom>
+          <a:noFill/>
+        </p:spPr>
+        <p:txBody>
+          <a:bodyPr wrap="square">
+            <a:spAutoFit/>
+          </a:bodyPr>
+          <a:lstStyle/>
+          <a:p>
+            <a:pPr algn="r"/>
+            <a:r>
+              <a:rPr sz="1800" b="0" i="0">
+                <a:solidFill>
+                  <a:srgbClr val="555555"/>
+                </a:solidFill>
+                <a:latin typeface="Noto Sans KR"/>
+              </a:rPr>
+              <a:t>×</a:t>
+            </a:r>
+          </a:p>
+        </p:txBody>
+      </p:sp>
+      <p:sp>
+        <p:nvSpPr>
+          <p:cNvPr id="4" name="Rectangle 3"/>
+          <p:cNvSpPr/>
+          <p:nvPr/>
+        </p:nvSpPr>
+        <p:spPr>
+          <a:xfrm>
+            <a:off x="406400" y="330200"/>
+            <a:ext cx="8331200" cy="6350"/>
+          </a:xfrm>
+          <a:prstGeom prst="rect">
+            <a:avLst/>
+          </a:prstGeom>
+          <a:solidFill>
+            <a:srgbClr val="111111"/>
+          </a:solidFill>
+          <a:ln>
+            <a:noFill/>
+          </a:ln>
+        </p:spPr>
+        <p:style>
+          <a:lnRef idx="1">
+            <a:schemeClr val="accent1"/>
+          </a:lnRef>
+          <a:fillRef idx="3">
+            <a:schemeClr val="accent1"/>
+          </a:fillRef>
+          <a:effectRef idx="2">
+            <a:schemeClr val="accent1"/>
+          </a:effectRef>
+          <a:fontRef idx="minor">
+            <a:schemeClr val="lt1"/>
+          </a:fontRef>
+        </p:style>
+        <p:txBody>
+          <a:bodyPr rtlCol="0" anchor="ctr"/>
+          <a:lstStyle/>
+          <a:p>
+            <a:pPr algn="ctr"/>
+          </a:p>
+        </p:txBody>
+      </p:sp>
+      <p:sp>
+        <p:nvSpPr>
+          <p:cNvPr id="5" name="TextBox 4"/>
+          <p:cNvSpPr txBox="1"/>
+          <p:nvPr/>
+        </p:nvSpPr>
+        <p:spPr>
+          <a:xfrm>
+            <a:off x="406400" y="419100"/>
+            <a:ext cx="5588000" cy="584200"/>
+          </a:xfrm>
+          <a:prstGeom prst="rect">
+            <a:avLst/>
+          </a:prstGeom>
+          <a:noFill/>
+        </p:spPr>
+        <p:txBody>
+          <a:bodyPr wrap="square">
+            <a:spAutoFit/>
+          </a:bodyPr>
+          <a:lstStyle/>
+          <a:p>
+            <a:pPr algn="l"/>
+            <a:r>
+              <a:rPr sz="6200" b="1" i="0">
+                <a:solidFill>
+                  <a:srgbClr val="111111"/>
+                </a:solidFill>
+                <a:latin typeface="Noto Sans KR"/>
+              </a:rPr>
+              <a:t>FieldBridge</a:t>
+            </a:r>
+          </a:p>
+        </p:txBody>
+      </p:sp>
+      <p:sp>
+        <p:nvSpPr>
+          <p:cNvPr id="6" name="TextBox 5"/>
+          <p:cNvSpPr txBox="1"/>
+          <p:nvPr/>
+        </p:nvSpPr>
+        <p:spPr>
+          <a:xfrm>
+            <a:off x="5842000" y="546100"/>
+            <a:ext cx="2895600" cy="165100"/>
+          </a:xfrm>
+          <a:prstGeom prst="rect">
+            <a:avLst/>
+          </a:prstGeom>
+          <a:noFill/>
+        </p:spPr>
+        <p:txBody>
+          <a:bodyPr wrap="square">
+            <a:spAutoFit/>
+          </a:bodyPr>
+          <a:lstStyle/>
+          <a:p>
+            <a:pPr algn="r"/>
+            <a:r>
+              <a:rPr sz="1600" b="1" i="0">
+                <a:solidFill>
+                  <a:srgbClr val="111111"/>
+                </a:solidFill>
+                <a:latin typeface="Noto Sans KR"/>
+              </a:rPr>
+              <a:t>박수정</a:t>
+            </a:r>
+          </a:p>
+        </p:txBody>
+      </p:sp>
+      <p:sp>
+        <p:nvSpPr>
+          <p:cNvPr id="7" name="TextBox 6"/>
+          <p:cNvSpPr txBox="1"/>
+          <p:nvPr/>
+        </p:nvSpPr>
+        <p:spPr>
+          <a:xfrm>
+            <a:off x="5842000" y="685800"/>
+            <a:ext cx="2895600" cy="127000"/>
+          </a:xfrm>
+          <a:prstGeom prst="rect">
+            <a:avLst/>
+          </a:prstGeom>
+          <a:noFill/>
+        </p:spPr>
+        <p:txBody>
+          <a:bodyPr wrap="square">
+            <a:spAutoFit/>
+          </a:bodyPr>
+          <a:lstStyle/>
+          <a:p>
+            <a:pPr algn="r"/>
+            <a:r>
+              <a:rPr sz="1200" b="0" i="0">
+                <a:solidFill>
+                  <a:srgbClr val="555555"/>
+                </a:solidFill>
+                <a:latin typeface="Noto Sans KR"/>
+              </a:rPr>
+              <a:t>건축공방 · 건축 설계</a:t>
+            </a:r>
+          </a:p>
+        </p:txBody>
+      </p:sp>
+      <p:sp>
+        <p:nvSpPr>
+          <p:cNvPr id="8" name="TextBox 7"/>
+          <p:cNvSpPr txBox="1"/>
+          <p:nvPr/>
+        </p:nvSpPr>
+        <p:spPr>
+          <a:xfrm>
+            <a:off x="406400" y="1041400"/>
+            <a:ext cx="6985000" cy="165100"/>
+          </a:xfrm>
+          <a:prstGeom prst="rect">
+            <a:avLst/>
+          </a:prstGeom>
+          <a:noFill/>
+        </p:spPr>
+        <p:txBody>
+          <a:bodyPr wrap="square">
+            <a:spAutoFit/>
+          </a:bodyPr>
+          <a:lstStyle/>
+          <a:p>
+            <a:pPr algn="l"/>
+            <a:r>
+              <a:rPr sz="1500" b="1" i="0">
+                <a:solidFill>
+                  <a:srgbClr val="333333"/>
+                </a:solidFill>
+                <a:latin typeface="Noto Sans KR"/>
+              </a:rPr>
+              <a:t>건설산업 디지털 전환 — 첫 번째 데이터 레이어</a:t>
+            </a:r>
+          </a:p>
+        </p:txBody>
+      </p:sp>
+      <p:sp>
+        <p:nvSpPr>
+          <p:cNvPr id="9" name="TextBox 8"/>
+          <p:cNvSpPr txBox="1"/>
+          <p:nvPr/>
+        </p:nvSpPr>
+        <p:spPr>
+          <a:xfrm>
+            <a:off x="406400" y="1206500"/>
+            <a:ext cx="7620000" cy="139700"/>
+          </a:xfrm>
+          <a:prstGeom prst="rect">
+            <a:avLst/>
+          </a:prstGeom>
+          <a:noFill/>
+        </p:spPr>
+        <p:txBody>
+          <a:bodyPr wrap="square">
+            <a:spAutoFit/>
+          </a:bodyPr>
+          <a:lstStyle/>
+          <a:p>
+            <a:pPr algn="l"/>
+            <a:r>
+              <a:rPr sz="1200" b="0" i="0">
+                <a:solidFill>
+                  <a:srgbClr val="888888"/>
+                </a:solidFill>
+                <a:latin typeface="Noto Sans KR"/>
+              </a:rPr>
+              <a:t>GDP 20~25% · 맥킨지 22개 산업 디지털화 최하위 · AR · AI · 로보틱스 · 블록체인</a:t>
+            </a:r>
+          </a:p>
+        </p:txBody>
+      </p:sp>
       <p:pic>
         <p:nvPicPr>
-          <p:cNvPr id="2" name="Picture 1" descr="ppt_slide_1.png"/>
+          <p:cNvPr id="10" name="Picture 9" descr="img_geomdan.jpg"/>
           <p:cNvPicPr>
             <a:picLocks noChangeAspect="1"/>
           </p:cNvPicPr>
@@ -3108,14 +3396,476 @@
         </p:blipFill>
         <p:spPr>
           <a:xfrm>
-            <a:off x="0" y="0"/>
-            <a:ext cx="9144000" cy="5143500"/>
+            <a:off x="406400" y="1371600"/>
+            <a:ext cx="2032000" cy="3517900"/>
           </a:xfrm>
           <a:prstGeom prst="rect">
             <a:avLst/>
           </a:prstGeom>
         </p:spPr>
       </p:pic>
+      <p:sp>
+        <p:nvSpPr>
+          <p:cNvPr id="11" name="Rectangle 10"/>
+          <p:cNvSpPr/>
+          <p:nvPr/>
+        </p:nvSpPr>
+        <p:spPr>
+          <a:xfrm>
+            <a:off x="406400" y="4699000"/>
+            <a:ext cx="2032000" cy="190500"/>
+          </a:xfrm>
+          <a:prstGeom prst="rect">
+            <a:avLst/>
+          </a:prstGeom>
+          <a:solidFill>
+            <a:srgbClr val="000000"/>
+          </a:solidFill>
+          <a:ln>
+            <a:noFill/>
+          </a:ln>
+        </p:spPr>
+        <p:style>
+          <a:lnRef idx="1">
+            <a:schemeClr val="accent1"/>
+          </a:lnRef>
+          <a:fillRef idx="3">
+            <a:schemeClr val="accent1"/>
+          </a:fillRef>
+          <a:effectRef idx="2">
+            <a:schemeClr val="accent1"/>
+          </a:effectRef>
+          <a:fontRef idx="minor">
+            <a:schemeClr val="lt1"/>
+          </a:fontRef>
+        </p:style>
+        <p:txBody>
+          <a:bodyPr rtlCol="0" anchor="ctr"/>
+          <a:lstStyle/>
+          <a:p>
+            <a:pPr algn="ctr"/>
+          </a:p>
+        </p:txBody>
+      </p:sp>
+      <p:sp>
+        <p:nvSpPr>
+          <p:cNvPr id="12" name="TextBox 11"/>
+          <p:cNvSpPr txBox="1"/>
+          <p:nvPr/>
+        </p:nvSpPr>
+        <p:spPr>
+          <a:xfrm>
+            <a:off x="444500" y="4711700"/>
+            <a:ext cx="1955800" cy="165100"/>
+          </a:xfrm>
+          <a:prstGeom prst="rect">
+            <a:avLst/>
+          </a:prstGeom>
+          <a:noFill/>
+        </p:spPr>
+        <p:txBody>
+          <a:bodyPr wrap="square">
+            <a:spAutoFit/>
+          </a:bodyPr>
+          <a:lstStyle/>
+          <a:p>
+            <a:pPr algn="l"/>
+            <a:r>
+              <a:rPr sz="900" b="0" i="0">
+                <a:solidFill>
+                  <a:srgbClr val="FFFFFF"/>
+                </a:solidFill>
+                <a:latin typeface="Noto Sans KR"/>
+              </a:rPr>
+              <a:t>인천 검단 박물관·도서관</a:t>
+            </a:r>
+          </a:p>
+        </p:txBody>
+      </p:sp>
+      <p:pic>
+        <p:nvPicPr>
+          <p:cNvPr id="13" name="Picture 12" descr="img_hangang.jpg"/>
+          <p:cNvPicPr>
+            <a:picLocks noChangeAspect="1"/>
+          </p:cNvPicPr>
+          <p:nvPr/>
+        </p:nvPicPr>
+        <p:blipFill>
+          <a:blip r:embed="rId3"/>
+          <a:stretch>
+            <a:fillRect/>
+          </a:stretch>
+        </p:blipFill>
+        <p:spPr>
+          <a:xfrm>
+            <a:off x="2501900" y="1371600"/>
+            <a:ext cx="2032000" cy="3517900"/>
+          </a:xfrm>
+          <a:prstGeom prst="rect">
+            <a:avLst/>
+          </a:prstGeom>
+        </p:spPr>
+      </p:pic>
+      <p:sp>
+        <p:nvSpPr>
+          <p:cNvPr id="14" name="Rectangle 13"/>
+          <p:cNvSpPr/>
+          <p:nvPr/>
+        </p:nvSpPr>
+        <p:spPr>
+          <a:xfrm>
+            <a:off x="2501900" y="4699000"/>
+            <a:ext cx="2032000" cy="190500"/>
+          </a:xfrm>
+          <a:prstGeom prst="rect">
+            <a:avLst/>
+          </a:prstGeom>
+          <a:solidFill>
+            <a:srgbClr val="000000"/>
+          </a:solidFill>
+          <a:ln>
+            <a:noFill/>
+          </a:ln>
+        </p:spPr>
+        <p:style>
+          <a:lnRef idx="1">
+            <a:schemeClr val="accent1"/>
+          </a:lnRef>
+          <a:fillRef idx="3">
+            <a:schemeClr val="accent1"/>
+          </a:fillRef>
+          <a:effectRef idx="2">
+            <a:schemeClr val="accent1"/>
+          </a:effectRef>
+          <a:fontRef idx="minor">
+            <a:schemeClr val="lt1"/>
+          </a:fontRef>
+        </p:style>
+        <p:txBody>
+          <a:bodyPr rtlCol="0" anchor="ctr"/>
+          <a:lstStyle/>
+          <a:p>
+            <a:pPr algn="ctr"/>
+          </a:p>
+        </p:txBody>
+      </p:sp>
+      <p:sp>
+        <p:nvSpPr>
+          <p:cNvPr id="15" name="TextBox 14"/>
+          <p:cNvSpPr txBox="1"/>
+          <p:nvPr/>
+        </p:nvSpPr>
+        <p:spPr>
+          <a:xfrm>
+            <a:off x="2540000" y="4711700"/>
+            <a:ext cx="1955800" cy="165100"/>
+          </a:xfrm>
+          <a:prstGeom prst="rect">
+            <a:avLst/>
+          </a:prstGeom>
+          <a:noFill/>
+        </p:spPr>
+        <p:txBody>
+          <a:bodyPr wrap="square">
+            <a:spAutoFit/>
+          </a:bodyPr>
+          <a:lstStyle/>
+          <a:p>
+            <a:pPr algn="l"/>
+            <a:r>
+              <a:rPr sz="900" b="0" i="0">
+                <a:solidFill>
+                  <a:srgbClr val="FFFFFF"/>
+                </a:solidFill>
+                <a:latin typeface="Noto Sans KR"/>
+              </a:rPr>
+              <a:t>한강덮개공원</a:t>
+            </a:r>
+          </a:p>
+        </p:txBody>
+      </p:sp>
+      <p:pic>
+        <p:nvPicPr>
+          <p:cNvPr id="16" name="Picture 15" descr="img_gwangjang_new.jpg"/>
+          <p:cNvPicPr>
+            <a:picLocks noChangeAspect="1"/>
+          </p:cNvPicPr>
+          <p:nvPr/>
+        </p:nvPicPr>
+        <p:blipFill>
+          <a:blip r:embed="rId4"/>
+          <a:stretch>
+            <a:fillRect/>
+          </a:stretch>
+        </p:blipFill>
+        <p:spPr>
+          <a:xfrm>
+            <a:off x="4597400" y="1371600"/>
+            <a:ext cx="2032000" cy="3517900"/>
+          </a:xfrm>
+          <a:prstGeom prst="rect">
+            <a:avLst/>
+          </a:prstGeom>
+        </p:spPr>
+      </p:pic>
+      <p:sp>
+        <p:nvSpPr>
+          <p:cNvPr id="17" name="Rectangle 16"/>
+          <p:cNvSpPr/>
+          <p:nvPr/>
+        </p:nvSpPr>
+        <p:spPr>
+          <a:xfrm>
+            <a:off x="4597400" y="4699000"/>
+            <a:ext cx="2032000" cy="190500"/>
+          </a:xfrm>
+          <a:prstGeom prst="rect">
+            <a:avLst/>
+          </a:prstGeom>
+          <a:solidFill>
+            <a:srgbClr val="000000"/>
+          </a:solidFill>
+          <a:ln>
+            <a:noFill/>
+          </a:ln>
+        </p:spPr>
+        <p:style>
+          <a:lnRef idx="1">
+            <a:schemeClr val="accent1"/>
+          </a:lnRef>
+          <a:fillRef idx="3">
+            <a:schemeClr val="accent1"/>
+          </a:fillRef>
+          <a:effectRef idx="2">
+            <a:schemeClr val="accent1"/>
+          </a:effectRef>
+          <a:fontRef idx="minor">
+            <a:schemeClr val="lt1"/>
+          </a:fontRef>
+        </p:style>
+        <p:txBody>
+          <a:bodyPr rtlCol="0" anchor="ctr"/>
+          <a:lstStyle/>
+          <a:p>
+            <a:pPr algn="ctr"/>
+          </a:p>
+        </p:txBody>
+      </p:sp>
+      <p:sp>
+        <p:nvSpPr>
+          <p:cNvPr id="18" name="TextBox 17"/>
+          <p:cNvSpPr txBox="1"/>
+          <p:nvPr/>
+        </p:nvSpPr>
+        <p:spPr>
+          <a:xfrm>
+            <a:off x="4635500" y="4711700"/>
+            <a:ext cx="1955800" cy="165100"/>
+          </a:xfrm>
+          <a:prstGeom prst="rect">
+            <a:avLst/>
+          </a:prstGeom>
+          <a:noFill/>
+        </p:spPr>
+        <p:txBody>
+          <a:bodyPr wrap="square">
+            <a:spAutoFit/>
+          </a:bodyPr>
+          <a:lstStyle/>
+          <a:p>
+            <a:pPr algn="l"/>
+            <a:r>
+              <a:rPr sz="900" b="0" i="0">
+                <a:solidFill>
+                  <a:srgbClr val="FFFFFF"/>
+                </a:solidFill>
+                <a:latin typeface="Noto Sans KR"/>
+              </a:rPr>
+              <a:t>광장동 복합체육시설</a:t>
+            </a:r>
+          </a:p>
+        </p:txBody>
+      </p:sp>
+      <p:pic>
+        <p:nvPicPr>
+          <p:cNvPr id="19" name="Picture 18" descr="img_project4.jpg"/>
+          <p:cNvPicPr>
+            <a:picLocks noChangeAspect="1"/>
+          </p:cNvPicPr>
+          <p:nvPr/>
+        </p:nvPicPr>
+        <p:blipFill>
+          <a:blip r:embed="rId5"/>
+          <a:stretch>
+            <a:fillRect/>
+          </a:stretch>
+        </p:blipFill>
+        <p:spPr>
+          <a:xfrm>
+            <a:off x="6692900" y="1371600"/>
+            <a:ext cx="2032000" cy="3517900"/>
+          </a:xfrm>
+          <a:prstGeom prst="rect">
+            <a:avLst/>
+          </a:prstGeom>
+        </p:spPr>
+      </p:pic>
+      <p:sp>
+        <p:nvSpPr>
+          <p:cNvPr id="20" name="Rectangle 19"/>
+          <p:cNvSpPr/>
+          <p:nvPr/>
+        </p:nvSpPr>
+        <p:spPr>
+          <a:xfrm>
+            <a:off x="6692900" y="4699000"/>
+            <a:ext cx="2032000" cy="190500"/>
+          </a:xfrm>
+          <a:prstGeom prst="rect">
+            <a:avLst/>
+          </a:prstGeom>
+          <a:solidFill>
+            <a:srgbClr val="000000"/>
+          </a:solidFill>
+          <a:ln>
+            <a:noFill/>
+          </a:ln>
+        </p:spPr>
+        <p:style>
+          <a:lnRef idx="1">
+            <a:schemeClr val="accent1"/>
+          </a:lnRef>
+          <a:fillRef idx="3">
+            <a:schemeClr val="accent1"/>
+          </a:fillRef>
+          <a:effectRef idx="2">
+            <a:schemeClr val="accent1"/>
+          </a:effectRef>
+          <a:fontRef idx="minor">
+            <a:schemeClr val="lt1"/>
+          </a:fontRef>
+        </p:style>
+        <p:txBody>
+          <a:bodyPr rtlCol="0" anchor="ctr"/>
+          <a:lstStyle/>
+          <a:p>
+            <a:pPr algn="ctr"/>
+          </a:p>
+        </p:txBody>
+      </p:sp>
+      <p:sp>
+        <p:nvSpPr>
+          <p:cNvPr id="21" name="TextBox 20"/>
+          <p:cNvSpPr txBox="1"/>
+          <p:nvPr/>
+        </p:nvSpPr>
+        <p:spPr>
+          <a:xfrm>
+            <a:off x="6731000" y="4711700"/>
+            <a:ext cx="1955800" cy="165100"/>
+          </a:xfrm>
+          <a:prstGeom prst="rect">
+            <a:avLst/>
+          </a:prstGeom>
+          <a:noFill/>
+        </p:spPr>
+        <p:txBody>
+          <a:bodyPr wrap="square">
+            <a:spAutoFit/>
+          </a:bodyPr>
+          <a:lstStyle/>
+          <a:p>
+            <a:pPr algn="l"/>
+            <a:r>
+              <a:rPr sz="900" b="0" i="0">
+                <a:solidFill>
+                  <a:srgbClr val="FFFFFF"/>
+                </a:solidFill>
+                <a:latin typeface="Noto Sans KR"/>
+              </a:rPr>
+              <a:t>광주비엔날레 전시관</a:t>
+            </a:r>
+          </a:p>
+        </p:txBody>
+      </p:sp>
+      <p:sp>
+        <p:nvSpPr>
+          <p:cNvPr id="22" name="Rectangle 21"/>
+          <p:cNvSpPr/>
+          <p:nvPr/>
+        </p:nvSpPr>
+        <p:spPr>
+          <a:xfrm>
+            <a:off x="7340600" y="4889500"/>
+            <a:ext cx="1397000" cy="190500"/>
+          </a:xfrm>
+          <a:prstGeom prst="rect">
+            <a:avLst/>
+          </a:prstGeom>
+          <a:solidFill>
+            <a:srgbClr val="111111"/>
+          </a:solidFill>
+          <a:ln>
+            <a:noFill/>
+          </a:ln>
+        </p:spPr>
+        <p:style>
+          <a:lnRef idx="1">
+            <a:schemeClr val="accent1"/>
+          </a:lnRef>
+          <a:fillRef idx="3">
+            <a:schemeClr val="accent1"/>
+          </a:fillRef>
+          <a:effectRef idx="2">
+            <a:schemeClr val="accent1"/>
+          </a:effectRef>
+          <a:fontRef idx="minor">
+            <a:schemeClr val="lt1"/>
+          </a:fontRef>
+        </p:style>
+        <p:txBody>
+          <a:bodyPr rtlCol="0" anchor="ctr"/>
+          <a:lstStyle/>
+          <a:p>
+            <a:pPr algn="ctr"/>
+          </a:p>
+        </p:txBody>
+      </p:sp>
+      <p:sp>
+        <p:nvSpPr>
+          <p:cNvPr id="23" name="TextBox 22"/>
+          <p:cNvSpPr txBox="1"/>
+          <p:nvPr/>
+        </p:nvSpPr>
+        <p:spPr>
+          <a:xfrm>
+            <a:off x="7353300" y="4902200"/>
+            <a:ext cx="1384300" cy="165100"/>
+          </a:xfrm>
+          <a:prstGeom prst="rect">
+            <a:avLst/>
+          </a:prstGeom>
+          <a:noFill/>
+        </p:spPr>
+        <p:txBody>
+          <a:bodyPr wrap="square">
+            <a:spAutoFit/>
+          </a:bodyPr>
+          <a:lstStyle/>
+          <a:p>
+            <a:pPr algn="ctr"/>
+            <a:r>
+              <a:rPr sz="1000" b="1" i="0">
+                <a:solidFill>
+                  <a:srgbClr val="FFFFFF"/>
+                </a:solidFill>
+                <a:latin typeface="Noto Sans KR"/>
+              </a:rPr>
+              <a:t>TAIC 15주차  산학협력 제안</a:t>
+            </a:r>
+          </a:p>
+        </p:txBody>
+      </p:sp>
     </p:spTree>
   </p:cSld>
   <p:clrMapOvr>
@@ -3134,30 +3884,2552 @@
         <p:nvPr/>
       </p:nvGrpSpPr>
       <p:grpSpPr/>
-      <p:pic>
-        <p:nvPicPr>
-          <p:cNvPr id="2" name="Picture 1" descr="ppt_slide_2.png"/>
-          <p:cNvPicPr>
-            <a:picLocks noChangeAspect="1"/>
-          </p:cNvPicPr>
-          <p:nvPr/>
-        </p:nvPicPr>
-        <p:blipFill>
-          <a:blip r:embed="rId2"/>
-          <a:stretch>
-            <a:fillRect/>
-          </a:stretch>
-        </p:blipFill>
-        <p:spPr>
-          <a:xfrm>
-            <a:off x="0" y="0"/>
-            <a:ext cx="9144000" cy="5143500"/>
-          </a:xfrm>
-          <a:prstGeom prst="rect">
-            <a:avLst/>
-          </a:prstGeom>
-        </p:spPr>
-      </p:pic>
+      <p:sp>
+        <p:nvSpPr>
+          <p:cNvPr id="2" name="TextBox 1"/>
+          <p:cNvSpPr txBox="1"/>
+          <p:nvPr/>
+        </p:nvSpPr>
+        <p:spPr>
+          <a:xfrm>
+            <a:off x="406400" y="165100"/>
+            <a:ext cx="1905000" cy="127000"/>
+          </a:xfrm>
+          <a:prstGeom prst="rect">
+            <a:avLst/>
+          </a:prstGeom>
+          <a:noFill/>
+        </p:spPr>
+        <p:txBody>
+          <a:bodyPr wrap="square">
+            <a:spAutoFit/>
+          </a:bodyPr>
+          <a:lstStyle/>
+          <a:p>
+            <a:pPr algn="l"/>
+            <a:r>
+              <a:rPr sz="1000" b="0" i="0">
+                <a:solidFill>
+                  <a:srgbClr val="555555"/>
+                </a:solidFill>
+                <a:latin typeface="Noto Sans KR"/>
+              </a:rPr>
+              <a:t>2026.07.08.</a:t>
+            </a:r>
+          </a:p>
+        </p:txBody>
+      </p:sp>
+      <p:sp>
+        <p:nvSpPr>
+          <p:cNvPr id="3" name="TextBox 2"/>
+          <p:cNvSpPr txBox="1"/>
+          <p:nvPr/>
+        </p:nvSpPr>
+        <p:spPr>
+          <a:xfrm>
+            <a:off x="8318500" y="139700"/>
+            <a:ext cx="419100" cy="165100"/>
+          </a:xfrm>
+          <a:prstGeom prst="rect">
+            <a:avLst/>
+          </a:prstGeom>
+          <a:noFill/>
+        </p:spPr>
+        <p:txBody>
+          <a:bodyPr wrap="square">
+            <a:spAutoFit/>
+          </a:bodyPr>
+          <a:lstStyle/>
+          <a:p>
+            <a:pPr algn="r"/>
+            <a:r>
+              <a:rPr sz="1800" b="0" i="0">
+                <a:solidFill>
+                  <a:srgbClr val="555555"/>
+                </a:solidFill>
+                <a:latin typeface="Noto Sans KR"/>
+              </a:rPr>
+              <a:t>×</a:t>
+            </a:r>
+          </a:p>
+        </p:txBody>
+      </p:sp>
+      <p:sp>
+        <p:nvSpPr>
+          <p:cNvPr id="4" name="TextBox 3"/>
+          <p:cNvSpPr txBox="1"/>
+          <p:nvPr/>
+        </p:nvSpPr>
+        <p:spPr>
+          <a:xfrm>
+            <a:off x="406400" y="317500"/>
+            <a:ext cx="381000" cy="190500"/>
+          </a:xfrm>
+          <a:prstGeom prst="rect">
+            <a:avLst/>
+          </a:prstGeom>
+          <a:noFill/>
+        </p:spPr>
+        <p:txBody>
+          <a:bodyPr wrap="square">
+            <a:spAutoFit/>
+          </a:bodyPr>
+          <a:lstStyle/>
+          <a:p>
+            <a:pPr algn="l"/>
+            <a:r>
+              <a:rPr sz="2000" b="1" i="0">
+                <a:solidFill>
+                  <a:srgbClr val="111111"/>
+                </a:solidFill>
+                <a:latin typeface="Noto Sans KR"/>
+              </a:rPr>
+              <a:t>01</a:t>
+            </a:r>
+          </a:p>
+        </p:txBody>
+      </p:sp>
+      <p:sp>
+        <p:nvSpPr>
+          <p:cNvPr id="5" name="TextBox 4"/>
+          <p:cNvSpPr txBox="1"/>
+          <p:nvPr/>
+        </p:nvSpPr>
+        <p:spPr>
+          <a:xfrm>
+            <a:off x="800100" y="342900"/>
+            <a:ext cx="7302500" cy="152400"/>
+          </a:xfrm>
+          <a:prstGeom prst="rect">
+            <a:avLst/>
+          </a:prstGeom>
+          <a:noFill/>
+        </p:spPr>
+        <p:txBody>
+          <a:bodyPr wrap="square">
+            <a:spAutoFit/>
+          </a:bodyPr>
+          <a:lstStyle/>
+          <a:p>
+            <a:pPr algn="l"/>
+            <a:r>
+              <a:rPr sz="1300" b="0" i="0">
+                <a:solidFill>
+                  <a:srgbClr val="333333"/>
+                </a:solidFill>
+                <a:latin typeface="Noto Sans KR"/>
+              </a:rPr>
+              <a:t>문제: 세 겹의 구조적 붕괴</a:t>
+            </a:r>
+          </a:p>
+        </p:txBody>
+      </p:sp>
+      <p:sp>
+        <p:nvSpPr>
+          <p:cNvPr id="6" name="Rectangle 5"/>
+          <p:cNvSpPr/>
+          <p:nvPr/>
+        </p:nvSpPr>
+        <p:spPr>
+          <a:xfrm>
+            <a:off x="406400" y="533400"/>
+            <a:ext cx="1841500" cy="25400"/>
+          </a:xfrm>
+          <a:prstGeom prst="rect">
+            <a:avLst/>
+          </a:prstGeom>
+          <a:solidFill>
+            <a:srgbClr val="111111"/>
+          </a:solidFill>
+          <a:ln>
+            <a:noFill/>
+          </a:ln>
+        </p:spPr>
+        <p:style>
+          <a:lnRef idx="1">
+            <a:schemeClr val="accent1"/>
+          </a:lnRef>
+          <a:fillRef idx="3">
+            <a:schemeClr val="accent1"/>
+          </a:fillRef>
+          <a:effectRef idx="2">
+            <a:schemeClr val="accent1"/>
+          </a:effectRef>
+          <a:fontRef idx="minor">
+            <a:schemeClr val="lt1"/>
+          </a:fontRef>
+        </p:style>
+        <p:txBody>
+          <a:bodyPr rtlCol="0" anchor="ctr"/>
+          <a:lstStyle/>
+          <a:p>
+            <a:pPr algn="ctr"/>
+          </a:p>
+        </p:txBody>
+      </p:sp>
+      <p:sp>
+        <p:nvSpPr>
+          <p:cNvPr id="7" name="Rectangle 6"/>
+          <p:cNvSpPr/>
+          <p:nvPr/>
+        </p:nvSpPr>
+        <p:spPr>
+          <a:xfrm>
+            <a:off x="2247900" y="546100"/>
+            <a:ext cx="6489700" cy="6350"/>
+          </a:xfrm>
+          <a:prstGeom prst="rect">
+            <a:avLst/>
+          </a:prstGeom>
+          <a:solidFill>
+            <a:srgbClr val="CCCCCC"/>
+          </a:solidFill>
+          <a:ln>
+            <a:noFill/>
+          </a:ln>
+        </p:spPr>
+        <p:style>
+          <a:lnRef idx="1">
+            <a:schemeClr val="accent1"/>
+          </a:lnRef>
+          <a:fillRef idx="3">
+            <a:schemeClr val="accent1"/>
+          </a:fillRef>
+          <a:effectRef idx="2">
+            <a:schemeClr val="accent1"/>
+          </a:effectRef>
+          <a:fontRef idx="minor">
+            <a:schemeClr val="lt1"/>
+          </a:fontRef>
+        </p:style>
+        <p:txBody>
+          <a:bodyPr rtlCol="0" anchor="ctr"/>
+          <a:lstStyle/>
+          <a:p>
+            <a:pPr algn="ctr"/>
+          </a:p>
+        </p:txBody>
+      </p:sp>
+      <p:sp>
+        <p:nvSpPr>
+          <p:cNvPr id="8" name="Rectangle 7"/>
+          <p:cNvSpPr/>
+          <p:nvPr/>
+        </p:nvSpPr>
+        <p:spPr>
+          <a:xfrm>
+            <a:off x="406400" y="723900"/>
+            <a:ext cx="25400" cy="393700"/>
+          </a:xfrm>
+          <a:prstGeom prst="rect">
+            <a:avLst/>
+          </a:prstGeom>
+          <a:solidFill>
+            <a:srgbClr val="111111"/>
+          </a:solidFill>
+          <a:ln>
+            <a:noFill/>
+          </a:ln>
+        </p:spPr>
+        <p:style>
+          <a:lnRef idx="1">
+            <a:schemeClr val="accent1"/>
+          </a:lnRef>
+          <a:fillRef idx="3">
+            <a:schemeClr val="accent1"/>
+          </a:fillRef>
+          <a:effectRef idx="2">
+            <a:schemeClr val="accent1"/>
+          </a:effectRef>
+          <a:fontRef idx="minor">
+            <a:schemeClr val="lt1"/>
+          </a:fontRef>
+        </p:style>
+        <p:txBody>
+          <a:bodyPr rtlCol="0" anchor="ctr"/>
+          <a:lstStyle/>
+          <a:p>
+            <a:pPr algn="ctr"/>
+          </a:p>
+        </p:txBody>
+      </p:sp>
+      <p:sp>
+        <p:nvSpPr>
+          <p:cNvPr id="9" name="TextBox 8"/>
+          <p:cNvSpPr txBox="1"/>
+          <p:nvPr/>
+        </p:nvSpPr>
+        <p:spPr>
+          <a:xfrm>
+            <a:off x="546100" y="723900"/>
+            <a:ext cx="4419600" cy="393700"/>
+          </a:xfrm>
+          <a:prstGeom prst="rect">
+            <a:avLst/>
+          </a:prstGeom>
+          <a:noFill/>
+        </p:spPr>
+        <p:txBody>
+          <a:bodyPr wrap="square">
+            <a:spAutoFit/>
+          </a:bodyPr>
+          <a:lstStyle/>
+          <a:p>
+            <a:r>
+              <a:rPr sz="1100" b="0" i="1">
+                <a:solidFill>
+                  <a:srgbClr val="444444"/>
+                </a:solidFill>
+                <a:latin typeface="Noto Sans KR"/>
+              </a:rPr>
+              <a:t>"GDP의 25%를 움직이는 산업이, 맥킨지 22개 산업 디지털화 지수에서 최하위다. 이것은 위기가 아니라 </a:t>
+            </a:r>
+            <a:r>
+              <a:rPr sz="1100" b="1" i="1">
+                <a:solidFill>
+                  <a:srgbClr val="111111"/>
+                </a:solidFill>
+                <a:latin typeface="Noto Sans KR"/>
+              </a:rPr>
+              <a:t>가장 큰 혁신 공백</a:t>
+            </a:r>
+            <a:r>
+              <a:rPr sz="1100" b="0" i="1">
+                <a:solidFill>
+                  <a:srgbClr val="444444"/>
+                </a:solidFill>
+                <a:latin typeface="Noto Sans KR"/>
+              </a:rPr>
+              <a:t>이다."</a:t>
+            </a:r>
+          </a:p>
+        </p:txBody>
+      </p:sp>
+      <p:sp>
+        <p:nvSpPr>
+          <p:cNvPr id="10" name="TextBox 9"/>
+          <p:cNvSpPr txBox="1"/>
+          <p:nvPr/>
+        </p:nvSpPr>
+        <p:spPr>
+          <a:xfrm>
+            <a:off x="406400" y="1104900"/>
+            <a:ext cx="419100" cy="495300"/>
+          </a:xfrm>
+          <a:prstGeom prst="rect">
+            <a:avLst/>
+          </a:prstGeom>
+          <a:noFill/>
+        </p:spPr>
+        <p:txBody>
+          <a:bodyPr wrap="square">
+            <a:spAutoFit/>
+          </a:bodyPr>
+          <a:lstStyle/>
+          <a:p>
+            <a:pPr algn="l"/>
+            <a:r>
+              <a:rPr sz="5400" b="1" i="0">
+                <a:solidFill>
+                  <a:srgbClr val="EBEBEB"/>
+                </a:solidFill>
+                <a:latin typeface="Noto Sans KR"/>
+              </a:rPr>
+              <a:t>1</a:t>
+            </a:r>
+          </a:p>
+        </p:txBody>
+      </p:sp>
+      <p:sp>
+        <p:nvSpPr>
+          <p:cNvPr id="11" name="TextBox 10"/>
+          <p:cNvSpPr txBox="1"/>
+          <p:nvPr/>
+        </p:nvSpPr>
+        <p:spPr>
+          <a:xfrm>
+            <a:off x="850900" y="1168400"/>
+            <a:ext cx="4127500" cy="139700"/>
+          </a:xfrm>
+          <a:prstGeom prst="rect">
+            <a:avLst/>
+          </a:prstGeom>
+          <a:noFill/>
+        </p:spPr>
+        <p:txBody>
+          <a:bodyPr wrap="square">
+            <a:spAutoFit/>
+          </a:bodyPr>
+          <a:lstStyle/>
+          <a:p>
+            <a:pPr algn="l"/>
+            <a:r>
+              <a:rPr sz="1400" b="1" i="0">
+                <a:solidFill>
+                  <a:srgbClr val="111111"/>
+                </a:solidFill>
+                <a:latin typeface="Noto Sans KR"/>
+              </a:rPr>
+              <a:t>설계는 진화, 현장은 30년째 정체</a:t>
+            </a:r>
+          </a:p>
+        </p:txBody>
+      </p:sp>
+      <p:sp>
+        <p:nvSpPr>
+          <p:cNvPr id="12" name="TextBox 11"/>
+          <p:cNvSpPr txBox="1"/>
+          <p:nvPr/>
+        </p:nvSpPr>
+        <p:spPr>
+          <a:xfrm>
+            <a:off x="850900" y="1320800"/>
+            <a:ext cx="4127500" cy="444500"/>
+          </a:xfrm>
+          <a:prstGeom prst="rect">
+            <a:avLst/>
+          </a:prstGeom>
+          <a:noFill/>
+        </p:spPr>
+        <p:txBody>
+          <a:bodyPr wrap="square">
+            <a:spAutoFit/>
+          </a:bodyPr>
+          <a:lstStyle/>
+          <a:p>
+            <a:pPr algn="l"/>
+            <a:r>
+              <a:rPr sz="1150" b="0" i="0">
+                <a:solidFill>
+                  <a:srgbClr val="555555"/>
+                </a:solidFill>
+                <a:latin typeface="Noto Sans KR"/>
+              </a:rPr>
+              <a:t>BIM·생성형AI로 설계가 mm 단위로 정밀해질수록 현장과의 간극은 더 벌어진다. 맥킨지 22개 산업 중 건설 최하위권 — 디지털 전환 체감 0%.</a:t>
+            </a:r>
+          </a:p>
+        </p:txBody>
+      </p:sp>
+      <p:sp>
+        <p:nvSpPr>
+          <p:cNvPr id="13" name="TextBox 12"/>
+          <p:cNvSpPr txBox="1"/>
+          <p:nvPr/>
+        </p:nvSpPr>
+        <p:spPr>
+          <a:xfrm>
+            <a:off x="406400" y="2089150"/>
+            <a:ext cx="419100" cy="495300"/>
+          </a:xfrm>
+          <a:prstGeom prst="rect">
+            <a:avLst/>
+          </a:prstGeom>
+          <a:noFill/>
+        </p:spPr>
+        <p:txBody>
+          <a:bodyPr wrap="square">
+            <a:spAutoFit/>
+          </a:bodyPr>
+          <a:lstStyle/>
+          <a:p>
+            <a:pPr algn="l"/>
+            <a:r>
+              <a:rPr sz="5400" b="1" i="0">
+                <a:solidFill>
+                  <a:srgbClr val="EBEBEB"/>
+                </a:solidFill>
+                <a:latin typeface="Noto Sans KR"/>
+              </a:rPr>
+              <a:t>2</a:t>
+            </a:r>
+          </a:p>
+        </p:txBody>
+      </p:sp>
+      <p:sp>
+        <p:nvSpPr>
+          <p:cNvPr id="14" name="TextBox 13"/>
+          <p:cNvSpPr txBox="1"/>
+          <p:nvPr/>
+        </p:nvSpPr>
+        <p:spPr>
+          <a:xfrm>
+            <a:off x="850900" y="2152650"/>
+            <a:ext cx="4127500" cy="139700"/>
+          </a:xfrm>
+          <a:prstGeom prst="rect">
+            <a:avLst/>
+          </a:prstGeom>
+          <a:noFill/>
+        </p:spPr>
+        <p:txBody>
+          <a:bodyPr wrap="square">
+            <a:spAutoFit/>
+          </a:bodyPr>
+          <a:lstStyle/>
+          <a:p>
+            <a:pPr algn="l"/>
+            <a:r>
+              <a:rPr sz="1400" b="1" i="0">
+                <a:solidFill>
+                  <a:srgbClr val="111111"/>
+                </a:solidFill>
+                <a:latin typeface="Noto Sans KR"/>
+              </a:rPr>
+              <a:t>현장 인력 구조의 이중 위기</a:t>
+            </a:r>
+          </a:p>
+        </p:txBody>
+      </p:sp>
+      <p:sp>
+        <p:nvSpPr>
+          <p:cNvPr id="15" name="TextBox 14"/>
+          <p:cNvSpPr txBox="1"/>
+          <p:nvPr/>
+        </p:nvSpPr>
+        <p:spPr>
+          <a:xfrm>
+            <a:off x="850900" y="2305050"/>
+            <a:ext cx="4127500" cy="444500"/>
+          </a:xfrm>
+          <a:prstGeom prst="rect">
+            <a:avLst/>
+          </a:prstGeom>
+          <a:noFill/>
+        </p:spPr>
+        <p:txBody>
+          <a:bodyPr wrap="square">
+            <a:spAutoFit/>
+          </a:bodyPr>
+          <a:lstStyle/>
+          <a:p>
+            <a:pPr algn="l"/>
+            <a:r>
+              <a:rPr sz="1150" b="0" i="0">
+                <a:solidFill>
+                  <a:srgbClr val="555555"/>
+                </a:solidFill>
+                <a:latin typeface="Noto Sans KR"/>
+              </a:rPr>
+              <a:t>기능인력 평균 54세 → 숙련 절벽 / 외국인 비중 25~30% → 언어 장벽. 반도체 불량은 교체하면 되지만, 시공 불량은 그 안에서 사는 사람들의 30년에 남는다.</a:t>
+            </a:r>
+          </a:p>
+        </p:txBody>
+      </p:sp>
+      <p:sp>
+        <p:nvSpPr>
+          <p:cNvPr id="16" name="TextBox 15"/>
+          <p:cNvSpPr txBox="1"/>
+          <p:nvPr/>
+        </p:nvSpPr>
+        <p:spPr>
+          <a:xfrm>
+            <a:off x="406400" y="3073400"/>
+            <a:ext cx="419100" cy="495300"/>
+          </a:xfrm>
+          <a:prstGeom prst="rect">
+            <a:avLst/>
+          </a:prstGeom>
+          <a:noFill/>
+        </p:spPr>
+        <p:txBody>
+          <a:bodyPr wrap="square">
+            <a:spAutoFit/>
+          </a:bodyPr>
+          <a:lstStyle/>
+          <a:p>
+            <a:pPr algn="l"/>
+            <a:r>
+              <a:rPr sz="5400" b="1" i="0">
+                <a:solidFill>
+                  <a:srgbClr val="EBEBEB"/>
+                </a:solidFill>
+                <a:latin typeface="Noto Sans KR"/>
+              </a:rPr>
+              <a:t>3</a:t>
+            </a:r>
+          </a:p>
+        </p:txBody>
+      </p:sp>
+      <p:sp>
+        <p:nvSpPr>
+          <p:cNvPr id="17" name="TextBox 16"/>
+          <p:cNvSpPr txBox="1"/>
+          <p:nvPr/>
+        </p:nvSpPr>
+        <p:spPr>
+          <a:xfrm>
+            <a:off x="850900" y="3136900"/>
+            <a:ext cx="4127500" cy="139700"/>
+          </a:xfrm>
+          <a:prstGeom prst="rect">
+            <a:avLst/>
+          </a:prstGeom>
+          <a:noFill/>
+        </p:spPr>
+        <p:txBody>
+          <a:bodyPr wrap="square">
+            <a:spAutoFit/>
+          </a:bodyPr>
+          <a:lstStyle/>
+          <a:p>
+            <a:pPr algn="l"/>
+            <a:r>
+              <a:rPr sz="1400" b="1" i="0">
+                <a:solidFill>
+                  <a:srgbClr val="111111"/>
+                </a:solidFill>
+                <a:latin typeface="Noto Sans KR"/>
+              </a:rPr>
+              <a:t>공공건물 품질 붕괴</a:t>
+            </a:r>
+          </a:p>
+        </p:txBody>
+      </p:sp>
+      <p:sp>
+        <p:nvSpPr>
+          <p:cNvPr id="18" name="TextBox 17"/>
+          <p:cNvSpPr txBox="1"/>
+          <p:nvPr/>
+        </p:nvSpPr>
+        <p:spPr>
+          <a:xfrm>
+            <a:off x="850900" y="3289300"/>
+            <a:ext cx="4127500" cy="444500"/>
+          </a:xfrm>
+          <a:prstGeom prst="rect">
+            <a:avLst/>
+          </a:prstGeom>
+          <a:noFill/>
+        </p:spPr>
+        <p:txBody>
+          <a:bodyPr wrap="square">
+            <a:spAutoFit/>
+          </a:bodyPr>
+          <a:lstStyle/>
+          <a:p>
+            <a:pPr algn="l"/>
+            <a:r>
+              <a:rPr sz="1150" b="0" i="0">
+                <a:solidFill>
+                  <a:srgbClr val="555555"/>
+                </a:solidFill>
+                <a:latin typeface="Noto Sans KR"/>
+              </a:rPr>
+              <a:t>공공설계 당선작이 발주·시공에서 의도가 훼손된다. GDP 20~25%를 움직이는 산업의 품질이 곧 시민의 삶의 질이다.</a:t>
+            </a:r>
+          </a:p>
+        </p:txBody>
+      </p:sp>
+      <p:sp>
+        <p:nvSpPr>
+          <p:cNvPr id="19" name="Rectangle 18"/>
+          <p:cNvSpPr/>
+          <p:nvPr/>
+        </p:nvSpPr>
+        <p:spPr>
+          <a:xfrm>
+            <a:off x="5130800" y="723900"/>
+            <a:ext cx="6350" cy="4064000"/>
+          </a:xfrm>
+          <a:prstGeom prst="rect">
+            <a:avLst/>
+          </a:prstGeom>
+          <a:solidFill>
+            <a:srgbClr val="E0E0E0"/>
+          </a:solidFill>
+          <a:ln>
+            <a:noFill/>
+          </a:ln>
+        </p:spPr>
+        <p:style>
+          <a:lnRef idx="1">
+            <a:schemeClr val="accent1"/>
+          </a:lnRef>
+          <a:fillRef idx="3">
+            <a:schemeClr val="accent1"/>
+          </a:fillRef>
+          <a:effectRef idx="2">
+            <a:schemeClr val="accent1"/>
+          </a:effectRef>
+          <a:fontRef idx="minor">
+            <a:schemeClr val="lt1"/>
+          </a:fontRef>
+        </p:style>
+        <p:txBody>
+          <a:bodyPr rtlCol="0" anchor="ctr"/>
+          <a:lstStyle/>
+          <a:p>
+            <a:pPr algn="ctr"/>
+          </a:p>
+        </p:txBody>
+      </p:sp>
+      <p:sp>
+        <p:nvSpPr>
+          <p:cNvPr id="20" name="Rectangle 19"/>
+          <p:cNvSpPr/>
+          <p:nvPr/>
+        </p:nvSpPr>
+        <p:spPr>
+          <a:xfrm>
+            <a:off x="5245100" y="723900"/>
+            <a:ext cx="3492500" cy="812800"/>
+          </a:xfrm>
+          <a:prstGeom prst="rect">
+            <a:avLst/>
+          </a:prstGeom>
+          <a:solidFill>
+            <a:srgbClr val="F8F8F8"/>
+          </a:solidFill>
+          <a:ln>
+            <a:noFill/>
+          </a:ln>
+        </p:spPr>
+        <p:style>
+          <a:lnRef idx="1">
+            <a:schemeClr val="accent1"/>
+          </a:lnRef>
+          <a:fillRef idx="3">
+            <a:schemeClr val="accent1"/>
+          </a:fillRef>
+          <a:effectRef idx="2">
+            <a:schemeClr val="accent1"/>
+          </a:effectRef>
+          <a:fontRef idx="minor">
+            <a:schemeClr val="lt1"/>
+          </a:fontRef>
+        </p:style>
+        <p:txBody>
+          <a:bodyPr rtlCol="0" anchor="ctr"/>
+          <a:lstStyle/>
+          <a:p>
+            <a:pPr algn="ctr"/>
+          </a:p>
+        </p:txBody>
+      </p:sp>
+      <p:sp>
+        <p:nvSpPr>
+          <p:cNvPr id="21" name="TextBox 20"/>
+          <p:cNvSpPr txBox="1"/>
+          <p:nvPr/>
+        </p:nvSpPr>
+        <p:spPr>
+          <a:xfrm>
+            <a:off x="5308600" y="787400"/>
+            <a:ext cx="3365500" cy="88900"/>
+          </a:xfrm>
+          <a:prstGeom prst="rect">
+            <a:avLst/>
+          </a:prstGeom>
+          <a:noFill/>
+        </p:spPr>
+        <p:txBody>
+          <a:bodyPr wrap="square">
+            <a:spAutoFit/>
+          </a:bodyPr>
+          <a:lstStyle/>
+          <a:p>
+            <a:pPr algn="l"/>
+            <a:r>
+              <a:rPr sz="800" b="1" i="0">
+                <a:solidFill>
+                  <a:srgbClr val="999999"/>
+                </a:solidFill>
+                <a:latin typeface="Noto Sans KR"/>
+              </a:rPr>
+              <a:t>건물 수명 비교 — 자산 vs 소비재</a:t>
+            </a:r>
+          </a:p>
+        </p:txBody>
+      </p:sp>
+      <p:sp>
+        <p:nvSpPr>
+          <p:cNvPr id="22" name="TextBox 21"/>
+          <p:cNvSpPr txBox="1"/>
+          <p:nvPr/>
+        </p:nvSpPr>
+        <p:spPr>
+          <a:xfrm>
+            <a:off x="5308600" y="927100"/>
+            <a:ext cx="317500" cy="101600"/>
+          </a:xfrm>
+          <a:prstGeom prst="rect">
+            <a:avLst/>
+          </a:prstGeom>
+          <a:noFill/>
+        </p:spPr>
+        <p:txBody>
+          <a:bodyPr wrap="square">
+            <a:spAutoFit/>
+          </a:bodyPr>
+          <a:lstStyle/>
+          <a:p>
+            <a:pPr algn="l"/>
+            <a:r>
+              <a:rPr sz="900" b="1" i="0">
+                <a:solidFill>
+                  <a:srgbClr val="444444"/>
+                </a:solidFill>
+                <a:latin typeface="Noto Sans KR"/>
+              </a:rPr>
+              <a:t>유럽</a:t>
+            </a:r>
+          </a:p>
+        </p:txBody>
+      </p:sp>
+      <p:sp>
+        <p:nvSpPr>
+          <p:cNvPr id="23" name="Rectangle 22"/>
+          <p:cNvSpPr/>
+          <p:nvPr/>
+        </p:nvSpPr>
+        <p:spPr>
+          <a:xfrm>
+            <a:off x="5651500" y="927100"/>
+            <a:ext cx="3022600" cy="107950"/>
+          </a:xfrm>
+          <a:prstGeom prst="rect">
+            <a:avLst/>
+          </a:prstGeom>
+          <a:solidFill>
+            <a:srgbClr val="111111"/>
+          </a:solidFill>
+          <a:ln>
+            <a:noFill/>
+          </a:ln>
+        </p:spPr>
+        <p:style>
+          <a:lnRef idx="1">
+            <a:schemeClr val="accent1"/>
+          </a:lnRef>
+          <a:fillRef idx="3">
+            <a:schemeClr val="accent1"/>
+          </a:fillRef>
+          <a:effectRef idx="2">
+            <a:schemeClr val="accent1"/>
+          </a:effectRef>
+          <a:fontRef idx="minor">
+            <a:schemeClr val="lt1"/>
+          </a:fontRef>
+        </p:style>
+        <p:txBody>
+          <a:bodyPr rtlCol="0" anchor="ctr"/>
+          <a:lstStyle/>
+          <a:p>
+            <a:pPr algn="ctr"/>
+          </a:p>
+        </p:txBody>
+      </p:sp>
+      <p:sp>
+        <p:nvSpPr>
+          <p:cNvPr id="24" name="TextBox 23"/>
+          <p:cNvSpPr txBox="1"/>
+          <p:nvPr/>
+        </p:nvSpPr>
+        <p:spPr>
+          <a:xfrm>
+            <a:off x="5676900" y="939800"/>
+            <a:ext cx="508000" cy="88900"/>
+          </a:xfrm>
+          <a:prstGeom prst="rect">
+            <a:avLst/>
+          </a:prstGeom>
+          <a:noFill/>
+        </p:spPr>
+        <p:txBody>
+          <a:bodyPr wrap="square">
+            <a:spAutoFit/>
+          </a:bodyPr>
+          <a:lstStyle/>
+          <a:p>
+            <a:pPr algn="l"/>
+            <a:r>
+              <a:rPr sz="800" b="1" i="0">
+                <a:solidFill>
+                  <a:srgbClr val="FFFFFF"/>
+                </a:solidFill>
+                <a:latin typeface="Noto Sans KR"/>
+              </a:rPr>
+              <a:t>100년+</a:t>
+            </a:r>
+          </a:p>
+        </p:txBody>
+      </p:sp>
+      <p:sp>
+        <p:nvSpPr>
+          <p:cNvPr id="25" name="TextBox 24"/>
+          <p:cNvSpPr txBox="1"/>
+          <p:nvPr/>
+        </p:nvSpPr>
+        <p:spPr>
+          <a:xfrm>
+            <a:off x="5308600" y="1073150"/>
+            <a:ext cx="317500" cy="101600"/>
+          </a:xfrm>
+          <a:prstGeom prst="rect">
+            <a:avLst/>
+          </a:prstGeom>
+          <a:noFill/>
+        </p:spPr>
+        <p:txBody>
+          <a:bodyPr wrap="square">
+            <a:spAutoFit/>
+          </a:bodyPr>
+          <a:lstStyle/>
+          <a:p>
+            <a:pPr algn="l"/>
+            <a:r>
+              <a:rPr sz="900" b="1" i="0">
+                <a:solidFill>
+                  <a:srgbClr val="444444"/>
+                </a:solidFill>
+                <a:latin typeface="Noto Sans KR"/>
+              </a:rPr>
+              <a:t>한국</a:t>
+            </a:r>
+          </a:p>
+        </p:txBody>
+      </p:sp>
+      <p:sp>
+        <p:nvSpPr>
+          <p:cNvPr id="26" name="Rectangle 25"/>
+          <p:cNvSpPr/>
+          <p:nvPr/>
+        </p:nvSpPr>
+        <p:spPr>
+          <a:xfrm>
+            <a:off x="5651500" y="1073150"/>
+            <a:ext cx="901700" cy="107950"/>
+          </a:xfrm>
+          <a:prstGeom prst="rect">
+            <a:avLst/>
+          </a:prstGeom>
+          <a:solidFill>
+            <a:srgbClr val="BBBBBB"/>
+          </a:solidFill>
+          <a:ln>
+            <a:noFill/>
+          </a:ln>
+        </p:spPr>
+        <p:style>
+          <a:lnRef idx="1">
+            <a:schemeClr val="accent1"/>
+          </a:lnRef>
+          <a:fillRef idx="3">
+            <a:schemeClr val="accent1"/>
+          </a:fillRef>
+          <a:effectRef idx="2">
+            <a:schemeClr val="accent1"/>
+          </a:effectRef>
+          <a:fontRef idx="minor">
+            <a:schemeClr val="lt1"/>
+          </a:fontRef>
+        </p:style>
+        <p:txBody>
+          <a:bodyPr rtlCol="0" anchor="ctr"/>
+          <a:lstStyle/>
+          <a:p>
+            <a:pPr algn="ctr"/>
+          </a:p>
+        </p:txBody>
+      </p:sp>
+      <p:sp>
+        <p:nvSpPr>
+          <p:cNvPr id="27" name="TextBox 26"/>
+          <p:cNvSpPr txBox="1"/>
+          <p:nvPr/>
+        </p:nvSpPr>
+        <p:spPr>
+          <a:xfrm>
+            <a:off x="6584950" y="1085850"/>
+            <a:ext cx="317500" cy="82550"/>
+          </a:xfrm>
+          <a:prstGeom prst="rect">
+            <a:avLst/>
+          </a:prstGeom>
+          <a:noFill/>
+        </p:spPr>
+        <p:txBody>
+          <a:bodyPr wrap="square">
+            <a:spAutoFit/>
+          </a:bodyPr>
+          <a:lstStyle/>
+          <a:p>
+            <a:pPr algn="l"/>
+            <a:r>
+              <a:rPr sz="800" b="0" i="0">
+                <a:solidFill>
+                  <a:srgbClr val="555555"/>
+                </a:solidFill>
+                <a:latin typeface="Noto Sans KR"/>
+              </a:rPr>
+              <a:t>~30년</a:t>
+            </a:r>
+          </a:p>
+        </p:txBody>
+      </p:sp>
+      <p:sp>
+        <p:nvSpPr>
+          <p:cNvPr id="28" name="TextBox 27"/>
+          <p:cNvSpPr txBox="1"/>
+          <p:nvPr/>
+        </p:nvSpPr>
+        <p:spPr>
+          <a:xfrm>
+            <a:off x="5308600" y="1339850"/>
+            <a:ext cx="3365500" cy="127000"/>
+          </a:xfrm>
+          <a:prstGeom prst="rect">
+            <a:avLst/>
+          </a:prstGeom>
+          <a:noFill/>
+        </p:spPr>
+        <p:txBody>
+          <a:bodyPr wrap="square">
+            <a:spAutoFit/>
+          </a:bodyPr>
+          <a:lstStyle/>
+          <a:p>
+            <a:pPr algn="l"/>
+            <a:r>
+              <a:rPr sz="900" b="0" i="1">
+                <a:solidFill>
+                  <a:srgbClr val="AAAAAA"/>
+                </a:solidFill>
+                <a:latin typeface="Noto Sans KR"/>
+              </a:rPr>
+              <a:t>수명 차이 = 내구성 아닌 설계의도 전달 여부</a:t>
+            </a:r>
+          </a:p>
+        </p:txBody>
+      </p:sp>
+      <p:sp>
+        <p:nvSpPr>
+          <p:cNvPr id="29" name="Rectangle 28"/>
+          <p:cNvSpPr/>
+          <p:nvPr/>
+        </p:nvSpPr>
+        <p:spPr>
+          <a:xfrm>
+            <a:off x="5245100" y="1612900"/>
+            <a:ext cx="3492500" cy="965200"/>
+          </a:xfrm>
+          <a:prstGeom prst="rect">
+            <a:avLst/>
+          </a:prstGeom>
+          <a:solidFill>
+            <a:srgbClr val="F8F8F8"/>
+          </a:solidFill>
+          <a:ln>
+            <a:noFill/>
+          </a:ln>
+        </p:spPr>
+        <p:style>
+          <a:lnRef idx="1">
+            <a:schemeClr val="accent1"/>
+          </a:lnRef>
+          <a:fillRef idx="3">
+            <a:schemeClr val="accent1"/>
+          </a:fillRef>
+          <a:effectRef idx="2">
+            <a:schemeClr val="accent1"/>
+          </a:effectRef>
+          <a:fontRef idx="minor">
+            <a:schemeClr val="lt1"/>
+          </a:fontRef>
+        </p:style>
+        <p:txBody>
+          <a:bodyPr rtlCol="0" anchor="ctr"/>
+          <a:lstStyle/>
+          <a:p>
+            <a:pPr algn="ctr"/>
+          </a:p>
+        </p:txBody>
+      </p:sp>
+      <p:sp>
+        <p:nvSpPr>
+          <p:cNvPr id="30" name="TextBox 29"/>
+          <p:cNvSpPr txBox="1"/>
+          <p:nvPr/>
+        </p:nvSpPr>
+        <p:spPr>
+          <a:xfrm>
+            <a:off x="5308600" y="1676400"/>
+            <a:ext cx="3365500" cy="88900"/>
+          </a:xfrm>
+          <a:prstGeom prst="rect">
+            <a:avLst/>
+          </a:prstGeom>
+          <a:noFill/>
+        </p:spPr>
+        <p:txBody>
+          <a:bodyPr wrap="square">
+            <a:spAutoFit/>
+          </a:bodyPr>
+          <a:lstStyle/>
+          <a:p>
+            <a:pPr algn="l"/>
+            <a:r>
+              <a:rPr sz="800" b="1" i="0">
+                <a:solidFill>
+                  <a:srgbClr val="999999"/>
+                </a:solidFill>
+                <a:latin typeface="Noto Sans KR"/>
+              </a:rPr>
+              <a:t>산업별 디지털화 지수 (McKinsey, 22개 산업)</a:t>
+            </a:r>
+          </a:p>
+        </p:txBody>
+      </p:sp>
+      <p:sp>
+        <p:nvSpPr>
+          <p:cNvPr id="31" name="TextBox 30"/>
+          <p:cNvSpPr txBox="1"/>
+          <p:nvPr/>
+        </p:nvSpPr>
+        <p:spPr>
+          <a:xfrm>
+            <a:off x="5308600" y="1816100"/>
+            <a:ext cx="393700" cy="88900"/>
+          </a:xfrm>
+          <a:prstGeom prst="rect">
+            <a:avLst/>
+          </a:prstGeom>
+          <a:noFill/>
+        </p:spPr>
+        <p:txBody>
+          <a:bodyPr wrap="square">
+            <a:spAutoFit/>
+          </a:bodyPr>
+          <a:lstStyle/>
+          <a:p>
+            <a:pPr algn="l"/>
+            <a:r>
+              <a:rPr sz="900" b="0" i="0">
+                <a:solidFill>
+                  <a:srgbClr val="444444"/>
+                </a:solidFill>
+                <a:latin typeface="Noto Sans KR"/>
+              </a:rPr>
+              <a:t>ICT</a:t>
+            </a:r>
+          </a:p>
+        </p:txBody>
+      </p:sp>
+      <p:sp>
+        <p:nvSpPr>
+          <p:cNvPr id="32" name="Rectangle 31"/>
+          <p:cNvSpPr/>
+          <p:nvPr/>
+        </p:nvSpPr>
+        <p:spPr>
+          <a:xfrm>
+            <a:off x="5727700" y="1822450"/>
+            <a:ext cx="2857500" cy="82550"/>
+          </a:xfrm>
+          <a:prstGeom prst="rect">
+            <a:avLst/>
+          </a:prstGeom>
+          <a:solidFill>
+            <a:srgbClr val="EFEFEF"/>
+          </a:solidFill>
+          <a:ln>
+            <a:noFill/>
+          </a:ln>
+        </p:spPr>
+        <p:style>
+          <a:lnRef idx="1">
+            <a:schemeClr val="accent1"/>
+          </a:lnRef>
+          <a:fillRef idx="3">
+            <a:schemeClr val="accent1"/>
+          </a:fillRef>
+          <a:effectRef idx="2">
+            <a:schemeClr val="accent1"/>
+          </a:effectRef>
+          <a:fontRef idx="minor">
+            <a:schemeClr val="lt1"/>
+          </a:fontRef>
+        </p:style>
+        <p:txBody>
+          <a:bodyPr rtlCol="0" anchor="ctr"/>
+          <a:lstStyle/>
+          <a:p>
+            <a:pPr algn="ctr"/>
+          </a:p>
+        </p:txBody>
+      </p:sp>
+      <p:sp>
+        <p:nvSpPr>
+          <p:cNvPr id="33" name="Rectangle 32"/>
+          <p:cNvSpPr/>
+          <p:nvPr/>
+        </p:nvSpPr>
+        <p:spPr>
+          <a:xfrm>
+            <a:off x="5727700" y="1822450"/>
+            <a:ext cx="2857500" cy="82550"/>
+          </a:xfrm>
+          <a:prstGeom prst="rect">
+            <a:avLst/>
+          </a:prstGeom>
+          <a:solidFill>
+            <a:srgbClr val="111111"/>
+          </a:solidFill>
+          <a:ln>
+            <a:noFill/>
+          </a:ln>
+        </p:spPr>
+        <p:style>
+          <a:lnRef idx="1">
+            <a:schemeClr val="accent1"/>
+          </a:lnRef>
+          <a:fillRef idx="3">
+            <a:schemeClr val="accent1"/>
+          </a:fillRef>
+          <a:effectRef idx="2">
+            <a:schemeClr val="accent1"/>
+          </a:effectRef>
+          <a:fontRef idx="minor">
+            <a:schemeClr val="lt1"/>
+          </a:fontRef>
+        </p:style>
+        <p:txBody>
+          <a:bodyPr rtlCol="0" anchor="ctr"/>
+          <a:lstStyle/>
+          <a:p>
+            <a:pPr algn="ctr"/>
+          </a:p>
+        </p:txBody>
+      </p:sp>
+      <p:sp>
+        <p:nvSpPr>
+          <p:cNvPr id="34" name="TextBox 33"/>
+          <p:cNvSpPr txBox="1"/>
+          <p:nvPr/>
+        </p:nvSpPr>
+        <p:spPr>
+          <a:xfrm>
+            <a:off x="8616950" y="1816100"/>
+            <a:ext cx="228600" cy="88900"/>
+          </a:xfrm>
+          <a:prstGeom prst="rect">
+            <a:avLst/>
+          </a:prstGeom>
+          <a:noFill/>
+        </p:spPr>
+        <p:txBody>
+          <a:bodyPr wrap="square">
+            <a:spAutoFit/>
+          </a:bodyPr>
+          <a:lstStyle/>
+          <a:p>
+            <a:pPr algn="l"/>
+            <a:r>
+              <a:rPr sz="900" b="0" i="0">
+                <a:solidFill>
+                  <a:srgbClr val="888888"/>
+                </a:solidFill>
+                <a:latin typeface="Noto Sans KR"/>
+              </a:rPr>
+              <a:t>100%</a:t>
+            </a:r>
+          </a:p>
+        </p:txBody>
+      </p:sp>
+      <p:sp>
+        <p:nvSpPr>
+          <p:cNvPr id="35" name="TextBox 34"/>
+          <p:cNvSpPr txBox="1"/>
+          <p:nvPr/>
+        </p:nvSpPr>
+        <p:spPr>
+          <a:xfrm>
+            <a:off x="5308600" y="1955800"/>
+            <a:ext cx="393700" cy="88900"/>
+          </a:xfrm>
+          <a:prstGeom prst="rect">
+            <a:avLst/>
+          </a:prstGeom>
+          <a:noFill/>
+        </p:spPr>
+        <p:txBody>
+          <a:bodyPr wrap="square">
+            <a:spAutoFit/>
+          </a:bodyPr>
+          <a:lstStyle/>
+          <a:p>
+            <a:pPr algn="l"/>
+            <a:r>
+              <a:rPr sz="900" b="0" i="0">
+                <a:solidFill>
+                  <a:srgbClr val="444444"/>
+                </a:solidFill>
+                <a:latin typeface="Noto Sans KR"/>
+              </a:rPr>
+              <a:t>금융</a:t>
+            </a:r>
+          </a:p>
+        </p:txBody>
+      </p:sp>
+      <p:sp>
+        <p:nvSpPr>
+          <p:cNvPr id="36" name="Rectangle 35"/>
+          <p:cNvSpPr/>
+          <p:nvPr/>
+        </p:nvSpPr>
+        <p:spPr>
+          <a:xfrm>
+            <a:off x="5727700" y="1962150"/>
+            <a:ext cx="2857500" cy="82550"/>
+          </a:xfrm>
+          <a:prstGeom prst="rect">
+            <a:avLst/>
+          </a:prstGeom>
+          <a:solidFill>
+            <a:srgbClr val="EFEFEF"/>
+          </a:solidFill>
+          <a:ln>
+            <a:noFill/>
+          </a:ln>
+        </p:spPr>
+        <p:style>
+          <a:lnRef idx="1">
+            <a:schemeClr val="accent1"/>
+          </a:lnRef>
+          <a:fillRef idx="3">
+            <a:schemeClr val="accent1"/>
+          </a:fillRef>
+          <a:effectRef idx="2">
+            <a:schemeClr val="accent1"/>
+          </a:effectRef>
+          <a:fontRef idx="minor">
+            <a:schemeClr val="lt1"/>
+          </a:fontRef>
+        </p:style>
+        <p:txBody>
+          <a:bodyPr rtlCol="0" anchor="ctr"/>
+          <a:lstStyle/>
+          <a:p>
+            <a:pPr algn="ctr"/>
+          </a:p>
+        </p:txBody>
+      </p:sp>
+      <p:sp>
+        <p:nvSpPr>
+          <p:cNvPr id="37" name="Rectangle 36"/>
+          <p:cNvSpPr/>
+          <p:nvPr/>
+        </p:nvSpPr>
+        <p:spPr>
+          <a:xfrm>
+            <a:off x="5727700" y="1962150"/>
+            <a:ext cx="2082800" cy="82550"/>
+          </a:xfrm>
+          <a:prstGeom prst="rect">
+            <a:avLst/>
+          </a:prstGeom>
+          <a:solidFill>
+            <a:srgbClr val="555555"/>
+          </a:solidFill>
+          <a:ln>
+            <a:noFill/>
+          </a:ln>
+        </p:spPr>
+        <p:style>
+          <a:lnRef idx="1">
+            <a:schemeClr val="accent1"/>
+          </a:lnRef>
+          <a:fillRef idx="3">
+            <a:schemeClr val="accent1"/>
+          </a:fillRef>
+          <a:effectRef idx="2">
+            <a:schemeClr val="accent1"/>
+          </a:effectRef>
+          <a:fontRef idx="minor">
+            <a:schemeClr val="lt1"/>
+          </a:fontRef>
+        </p:style>
+        <p:txBody>
+          <a:bodyPr rtlCol="0" anchor="ctr"/>
+          <a:lstStyle/>
+          <a:p>
+            <a:pPr algn="ctr"/>
+          </a:p>
+        </p:txBody>
+      </p:sp>
+      <p:sp>
+        <p:nvSpPr>
+          <p:cNvPr id="38" name="TextBox 37"/>
+          <p:cNvSpPr txBox="1"/>
+          <p:nvPr/>
+        </p:nvSpPr>
+        <p:spPr>
+          <a:xfrm>
+            <a:off x="8616950" y="1955800"/>
+            <a:ext cx="228600" cy="88900"/>
+          </a:xfrm>
+          <a:prstGeom prst="rect">
+            <a:avLst/>
+          </a:prstGeom>
+          <a:noFill/>
+        </p:spPr>
+        <p:txBody>
+          <a:bodyPr wrap="square">
+            <a:spAutoFit/>
+          </a:bodyPr>
+          <a:lstStyle/>
+          <a:p>
+            <a:pPr algn="l"/>
+            <a:r>
+              <a:rPr sz="900" b="0" i="0">
+                <a:solidFill>
+                  <a:srgbClr val="888888"/>
+                </a:solidFill>
+                <a:latin typeface="Noto Sans KR"/>
+              </a:rPr>
+              <a:t>73%</a:t>
+            </a:r>
+          </a:p>
+        </p:txBody>
+      </p:sp>
+      <p:sp>
+        <p:nvSpPr>
+          <p:cNvPr id="39" name="TextBox 38"/>
+          <p:cNvSpPr txBox="1"/>
+          <p:nvPr/>
+        </p:nvSpPr>
+        <p:spPr>
+          <a:xfrm>
+            <a:off x="5308600" y="2095500"/>
+            <a:ext cx="393700" cy="88900"/>
+          </a:xfrm>
+          <a:prstGeom prst="rect">
+            <a:avLst/>
+          </a:prstGeom>
+          <a:noFill/>
+        </p:spPr>
+        <p:txBody>
+          <a:bodyPr wrap="square">
+            <a:spAutoFit/>
+          </a:bodyPr>
+          <a:lstStyle/>
+          <a:p>
+            <a:pPr algn="l"/>
+            <a:r>
+              <a:rPr sz="900" b="0" i="0">
+                <a:solidFill>
+                  <a:srgbClr val="444444"/>
+                </a:solidFill>
+                <a:latin typeface="Noto Sans KR"/>
+              </a:rPr>
+              <a:t>제조</a:t>
+            </a:r>
+          </a:p>
+        </p:txBody>
+      </p:sp>
+      <p:sp>
+        <p:nvSpPr>
+          <p:cNvPr id="40" name="Rectangle 39"/>
+          <p:cNvSpPr/>
+          <p:nvPr/>
+        </p:nvSpPr>
+        <p:spPr>
+          <a:xfrm>
+            <a:off x="5727700" y="2101850"/>
+            <a:ext cx="2857500" cy="82550"/>
+          </a:xfrm>
+          <a:prstGeom prst="rect">
+            <a:avLst/>
+          </a:prstGeom>
+          <a:solidFill>
+            <a:srgbClr val="EFEFEF"/>
+          </a:solidFill>
+          <a:ln>
+            <a:noFill/>
+          </a:ln>
+        </p:spPr>
+        <p:style>
+          <a:lnRef idx="1">
+            <a:schemeClr val="accent1"/>
+          </a:lnRef>
+          <a:fillRef idx="3">
+            <a:schemeClr val="accent1"/>
+          </a:fillRef>
+          <a:effectRef idx="2">
+            <a:schemeClr val="accent1"/>
+          </a:effectRef>
+          <a:fontRef idx="minor">
+            <a:schemeClr val="lt1"/>
+          </a:fontRef>
+        </p:style>
+        <p:txBody>
+          <a:bodyPr rtlCol="0" anchor="ctr"/>
+          <a:lstStyle/>
+          <a:p>
+            <a:pPr algn="ctr"/>
+          </a:p>
+        </p:txBody>
+      </p:sp>
+      <p:sp>
+        <p:nvSpPr>
+          <p:cNvPr id="41" name="Rectangle 40"/>
+          <p:cNvSpPr/>
+          <p:nvPr/>
+        </p:nvSpPr>
+        <p:spPr>
+          <a:xfrm>
+            <a:off x="5727700" y="2101850"/>
+            <a:ext cx="1428750" cy="82550"/>
+          </a:xfrm>
+          <a:prstGeom prst="rect">
+            <a:avLst/>
+          </a:prstGeom>
+          <a:solidFill>
+            <a:srgbClr val="888888"/>
+          </a:solidFill>
+          <a:ln>
+            <a:noFill/>
+          </a:ln>
+        </p:spPr>
+        <p:style>
+          <a:lnRef idx="1">
+            <a:schemeClr val="accent1"/>
+          </a:lnRef>
+          <a:fillRef idx="3">
+            <a:schemeClr val="accent1"/>
+          </a:fillRef>
+          <a:effectRef idx="2">
+            <a:schemeClr val="accent1"/>
+          </a:effectRef>
+          <a:fontRef idx="minor">
+            <a:schemeClr val="lt1"/>
+          </a:fontRef>
+        </p:style>
+        <p:txBody>
+          <a:bodyPr rtlCol="0" anchor="ctr"/>
+          <a:lstStyle/>
+          <a:p>
+            <a:pPr algn="ctr"/>
+          </a:p>
+        </p:txBody>
+      </p:sp>
+      <p:sp>
+        <p:nvSpPr>
+          <p:cNvPr id="42" name="TextBox 41"/>
+          <p:cNvSpPr txBox="1"/>
+          <p:nvPr/>
+        </p:nvSpPr>
+        <p:spPr>
+          <a:xfrm>
+            <a:off x="8616950" y="2095500"/>
+            <a:ext cx="228600" cy="88900"/>
+          </a:xfrm>
+          <a:prstGeom prst="rect">
+            <a:avLst/>
+          </a:prstGeom>
+          <a:noFill/>
+        </p:spPr>
+        <p:txBody>
+          <a:bodyPr wrap="square">
+            <a:spAutoFit/>
+          </a:bodyPr>
+          <a:lstStyle/>
+          <a:p>
+            <a:pPr algn="l"/>
+            <a:r>
+              <a:rPr sz="900" b="0" i="0">
+                <a:solidFill>
+                  <a:srgbClr val="888888"/>
+                </a:solidFill>
+                <a:latin typeface="Noto Sans KR"/>
+              </a:rPr>
+              <a:t>50%</a:t>
+            </a:r>
+          </a:p>
+        </p:txBody>
+      </p:sp>
+      <p:sp>
+        <p:nvSpPr>
+          <p:cNvPr id="43" name="TextBox 42"/>
+          <p:cNvSpPr txBox="1"/>
+          <p:nvPr/>
+        </p:nvSpPr>
+        <p:spPr>
+          <a:xfrm>
+            <a:off x="5308600" y="2235200"/>
+            <a:ext cx="393700" cy="88900"/>
+          </a:xfrm>
+          <a:prstGeom prst="rect">
+            <a:avLst/>
+          </a:prstGeom>
+          <a:noFill/>
+        </p:spPr>
+        <p:txBody>
+          <a:bodyPr wrap="square">
+            <a:spAutoFit/>
+          </a:bodyPr>
+          <a:lstStyle/>
+          <a:p>
+            <a:pPr algn="l"/>
+            <a:r>
+              <a:rPr sz="900" b="1" i="0">
+                <a:solidFill>
+                  <a:srgbClr val="CC0000"/>
+                </a:solidFill>
+                <a:latin typeface="Noto Sans KR"/>
+              </a:rPr>
+              <a:t>건설 ▼</a:t>
+            </a:r>
+          </a:p>
+        </p:txBody>
+      </p:sp>
+      <p:sp>
+        <p:nvSpPr>
+          <p:cNvPr id="44" name="Rectangle 43"/>
+          <p:cNvSpPr/>
+          <p:nvPr/>
+        </p:nvSpPr>
+        <p:spPr>
+          <a:xfrm>
+            <a:off x="5727700" y="2241550"/>
+            <a:ext cx="2857500" cy="82550"/>
+          </a:xfrm>
+          <a:prstGeom prst="rect">
+            <a:avLst/>
+          </a:prstGeom>
+          <a:solidFill>
+            <a:srgbClr val="EFEFEF"/>
+          </a:solidFill>
+          <a:ln>
+            <a:noFill/>
+          </a:ln>
+        </p:spPr>
+        <p:style>
+          <a:lnRef idx="1">
+            <a:schemeClr val="accent1"/>
+          </a:lnRef>
+          <a:fillRef idx="3">
+            <a:schemeClr val="accent1"/>
+          </a:fillRef>
+          <a:effectRef idx="2">
+            <a:schemeClr val="accent1"/>
+          </a:effectRef>
+          <a:fontRef idx="minor">
+            <a:schemeClr val="lt1"/>
+          </a:fontRef>
+        </p:style>
+        <p:txBody>
+          <a:bodyPr rtlCol="0" anchor="ctr"/>
+          <a:lstStyle/>
+          <a:p>
+            <a:pPr algn="ctr"/>
+          </a:p>
+        </p:txBody>
+      </p:sp>
+      <p:sp>
+        <p:nvSpPr>
+          <p:cNvPr id="45" name="Rectangle 44"/>
+          <p:cNvSpPr/>
+          <p:nvPr/>
+        </p:nvSpPr>
+        <p:spPr>
+          <a:xfrm>
+            <a:off x="5727700" y="2241550"/>
+            <a:ext cx="457200" cy="82550"/>
+          </a:xfrm>
+          <a:prstGeom prst="rect">
+            <a:avLst/>
+          </a:prstGeom>
+          <a:solidFill>
+            <a:srgbClr val="CC0000"/>
+          </a:solidFill>
+          <a:ln>
+            <a:noFill/>
+          </a:ln>
+        </p:spPr>
+        <p:style>
+          <a:lnRef idx="1">
+            <a:schemeClr val="accent1"/>
+          </a:lnRef>
+          <a:fillRef idx="3">
+            <a:schemeClr val="accent1"/>
+          </a:fillRef>
+          <a:effectRef idx="2">
+            <a:schemeClr val="accent1"/>
+          </a:effectRef>
+          <a:fontRef idx="minor">
+            <a:schemeClr val="lt1"/>
+          </a:fontRef>
+        </p:style>
+        <p:txBody>
+          <a:bodyPr rtlCol="0" anchor="ctr"/>
+          <a:lstStyle/>
+          <a:p>
+            <a:pPr algn="ctr"/>
+          </a:p>
+        </p:txBody>
+      </p:sp>
+      <p:sp>
+        <p:nvSpPr>
+          <p:cNvPr id="46" name="TextBox 45"/>
+          <p:cNvSpPr txBox="1"/>
+          <p:nvPr/>
+        </p:nvSpPr>
+        <p:spPr>
+          <a:xfrm>
+            <a:off x="8616950" y="2235200"/>
+            <a:ext cx="228600" cy="88900"/>
+          </a:xfrm>
+          <a:prstGeom prst="rect">
+            <a:avLst/>
+          </a:prstGeom>
+          <a:noFill/>
+        </p:spPr>
+        <p:txBody>
+          <a:bodyPr wrap="square">
+            <a:spAutoFit/>
+          </a:bodyPr>
+          <a:lstStyle/>
+          <a:p>
+            <a:pPr algn="l"/>
+            <a:r>
+              <a:rPr sz="900" b="1" i="0">
+                <a:solidFill>
+                  <a:srgbClr val="CC0000"/>
+                </a:solidFill>
+                <a:latin typeface="Noto Sans KR"/>
+              </a:rPr>
+              <a:t>16%</a:t>
+            </a:r>
+          </a:p>
+        </p:txBody>
+      </p:sp>
+      <p:sp>
+        <p:nvSpPr>
+          <p:cNvPr id="47" name="TextBox 46"/>
+          <p:cNvSpPr txBox="1"/>
+          <p:nvPr/>
+        </p:nvSpPr>
+        <p:spPr>
+          <a:xfrm>
+            <a:off x="5308600" y="2501900"/>
+            <a:ext cx="3365500" cy="76200"/>
+          </a:xfrm>
+          <a:prstGeom prst="rect">
+            <a:avLst/>
+          </a:prstGeom>
+          <a:noFill/>
+        </p:spPr>
+        <p:txBody>
+          <a:bodyPr wrap="square">
+            <a:spAutoFit/>
+          </a:bodyPr>
+          <a:lstStyle/>
+          <a:p>
+            <a:pPr algn="l"/>
+            <a:r>
+              <a:rPr sz="800" b="0" i="1">
+                <a:solidFill>
+                  <a:srgbClr val="AAAAAA"/>
+                </a:solidFill>
+                <a:latin typeface="Noto Sans KR"/>
+              </a:rPr>
+              <a:t>출처: McKinsey Global Institute</a:t>
+            </a:r>
+          </a:p>
+        </p:txBody>
+      </p:sp>
+      <p:sp>
+        <p:nvSpPr>
+          <p:cNvPr id="48" name="Rectangle 47"/>
+          <p:cNvSpPr/>
+          <p:nvPr/>
+        </p:nvSpPr>
+        <p:spPr>
+          <a:xfrm>
+            <a:off x="5245100" y="2654300"/>
+            <a:ext cx="3492500" cy="939800"/>
+          </a:xfrm>
+          <a:prstGeom prst="rect">
+            <a:avLst/>
+          </a:prstGeom>
+          <a:solidFill>
+            <a:srgbClr val="F8F8F8"/>
+          </a:solidFill>
+          <a:ln>
+            <a:noFill/>
+          </a:ln>
+        </p:spPr>
+        <p:style>
+          <a:lnRef idx="1">
+            <a:schemeClr val="accent1"/>
+          </a:lnRef>
+          <a:fillRef idx="3">
+            <a:schemeClr val="accent1"/>
+          </a:fillRef>
+          <a:effectRef idx="2">
+            <a:schemeClr val="accent1"/>
+          </a:effectRef>
+          <a:fontRef idx="minor">
+            <a:schemeClr val="lt1"/>
+          </a:fontRef>
+        </p:style>
+        <p:txBody>
+          <a:bodyPr rtlCol="0" anchor="ctr"/>
+          <a:lstStyle/>
+          <a:p>
+            <a:pPr algn="ctr"/>
+          </a:p>
+        </p:txBody>
+      </p:sp>
+      <p:sp>
+        <p:nvSpPr>
+          <p:cNvPr id="49" name="TextBox 48"/>
+          <p:cNvSpPr txBox="1"/>
+          <p:nvPr/>
+        </p:nvSpPr>
+        <p:spPr>
+          <a:xfrm>
+            <a:off x="5308600" y="2717800"/>
+            <a:ext cx="3365500" cy="88900"/>
+          </a:xfrm>
+          <a:prstGeom prst="rect">
+            <a:avLst/>
+          </a:prstGeom>
+          <a:noFill/>
+        </p:spPr>
+        <p:txBody>
+          <a:bodyPr wrap="square">
+            <a:spAutoFit/>
+          </a:bodyPr>
+          <a:lstStyle/>
+          <a:p>
+            <a:pPr algn="l"/>
+            <a:r>
+              <a:rPr sz="800" b="1" i="0">
+                <a:solidFill>
+                  <a:srgbClr val="999999"/>
+                </a:solidFill>
+                <a:latin typeface="Noto Sans KR"/>
+              </a:rPr>
+              <a:t>건설 기능인력 연령 분포</a:t>
+            </a:r>
+          </a:p>
+        </p:txBody>
+      </p:sp>
+      <p:sp>
+        <p:nvSpPr>
+          <p:cNvPr id="50" name="TextBox 49"/>
+          <p:cNvSpPr txBox="1"/>
+          <p:nvPr/>
+        </p:nvSpPr>
+        <p:spPr>
+          <a:xfrm>
+            <a:off x="5308600" y="3213100"/>
+            <a:ext cx="800100" cy="82550"/>
+          </a:xfrm>
+          <a:prstGeom prst="rect">
+            <a:avLst/>
+          </a:prstGeom>
+          <a:noFill/>
+        </p:spPr>
+        <p:txBody>
+          <a:bodyPr wrap="square">
+            <a:spAutoFit/>
+          </a:bodyPr>
+          <a:lstStyle/>
+          <a:p>
+            <a:pPr algn="ctr"/>
+            <a:r>
+              <a:rPr sz="900" b="1" i="0">
+                <a:solidFill>
+                  <a:srgbClr val="333333"/>
+                </a:solidFill>
+                <a:latin typeface="Noto Sans KR"/>
+              </a:rPr>
+              <a:t>8%</a:t>
+            </a:r>
+          </a:p>
+        </p:txBody>
+      </p:sp>
+      <p:sp>
+        <p:nvSpPr>
+          <p:cNvPr id="51" name="Rectangle 50"/>
+          <p:cNvSpPr/>
+          <p:nvPr/>
+        </p:nvSpPr>
+        <p:spPr>
+          <a:xfrm>
+            <a:off x="5308600" y="3302000"/>
+            <a:ext cx="800100" cy="50800"/>
+          </a:xfrm>
+          <a:prstGeom prst="rect">
+            <a:avLst/>
+          </a:prstGeom>
+          <a:solidFill>
+            <a:srgbClr val="DDDDDD"/>
+          </a:solidFill>
+          <a:ln>
+            <a:noFill/>
+          </a:ln>
+        </p:spPr>
+        <p:style>
+          <a:lnRef idx="1">
+            <a:schemeClr val="accent1"/>
+          </a:lnRef>
+          <a:fillRef idx="3">
+            <a:schemeClr val="accent1"/>
+          </a:fillRef>
+          <a:effectRef idx="2">
+            <a:schemeClr val="accent1"/>
+          </a:effectRef>
+          <a:fontRef idx="minor">
+            <a:schemeClr val="lt1"/>
+          </a:fontRef>
+        </p:style>
+        <p:txBody>
+          <a:bodyPr rtlCol="0" anchor="ctr"/>
+          <a:lstStyle/>
+          <a:p>
+            <a:pPr algn="ctr"/>
+          </a:p>
+        </p:txBody>
+      </p:sp>
+      <p:sp>
+        <p:nvSpPr>
+          <p:cNvPr id="52" name="TextBox 51"/>
+          <p:cNvSpPr txBox="1"/>
+          <p:nvPr/>
+        </p:nvSpPr>
+        <p:spPr>
+          <a:xfrm>
+            <a:off x="5308600" y="3365500"/>
+            <a:ext cx="800100" cy="82550"/>
+          </a:xfrm>
+          <a:prstGeom prst="rect">
+            <a:avLst/>
+          </a:prstGeom>
+          <a:noFill/>
+        </p:spPr>
+        <p:txBody>
+          <a:bodyPr wrap="square">
+            <a:spAutoFit/>
+          </a:bodyPr>
+          <a:lstStyle/>
+          <a:p>
+            <a:pPr algn="ctr"/>
+            <a:r>
+              <a:rPr sz="900" b="0" i="0">
+                <a:solidFill>
+                  <a:srgbClr val="999999"/>
+                </a:solidFill>
+                <a:latin typeface="Noto Sans KR"/>
+              </a:rPr>
+              <a:t>30대</a:t>
+            </a:r>
+          </a:p>
+        </p:txBody>
+      </p:sp>
+      <p:sp>
+        <p:nvSpPr>
+          <p:cNvPr id="53" name="TextBox 52"/>
+          <p:cNvSpPr txBox="1"/>
+          <p:nvPr/>
+        </p:nvSpPr>
+        <p:spPr>
+          <a:xfrm>
+            <a:off x="6159500" y="3136900"/>
+            <a:ext cx="800100" cy="82550"/>
+          </a:xfrm>
+          <a:prstGeom prst="rect">
+            <a:avLst/>
+          </a:prstGeom>
+          <a:noFill/>
+        </p:spPr>
+        <p:txBody>
+          <a:bodyPr wrap="square">
+            <a:spAutoFit/>
+          </a:bodyPr>
+          <a:lstStyle/>
+          <a:p>
+            <a:pPr algn="ctr"/>
+            <a:r>
+              <a:rPr sz="900" b="1" i="0">
+                <a:solidFill>
+                  <a:srgbClr val="333333"/>
+                </a:solidFill>
+                <a:latin typeface="Noto Sans KR"/>
+              </a:rPr>
+              <a:t>22%</a:t>
+            </a:r>
+          </a:p>
+        </p:txBody>
+      </p:sp>
+      <p:sp>
+        <p:nvSpPr>
+          <p:cNvPr id="54" name="Rectangle 53"/>
+          <p:cNvSpPr/>
+          <p:nvPr/>
+        </p:nvSpPr>
+        <p:spPr>
+          <a:xfrm>
+            <a:off x="6159500" y="3225800"/>
+            <a:ext cx="800100" cy="127000"/>
+          </a:xfrm>
+          <a:prstGeom prst="rect">
+            <a:avLst/>
+          </a:prstGeom>
+          <a:solidFill>
+            <a:srgbClr val="AAAAAA"/>
+          </a:solidFill>
+          <a:ln>
+            <a:noFill/>
+          </a:ln>
+        </p:spPr>
+        <p:style>
+          <a:lnRef idx="1">
+            <a:schemeClr val="accent1"/>
+          </a:lnRef>
+          <a:fillRef idx="3">
+            <a:schemeClr val="accent1"/>
+          </a:fillRef>
+          <a:effectRef idx="2">
+            <a:schemeClr val="accent1"/>
+          </a:effectRef>
+          <a:fontRef idx="minor">
+            <a:schemeClr val="lt1"/>
+          </a:fontRef>
+        </p:style>
+        <p:txBody>
+          <a:bodyPr rtlCol="0" anchor="ctr"/>
+          <a:lstStyle/>
+          <a:p>
+            <a:pPr algn="ctr"/>
+          </a:p>
+        </p:txBody>
+      </p:sp>
+      <p:sp>
+        <p:nvSpPr>
+          <p:cNvPr id="55" name="TextBox 54"/>
+          <p:cNvSpPr txBox="1"/>
+          <p:nvPr/>
+        </p:nvSpPr>
+        <p:spPr>
+          <a:xfrm>
+            <a:off x="6159500" y="3365500"/>
+            <a:ext cx="800100" cy="82550"/>
+          </a:xfrm>
+          <a:prstGeom prst="rect">
+            <a:avLst/>
+          </a:prstGeom>
+          <a:noFill/>
+        </p:spPr>
+        <p:txBody>
+          <a:bodyPr wrap="square">
+            <a:spAutoFit/>
+          </a:bodyPr>
+          <a:lstStyle/>
+          <a:p>
+            <a:pPr algn="ctr"/>
+            <a:r>
+              <a:rPr sz="900" b="0" i="0">
+                <a:solidFill>
+                  <a:srgbClr val="999999"/>
+                </a:solidFill>
+                <a:latin typeface="Noto Sans KR"/>
+              </a:rPr>
+              <a:t>40대</a:t>
+            </a:r>
+          </a:p>
+        </p:txBody>
+      </p:sp>
+      <p:sp>
+        <p:nvSpPr>
+          <p:cNvPr id="56" name="TextBox 55"/>
+          <p:cNvSpPr txBox="1"/>
+          <p:nvPr/>
+        </p:nvSpPr>
+        <p:spPr>
+          <a:xfrm>
+            <a:off x="7010400" y="3079750"/>
+            <a:ext cx="800100" cy="82550"/>
+          </a:xfrm>
+          <a:prstGeom prst="rect">
+            <a:avLst/>
+          </a:prstGeom>
+          <a:noFill/>
+        </p:spPr>
+        <p:txBody>
+          <a:bodyPr wrap="square">
+            <a:spAutoFit/>
+          </a:bodyPr>
+          <a:lstStyle/>
+          <a:p>
+            <a:pPr algn="ctr"/>
+            <a:r>
+              <a:rPr sz="900" b="1" i="0">
+                <a:solidFill>
+                  <a:srgbClr val="333333"/>
+                </a:solidFill>
+                <a:latin typeface="Noto Sans KR"/>
+              </a:rPr>
+              <a:t>38%</a:t>
+            </a:r>
+          </a:p>
+        </p:txBody>
+      </p:sp>
+      <p:sp>
+        <p:nvSpPr>
+          <p:cNvPr id="57" name="Rectangle 56"/>
+          <p:cNvSpPr/>
+          <p:nvPr/>
+        </p:nvSpPr>
+        <p:spPr>
+          <a:xfrm>
+            <a:off x="7010400" y="3168650"/>
+            <a:ext cx="800100" cy="184150"/>
+          </a:xfrm>
+          <a:prstGeom prst="rect">
+            <a:avLst/>
+          </a:prstGeom>
+          <a:solidFill>
+            <a:srgbClr val="555555"/>
+          </a:solidFill>
+          <a:ln>
+            <a:noFill/>
+          </a:ln>
+        </p:spPr>
+        <p:style>
+          <a:lnRef idx="1">
+            <a:schemeClr val="accent1"/>
+          </a:lnRef>
+          <a:fillRef idx="3">
+            <a:schemeClr val="accent1"/>
+          </a:fillRef>
+          <a:effectRef idx="2">
+            <a:schemeClr val="accent1"/>
+          </a:effectRef>
+          <a:fontRef idx="minor">
+            <a:schemeClr val="lt1"/>
+          </a:fontRef>
+        </p:style>
+        <p:txBody>
+          <a:bodyPr rtlCol="0" anchor="ctr"/>
+          <a:lstStyle/>
+          <a:p>
+            <a:pPr algn="ctr"/>
+          </a:p>
+        </p:txBody>
+      </p:sp>
+      <p:sp>
+        <p:nvSpPr>
+          <p:cNvPr id="58" name="TextBox 57"/>
+          <p:cNvSpPr txBox="1"/>
+          <p:nvPr/>
+        </p:nvSpPr>
+        <p:spPr>
+          <a:xfrm>
+            <a:off x="7010400" y="3365500"/>
+            <a:ext cx="800100" cy="82550"/>
+          </a:xfrm>
+          <a:prstGeom prst="rect">
+            <a:avLst/>
+          </a:prstGeom>
+          <a:noFill/>
+        </p:spPr>
+        <p:txBody>
+          <a:bodyPr wrap="square">
+            <a:spAutoFit/>
+          </a:bodyPr>
+          <a:lstStyle/>
+          <a:p>
+            <a:pPr algn="ctr"/>
+            <a:r>
+              <a:rPr sz="900" b="0" i="0">
+                <a:solidFill>
+                  <a:srgbClr val="999999"/>
+                </a:solidFill>
+                <a:latin typeface="Noto Sans KR"/>
+              </a:rPr>
+              <a:t>50대</a:t>
+            </a:r>
+          </a:p>
+        </p:txBody>
+      </p:sp>
+      <p:sp>
+        <p:nvSpPr>
+          <p:cNvPr id="59" name="TextBox 58"/>
+          <p:cNvSpPr txBox="1"/>
+          <p:nvPr/>
+        </p:nvSpPr>
+        <p:spPr>
+          <a:xfrm>
+            <a:off x="7861300" y="3111500"/>
+            <a:ext cx="800100" cy="82550"/>
+          </a:xfrm>
+          <a:prstGeom prst="rect">
+            <a:avLst/>
+          </a:prstGeom>
+          <a:noFill/>
+        </p:spPr>
+        <p:txBody>
+          <a:bodyPr wrap="square">
+            <a:spAutoFit/>
+          </a:bodyPr>
+          <a:lstStyle/>
+          <a:p>
+            <a:pPr algn="ctr"/>
+            <a:r>
+              <a:rPr sz="900" b="1" i="0">
+                <a:solidFill>
+                  <a:srgbClr val="CC0000"/>
+                </a:solidFill>
+                <a:latin typeface="Noto Sans KR"/>
+              </a:rPr>
+              <a:t>32%</a:t>
+            </a:r>
+          </a:p>
+        </p:txBody>
+      </p:sp>
+      <p:sp>
+        <p:nvSpPr>
+          <p:cNvPr id="60" name="Rectangle 59"/>
+          <p:cNvSpPr/>
+          <p:nvPr/>
+        </p:nvSpPr>
+        <p:spPr>
+          <a:xfrm>
+            <a:off x="7861300" y="3200400"/>
+            <a:ext cx="800100" cy="152400"/>
+          </a:xfrm>
+          <a:prstGeom prst="rect">
+            <a:avLst/>
+          </a:prstGeom>
+          <a:solidFill>
+            <a:srgbClr val="CC0000"/>
+          </a:solidFill>
+          <a:ln>
+            <a:noFill/>
+          </a:ln>
+        </p:spPr>
+        <p:style>
+          <a:lnRef idx="1">
+            <a:schemeClr val="accent1"/>
+          </a:lnRef>
+          <a:fillRef idx="3">
+            <a:schemeClr val="accent1"/>
+          </a:fillRef>
+          <a:effectRef idx="2">
+            <a:schemeClr val="accent1"/>
+          </a:effectRef>
+          <a:fontRef idx="minor">
+            <a:schemeClr val="lt1"/>
+          </a:fontRef>
+        </p:style>
+        <p:txBody>
+          <a:bodyPr rtlCol="0" anchor="ctr"/>
+          <a:lstStyle/>
+          <a:p>
+            <a:pPr algn="ctr"/>
+          </a:p>
+        </p:txBody>
+      </p:sp>
+      <p:sp>
+        <p:nvSpPr>
+          <p:cNvPr id="61" name="TextBox 60"/>
+          <p:cNvSpPr txBox="1"/>
+          <p:nvPr/>
+        </p:nvSpPr>
+        <p:spPr>
+          <a:xfrm>
+            <a:off x="7861300" y="3365500"/>
+            <a:ext cx="800100" cy="82550"/>
+          </a:xfrm>
+          <a:prstGeom prst="rect">
+            <a:avLst/>
+          </a:prstGeom>
+          <a:noFill/>
+        </p:spPr>
+        <p:txBody>
+          <a:bodyPr wrap="square">
+            <a:spAutoFit/>
+          </a:bodyPr>
+          <a:lstStyle/>
+          <a:p>
+            <a:pPr algn="ctr"/>
+            <a:r>
+              <a:rPr sz="900" b="0" i="0">
+                <a:solidFill>
+                  <a:srgbClr val="999999"/>
+                </a:solidFill>
+                <a:latin typeface="Noto Sans KR"/>
+              </a:rPr>
+              <a:t>60대+</a:t>
+            </a:r>
+          </a:p>
+        </p:txBody>
+      </p:sp>
+      <p:sp>
+        <p:nvSpPr>
+          <p:cNvPr id="62" name="TextBox 61"/>
+          <p:cNvSpPr txBox="1"/>
+          <p:nvPr/>
+        </p:nvSpPr>
+        <p:spPr>
+          <a:xfrm>
+            <a:off x="5308600" y="3454400"/>
+            <a:ext cx="3365500" cy="114300"/>
+          </a:xfrm>
+          <a:prstGeom prst="rect">
+            <a:avLst/>
+          </a:prstGeom>
+          <a:noFill/>
+        </p:spPr>
+        <p:txBody>
+          <a:bodyPr wrap="square">
+            <a:spAutoFit/>
+          </a:bodyPr>
+          <a:lstStyle/>
+          <a:p>
+            <a:pPr algn="l"/>
+            <a:r>
+              <a:rPr sz="900" b="0" i="1">
+                <a:solidFill>
+                  <a:srgbClr val="AAAAAA"/>
+                </a:solidFill>
+                <a:latin typeface="Noto Sans KR"/>
+              </a:rPr>
+              <a:t>평균 연령 54세 → 10년 내 숙련 기능공 절벽</a:t>
+            </a:r>
+          </a:p>
+        </p:txBody>
+      </p:sp>
+      <p:sp>
+        <p:nvSpPr>
+          <p:cNvPr id="63" name="Rectangle 62"/>
+          <p:cNvSpPr/>
+          <p:nvPr/>
+        </p:nvSpPr>
+        <p:spPr>
+          <a:xfrm>
+            <a:off x="5245100" y="3670300"/>
+            <a:ext cx="1720850" cy="495300"/>
+          </a:xfrm>
+          <a:prstGeom prst="rect">
+            <a:avLst/>
+          </a:prstGeom>
+          <a:solidFill>
+            <a:srgbClr val="111111"/>
+          </a:solidFill>
+          <a:ln>
+            <a:noFill/>
+          </a:ln>
+        </p:spPr>
+        <p:style>
+          <a:lnRef idx="1">
+            <a:schemeClr val="accent1"/>
+          </a:lnRef>
+          <a:fillRef idx="3">
+            <a:schemeClr val="accent1"/>
+          </a:fillRef>
+          <a:effectRef idx="2">
+            <a:schemeClr val="accent1"/>
+          </a:effectRef>
+          <a:fontRef idx="minor">
+            <a:schemeClr val="lt1"/>
+          </a:fontRef>
+        </p:style>
+        <p:txBody>
+          <a:bodyPr rtlCol="0" anchor="ctr"/>
+          <a:lstStyle/>
+          <a:p>
+            <a:pPr algn="ctr"/>
+          </a:p>
+        </p:txBody>
+      </p:sp>
+      <p:sp>
+        <p:nvSpPr>
+          <p:cNvPr id="64" name="TextBox 63"/>
+          <p:cNvSpPr txBox="1"/>
+          <p:nvPr/>
+        </p:nvSpPr>
+        <p:spPr>
+          <a:xfrm>
+            <a:off x="5308600" y="3721100"/>
+            <a:ext cx="1593850" cy="88900"/>
+          </a:xfrm>
+          <a:prstGeom prst="rect">
+            <a:avLst/>
+          </a:prstGeom>
+          <a:noFill/>
+        </p:spPr>
+        <p:txBody>
+          <a:bodyPr wrap="square">
+            <a:spAutoFit/>
+          </a:bodyPr>
+          <a:lstStyle/>
+          <a:p>
+            <a:pPr algn="l"/>
+            <a:r>
+              <a:rPr sz="800" b="0" i="0">
+                <a:solidFill>
+                  <a:srgbClr val="AAAAAA"/>
+                </a:solidFill>
+                <a:latin typeface="Noto Sans KR"/>
+              </a:rPr>
+              <a:t>연관산업 GDP</a:t>
+            </a:r>
+          </a:p>
+        </p:txBody>
+      </p:sp>
+      <p:sp>
+        <p:nvSpPr>
+          <p:cNvPr id="65" name="TextBox 64"/>
+          <p:cNvSpPr txBox="1"/>
+          <p:nvPr/>
+        </p:nvSpPr>
+        <p:spPr>
+          <a:xfrm>
+            <a:off x="5308600" y="3810000"/>
+            <a:ext cx="1593850" cy="241300"/>
+          </a:xfrm>
+          <a:prstGeom prst="rect">
+            <a:avLst/>
+          </a:prstGeom>
+          <a:noFill/>
+        </p:spPr>
+        <p:txBody>
+          <a:bodyPr wrap="square">
+            <a:spAutoFit/>
+          </a:bodyPr>
+          <a:lstStyle/>
+          <a:p>
+            <a:pPr algn="l"/>
+            <a:r>
+              <a:rPr sz="2200" b="1" i="0">
+                <a:solidFill>
+                  <a:srgbClr val="FFFFFF"/>
+                </a:solidFill>
+                <a:latin typeface="Noto Sans KR"/>
+              </a:rPr>
+              <a:t>20~25%</a:t>
+            </a:r>
+          </a:p>
+        </p:txBody>
+      </p:sp>
+      <p:sp>
+        <p:nvSpPr>
+          <p:cNvPr id="66" name="Rectangle 65"/>
+          <p:cNvSpPr/>
+          <p:nvPr/>
+        </p:nvSpPr>
+        <p:spPr>
+          <a:xfrm>
+            <a:off x="7016750" y="3670300"/>
+            <a:ext cx="1720850" cy="495300"/>
+          </a:xfrm>
+          <a:prstGeom prst="rect">
+            <a:avLst/>
+          </a:prstGeom>
+          <a:solidFill>
+            <a:srgbClr val="F0F0F0"/>
+          </a:solidFill>
+          <a:ln>
+            <a:noFill/>
+          </a:ln>
+        </p:spPr>
+        <p:style>
+          <a:lnRef idx="1">
+            <a:schemeClr val="accent1"/>
+          </a:lnRef>
+          <a:fillRef idx="3">
+            <a:schemeClr val="accent1"/>
+          </a:fillRef>
+          <a:effectRef idx="2">
+            <a:schemeClr val="accent1"/>
+          </a:effectRef>
+          <a:fontRef idx="minor">
+            <a:schemeClr val="lt1"/>
+          </a:fontRef>
+        </p:style>
+        <p:txBody>
+          <a:bodyPr rtlCol="0" anchor="ctr"/>
+          <a:lstStyle/>
+          <a:p>
+            <a:pPr algn="ctr"/>
+          </a:p>
+        </p:txBody>
+      </p:sp>
+      <p:sp>
+        <p:nvSpPr>
+          <p:cNvPr id="67" name="TextBox 66"/>
+          <p:cNvSpPr txBox="1"/>
+          <p:nvPr/>
+        </p:nvSpPr>
+        <p:spPr>
+          <a:xfrm>
+            <a:off x="7080250" y="3721100"/>
+            <a:ext cx="1593850" cy="88900"/>
+          </a:xfrm>
+          <a:prstGeom prst="rect">
+            <a:avLst/>
+          </a:prstGeom>
+          <a:noFill/>
+        </p:spPr>
+        <p:txBody>
+          <a:bodyPr wrap="square">
+            <a:spAutoFit/>
+          </a:bodyPr>
+          <a:lstStyle/>
+          <a:p>
+            <a:pPr algn="l"/>
+            <a:r>
+              <a:rPr sz="800" b="0" i="0">
+                <a:solidFill>
+                  <a:srgbClr val="999999"/>
+                </a:solidFill>
+                <a:latin typeface="Noto Sans KR"/>
+              </a:rPr>
+              <a:t>생산유발계수</a:t>
+            </a:r>
+          </a:p>
+        </p:txBody>
+      </p:sp>
+      <p:sp>
+        <p:nvSpPr>
+          <p:cNvPr id="68" name="TextBox 67"/>
+          <p:cNvSpPr txBox="1"/>
+          <p:nvPr/>
+        </p:nvSpPr>
+        <p:spPr>
+          <a:xfrm>
+            <a:off x="7080250" y="3810000"/>
+            <a:ext cx="1593850" cy="241300"/>
+          </a:xfrm>
+          <a:prstGeom prst="rect">
+            <a:avLst/>
+          </a:prstGeom>
+          <a:noFill/>
+        </p:spPr>
+        <p:txBody>
+          <a:bodyPr wrap="square">
+            <a:spAutoFit/>
+          </a:bodyPr>
+          <a:lstStyle/>
+          <a:p>
+            <a:pPr algn="l"/>
+            <a:r>
+              <a:rPr sz="2200" b="1" i="0">
+                <a:solidFill>
+                  <a:srgbClr val="111111"/>
+                </a:solidFill>
+                <a:latin typeface="Noto Sans KR"/>
+              </a:rPr>
+              <a:t>× 1.9</a:t>
+            </a:r>
+          </a:p>
+        </p:txBody>
+      </p:sp>
     </p:spTree>
   </p:cSld>
   <p:clrMapOvr>
@@ -3176,30 +6448,1523 @@
         <p:nvPr/>
       </p:nvGrpSpPr>
       <p:grpSpPr/>
-      <p:pic>
-        <p:nvPicPr>
-          <p:cNvPr id="2" name="Picture 1" descr="ppt_slide_3.png"/>
-          <p:cNvPicPr>
-            <a:picLocks noChangeAspect="1"/>
-          </p:cNvPicPr>
-          <p:nvPr/>
-        </p:nvPicPr>
-        <p:blipFill>
-          <a:blip r:embed="rId2"/>
-          <a:stretch>
-            <a:fillRect/>
-          </a:stretch>
-        </p:blipFill>
-        <p:spPr>
-          <a:xfrm>
-            <a:off x="0" y="0"/>
-            <a:ext cx="9144000" cy="5143500"/>
-          </a:xfrm>
-          <a:prstGeom prst="rect">
-            <a:avLst/>
-          </a:prstGeom>
-        </p:spPr>
-      </p:pic>
+      <p:sp>
+        <p:nvSpPr>
+          <p:cNvPr id="2" name="TextBox 1"/>
+          <p:cNvSpPr txBox="1"/>
+          <p:nvPr/>
+        </p:nvSpPr>
+        <p:spPr>
+          <a:xfrm>
+            <a:off x="406400" y="165100"/>
+            <a:ext cx="1905000" cy="127000"/>
+          </a:xfrm>
+          <a:prstGeom prst="rect">
+            <a:avLst/>
+          </a:prstGeom>
+          <a:noFill/>
+        </p:spPr>
+        <p:txBody>
+          <a:bodyPr wrap="square">
+            <a:spAutoFit/>
+          </a:bodyPr>
+          <a:lstStyle/>
+          <a:p>
+            <a:pPr algn="l"/>
+            <a:r>
+              <a:rPr sz="1000" b="0" i="0">
+                <a:solidFill>
+                  <a:srgbClr val="555555"/>
+                </a:solidFill>
+                <a:latin typeface="Noto Sans KR"/>
+              </a:rPr>
+              <a:t>2026.07.08.</a:t>
+            </a:r>
+          </a:p>
+        </p:txBody>
+      </p:sp>
+      <p:sp>
+        <p:nvSpPr>
+          <p:cNvPr id="3" name="TextBox 2"/>
+          <p:cNvSpPr txBox="1"/>
+          <p:nvPr/>
+        </p:nvSpPr>
+        <p:spPr>
+          <a:xfrm>
+            <a:off x="8318500" y="139700"/>
+            <a:ext cx="419100" cy="165100"/>
+          </a:xfrm>
+          <a:prstGeom prst="rect">
+            <a:avLst/>
+          </a:prstGeom>
+          <a:noFill/>
+        </p:spPr>
+        <p:txBody>
+          <a:bodyPr wrap="square">
+            <a:spAutoFit/>
+          </a:bodyPr>
+          <a:lstStyle/>
+          <a:p>
+            <a:pPr algn="r"/>
+            <a:r>
+              <a:rPr sz="1800" b="0" i="0">
+                <a:solidFill>
+                  <a:srgbClr val="555555"/>
+                </a:solidFill>
+                <a:latin typeface="Noto Sans KR"/>
+              </a:rPr>
+              <a:t>×</a:t>
+            </a:r>
+          </a:p>
+        </p:txBody>
+      </p:sp>
+      <p:sp>
+        <p:nvSpPr>
+          <p:cNvPr id="4" name="TextBox 3"/>
+          <p:cNvSpPr txBox="1"/>
+          <p:nvPr/>
+        </p:nvSpPr>
+        <p:spPr>
+          <a:xfrm>
+            <a:off x="406400" y="317500"/>
+            <a:ext cx="381000" cy="190500"/>
+          </a:xfrm>
+          <a:prstGeom prst="rect">
+            <a:avLst/>
+          </a:prstGeom>
+          <a:noFill/>
+        </p:spPr>
+        <p:txBody>
+          <a:bodyPr wrap="square">
+            <a:spAutoFit/>
+          </a:bodyPr>
+          <a:lstStyle/>
+          <a:p>
+            <a:pPr algn="l"/>
+            <a:r>
+              <a:rPr sz="2000" b="1" i="0">
+                <a:solidFill>
+                  <a:srgbClr val="111111"/>
+                </a:solidFill>
+                <a:latin typeface="Noto Sans KR"/>
+              </a:rPr>
+              <a:t>02</a:t>
+            </a:r>
+          </a:p>
+        </p:txBody>
+      </p:sp>
+      <p:sp>
+        <p:nvSpPr>
+          <p:cNvPr id="5" name="TextBox 4"/>
+          <p:cNvSpPr txBox="1"/>
+          <p:nvPr/>
+        </p:nvSpPr>
+        <p:spPr>
+          <a:xfrm>
+            <a:off x="800100" y="342900"/>
+            <a:ext cx="7302500" cy="152400"/>
+          </a:xfrm>
+          <a:prstGeom prst="rect">
+            <a:avLst/>
+          </a:prstGeom>
+          <a:noFill/>
+        </p:spPr>
+        <p:txBody>
+          <a:bodyPr wrap="square">
+            <a:spAutoFit/>
+          </a:bodyPr>
+          <a:lstStyle/>
+          <a:p>
+            <a:pPr algn="l"/>
+            <a:r>
+              <a:rPr sz="1300" b="0" i="0">
+                <a:solidFill>
+                  <a:srgbClr val="333333"/>
+                </a:solidFill>
+                <a:latin typeface="Noto Sans KR"/>
+              </a:rPr>
+              <a:t>초학제적 기술 스택 — 각 레이어는 다른 전문가가 필요합니다</a:t>
+            </a:r>
+          </a:p>
+        </p:txBody>
+      </p:sp>
+      <p:sp>
+        <p:nvSpPr>
+          <p:cNvPr id="6" name="Rectangle 5"/>
+          <p:cNvSpPr/>
+          <p:nvPr/>
+        </p:nvSpPr>
+        <p:spPr>
+          <a:xfrm>
+            <a:off x="406400" y="533400"/>
+            <a:ext cx="1841500" cy="25400"/>
+          </a:xfrm>
+          <a:prstGeom prst="rect">
+            <a:avLst/>
+          </a:prstGeom>
+          <a:solidFill>
+            <a:srgbClr val="111111"/>
+          </a:solidFill>
+          <a:ln>
+            <a:noFill/>
+          </a:ln>
+        </p:spPr>
+        <p:style>
+          <a:lnRef idx="1">
+            <a:schemeClr val="accent1"/>
+          </a:lnRef>
+          <a:fillRef idx="3">
+            <a:schemeClr val="accent1"/>
+          </a:fillRef>
+          <a:effectRef idx="2">
+            <a:schemeClr val="accent1"/>
+          </a:effectRef>
+          <a:fontRef idx="minor">
+            <a:schemeClr val="lt1"/>
+          </a:fontRef>
+        </p:style>
+        <p:txBody>
+          <a:bodyPr rtlCol="0" anchor="ctr"/>
+          <a:lstStyle/>
+          <a:p>
+            <a:pPr algn="ctr"/>
+          </a:p>
+        </p:txBody>
+      </p:sp>
+      <p:sp>
+        <p:nvSpPr>
+          <p:cNvPr id="7" name="Rectangle 6"/>
+          <p:cNvSpPr/>
+          <p:nvPr/>
+        </p:nvSpPr>
+        <p:spPr>
+          <a:xfrm>
+            <a:off x="2247900" y="546100"/>
+            <a:ext cx="6489700" cy="6350"/>
+          </a:xfrm>
+          <a:prstGeom prst="rect">
+            <a:avLst/>
+          </a:prstGeom>
+          <a:solidFill>
+            <a:srgbClr val="CCCCCC"/>
+          </a:solidFill>
+          <a:ln>
+            <a:noFill/>
+          </a:ln>
+        </p:spPr>
+        <p:style>
+          <a:lnRef idx="1">
+            <a:schemeClr val="accent1"/>
+          </a:lnRef>
+          <a:fillRef idx="3">
+            <a:schemeClr val="accent1"/>
+          </a:fillRef>
+          <a:effectRef idx="2">
+            <a:schemeClr val="accent1"/>
+          </a:effectRef>
+          <a:fontRef idx="minor">
+            <a:schemeClr val="lt1"/>
+          </a:fontRef>
+        </p:style>
+        <p:txBody>
+          <a:bodyPr rtlCol="0" anchor="ctr"/>
+          <a:lstStyle/>
+          <a:p>
+            <a:pPr algn="ctr"/>
+          </a:p>
+        </p:txBody>
+      </p:sp>
+      <p:sp>
+        <p:nvSpPr>
+          <p:cNvPr id="8" name="TextBox 7"/>
+          <p:cNvSpPr txBox="1"/>
+          <p:nvPr/>
+        </p:nvSpPr>
+        <p:spPr>
+          <a:xfrm>
+            <a:off x="406400" y="635000"/>
+            <a:ext cx="8331200" cy="152400"/>
+          </a:xfrm>
+          <a:prstGeom prst="rect">
+            <a:avLst/>
+          </a:prstGeom>
+          <a:noFill/>
+        </p:spPr>
+        <p:txBody>
+          <a:bodyPr wrap="square">
+            <a:spAutoFit/>
+          </a:bodyPr>
+          <a:lstStyle/>
+          <a:p>
+            <a:pPr algn="l"/>
+            <a:r>
+              <a:rPr sz="1300" b="0" i="0">
+                <a:solidFill>
+                  <a:srgbClr val="333333"/>
+                </a:solidFill>
+                <a:latin typeface="Noto Sans KR"/>
+              </a:rPr>
+              <a:t>어느 한 분야가 독점할 수 없는 문제. BIM → 현장 → 준공 데이터화 흐름을 4개 기술 레이어가 완성한다.</a:t>
+            </a:r>
+          </a:p>
+        </p:txBody>
+      </p:sp>
+      <p:sp>
+        <p:nvSpPr>
+          <p:cNvPr id="9" name="Rectangle 8"/>
+          <p:cNvSpPr/>
+          <p:nvPr/>
+        </p:nvSpPr>
+        <p:spPr>
+          <a:xfrm>
+            <a:off x="406400" y="825500"/>
+            <a:ext cx="4114800" cy="1689100"/>
+          </a:xfrm>
+          <a:prstGeom prst="rect">
+            <a:avLst/>
+          </a:prstGeom>
+          <a:solidFill>
+            <a:srgbClr val="F5F5F5"/>
+          </a:solidFill>
+          <a:ln>
+            <a:noFill/>
+          </a:ln>
+        </p:spPr>
+        <p:style>
+          <a:lnRef idx="1">
+            <a:schemeClr val="accent1"/>
+          </a:lnRef>
+          <a:fillRef idx="3">
+            <a:schemeClr val="accent1"/>
+          </a:fillRef>
+          <a:effectRef idx="2">
+            <a:schemeClr val="accent1"/>
+          </a:effectRef>
+          <a:fontRef idx="minor">
+            <a:schemeClr val="lt1"/>
+          </a:fontRef>
+        </p:style>
+        <p:txBody>
+          <a:bodyPr rtlCol="0" anchor="ctr"/>
+          <a:lstStyle/>
+          <a:p>
+            <a:pPr algn="ctr"/>
+          </a:p>
+        </p:txBody>
+      </p:sp>
+      <p:sp>
+        <p:nvSpPr>
+          <p:cNvPr id="10" name="TextBox 9"/>
+          <p:cNvSpPr txBox="1"/>
+          <p:nvPr/>
+        </p:nvSpPr>
+        <p:spPr>
+          <a:xfrm>
+            <a:off x="546100" y="914400"/>
+            <a:ext cx="444500" cy="304800"/>
+          </a:xfrm>
+          <a:prstGeom prst="rect">
+            <a:avLst/>
+          </a:prstGeom>
+          <a:noFill/>
+        </p:spPr>
+        <p:txBody>
+          <a:bodyPr wrap="square">
+            <a:spAutoFit/>
+          </a:bodyPr>
+          <a:lstStyle/>
+          <a:p>
+            <a:pPr algn="l"/>
+            <a:r>
+              <a:rPr sz="3400" b="1" i="0">
+                <a:solidFill>
+                  <a:srgbClr val="E0E0E0"/>
+                </a:solidFill>
+                <a:latin typeface="Noto Sans KR"/>
+              </a:rPr>
+              <a:t>01</a:t>
+            </a:r>
+          </a:p>
+        </p:txBody>
+      </p:sp>
+      <p:sp>
+        <p:nvSpPr>
+          <p:cNvPr id="11" name="Rectangle 10"/>
+          <p:cNvSpPr/>
+          <p:nvPr/>
+        </p:nvSpPr>
+        <p:spPr>
+          <a:xfrm>
+            <a:off x="546100" y="1244600"/>
+            <a:ext cx="412750" cy="127000"/>
+          </a:xfrm>
+          <a:prstGeom prst="rect">
+            <a:avLst/>
+          </a:prstGeom>
+          <a:solidFill>
+            <a:srgbClr val="FFFFFF"/>
+          </a:solidFill>
+          <a:ln w="12700">
+            <a:solidFill>
+              <a:srgbClr val="333333"/>
+            </a:solidFill>
+          </a:ln>
+        </p:spPr>
+        <p:style>
+          <a:lnRef idx="1">
+            <a:schemeClr val="accent1"/>
+          </a:lnRef>
+          <a:fillRef idx="3">
+            <a:schemeClr val="accent1"/>
+          </a:fillRef>
+          <a:effectRef idx="2">
+            <a:schemeClr val="accent1"/>
+          </a:effectRef>
+          <a:fontRef idx="minor">
+            <a:schemeClr val="lt1"/>
+          </a:fontRef>
+        </p:style>
+        <p:txBody>
+          <a:bodyPr rtlCol="0" anchor="ctr"/>
+          <a:lstStyle/>
+          <a:p>
+            <a:pPr algn="ctr"/>
+          </a:p>
+        </p:txBody>
+      </p:sp>
+      <p:sp>
+        <p:nvSpPr>
+          <p:cNvPr id="12" name="TextBox 11"/>
+          <p:cNvSpPr txBox="1"/>
+          <p:nvPr/>
+        </p:nvSpPr>
+        <p:spPr>
+          <a:xfrm>
+            <a:off x="577850" y="1257300"/>
+            <a:ext cx="387350" cy="101600"/>
+          </a:xfrm>
+          <a:prstGeom prst="rect">
+            <a:avLst/>
+          </a:prstGeom>
+          <a:noFill/>
+        </p:spPr>
+        <p:txBody>
+          <a:bodyPr wrap="square">
+            <a:spAutoFit/>
+          </a:bodyPr>
+          <a:lstStyle/>
+          <a:p>
+            <a:pPr algn="l"/>
+            <a:r>
+              <a:rPr sz="800" b="1" i="0">
+                <a:solidFill>
+                  <a:srgbClr val="333333"/>
+                </a:solidFill>
+                <a:latin typeface="Noto Sans KR"/>
+              </a:rPr>
+              <a:t>AR / XR</a:t>
+            </a:r>
+          </a:p>
+        </p:txBody>
+      </p:sp>
+      <p:sp>
+        <p:nvSpPr>
+          <p:cNvPr id="13" name="TextBox 12"/>
+          <p:cNvSpPr txBox="1"/>
+          <p:nvPr/>
+        </p:nvSpPr>
+        <p:spPr>
+          <a:xfrm>
+            <a:off x="546100" y="1409700"/>
+            <a:ext cx="3835400" cy="139700"/>
+          </a:xfrm>
+          <a:prstGeom prst="rect">
+            <a:avLst/>
+          </a:prstGeom>
+          <a:noFill/>
+        </p:spPr>
+        <p:txBody>
+          <a:bodyPr wrap="square">
+            <a:spAutoFit/>
+          </a:bodyPr>
+          <a:lstStyle/>
+          <a:p>
+            <a:pPr algn="l"/>
+            <a:r>
+              <a:rPr sz="1300" b="1" i="0">
+                <a:solidFill>
+                  <a:srgbClr val="111111"/>
+                </a:solidFill>
+                <a:latin typeface="Noto Sans KR"/>
+              </a:rPr>
+              <a:t>현장 도면 오버레이</a:t>
+            </a:r>
+          </a:p>
+        </p:txBody>
+      </p:sp>
+      <p:sp>
+        <p:nvSpPr>
+          <p:cNvPr id="14" name="TextBox 13"/>
+          <p:cNvSpPr txBox="1"/>
+          <p:nvPr/>
+        </p:nvSpPr>
+        <p:spPr>
+          <a:xfrm>
+            <a:off x="546100" y="1562100"/>
+            <a:ext cx="3835400" cy="736600"/>
+          </a:xfrm>
+          <a:prstGeom prst="rect">
+            <a:avLst/>
+          </a:prstGeom>
+          <a:noFill/>
+        </p:spPr>
+        <p:txBody>
+          <a:bodyPr wrap="square">
+            <a:spAutoFit/>
+          </a:bodyPr>
+          <a:lstStyle/>
+          <a:p>
+            <a:pPr algn="l"/>
+            <a:r>
+              <a:rPr sz="1100" b="0" i="0">
+                <a:solidFill>
+                  <a:srgbClr val="555555"/>
+                </a:solidFill>
+                <a:latin typeface="Noto Sans KR"/>
+              </a:rPr>
+              <a:t>태블릿·스마트글라스로 BIM 데이터를 실제 현장 공간에 실시간 중첩. 기능공이 도면 해석 없이 설계 의도를 직관적으로 파악. 오시공을 공정 중에 차단.</a:t>
+            </a:r>
+          </a:p>
+        </p:txBody>
+      </p:sp>
+      <p:sp>
+        <p:nvSpPr>
+          <p:cNvPr id="15" name="Rectangle 14"/>
+          <p:cNvSpPr/>
+          <p:nvPr/>
+        </p:nvSpPr>
+        <p:spPr>
+          <a:xfrm>
+            <a:off x="546100" y="2311400"/>
+            <a:ext cx="3835400" cy="6350"/>
+          </a:xfrm>
+          <a:prstGeom prst="rect">
+            <a:avLst/>
+          </a:prstGeom>
+          <a:solidFill>
+            <a:srgbClr val="E0E0E0"/>
+          </a:solidFill>
+          <a:ln>
+            <a:noFill/>
+          </a:ln>
+        </p:spPr>
+        <p:style>
+          <a:lnRef idx="1">
+            <a:schemeClr val="accent1"/>
+          </a:lnRef>
+          <a:fillRef idx="3">
+            <a:schemeClr val="accent1"/>
+          </a:fillRef>
+          <a:effectRef idx="2">
+            <a:schemeClr val="accent1"/>
+          </a:effectRef>
+          <a:fontRef idx="minor">
+            <a:schemeClr val="lt1"/>
+          </a:fontRef>
+        </p:style>
+        <p:txBody>
+          <a:bodyPr rtlCol="0" anchor="ctr"/>
+          <a:lstStyle/>
+          <a:p>
+            <a:pPr algn="ctr"/>
+          </a:p>
+        </p:txBody>
+      </p:sp>
+      <p:sp>
+        <p:nvSpPr>
+          <p:cNvPr id="16" name="TextBox 15"/>
+          <p:cNvSpPr txBox="1"/>
+          <p:nvPr/>
+        </p:nvSpPr>
+        <p:spPr>
+          <a:xfrm>
+            <a:off x="546100" y="2336800"/>
+            <a:ext cx="3835400" cy="152400"/>
+          </a:xfrm>
+          <a:prstGeom prst="rect">
+            <a:avLst/>
+          </a:prstGeom>
+          <a:noFill/>
+        </p:spPr>
+        <p:txBody>
+          <a:bodyPr wrap="square">
+            <a:spAutoFit/>
+          </a:bodyPr>
+          <a:lstStyle/>
+          <a:p>
+            <a:r>
+              <a:rPr sz="900" b="0" i="0">
+                <a:solidFill>
+                  <a:srgbClr val="888888"/>
+                </a:solidFill>
+                <a:latin typeface="Noto Sans KR"/>
+              </a:rPr>
+              <a:t>→ 필요 전문가: </a:t>
+            </a:r>
+            <a:r>
+              <a:rPr sz="900" b="1" i="0">
+                <a:solidFill>
+                  <a:srgbClr val="333333"/>
+                </a:solidFill>
+                <a:latin typeface="Noto Sans KR"/>
+              </a:rPr>
+              <a:t>광학·IoT·XR 엔지니어</a:t>
+            </a:r>
+          </a:p>
+        </p:txBody>
+      </p:sp>
+      <p:sp>
+        <p:nvSpPr>
+          <p:cNvPr id="17" name="Rectangle 16"/>
+          <p:cNvSpPr/>
+          <p:nvPr/>
+        </p:nvSpPr>
+        <p:spPr>
+          <a:xfrm>
+            <a:off x="4622800" y="825500"/>
+            <a:ext cx="4114800" cy="1689100"/>
+          </a:xfrm>
+          <a:prstGeom prst="rect">
+            <a:avLst/>
+          </a:prstGeom>
+          <a:solidFill>
+            <a:srgbClr val="F5F5F5"/>
+          </a:solidFill>
+          <a:ln>
+            <a:noFill/>
+          </a:ln>
+        </p:spPr>
+        <p:style>
+          <a:lnRef idx="1">
+            <a:schemeClr val="accent1"/>
+          </a:lnRef>
+          <a:fillRef idx="3">
+            <a:schemeClr val="accent1"/>
+          </a:fillRef>
+          <a:effectRef idx="2">
+            <a:schemeClr val="accent1"/>
+          </a:effectRef>
+          <a:fontRef idx="minor">
+            <a:schemeClr val="lt1"/>
+          </a:fontRef>
+        </p:style>
+        <p:txBody>
+          <a:bodyPr rtlCol="0" anchor="ctr"/>
+          <a:lstStyle/>
+          <a:p>
+            <a:pPr algn="ctr"/>
+          </a:p>
+        </p:txBody>
+      </p:sp>
+      <p:sp>
+        <p:nvSpPr>
+          <p:cNvPr id="18" name="TextBox 17"/>
+          <p:cNvSpPr txBox="1"/>
+          <p:nvPr/>
+        </p:nvSpPr>
+        <p:spPr>
+          <a:xfrm>
+            <a:off x="4762500" y="914400"/>
+            <a:ext cx="444500" cy="304800"/>
+          </a:xfrm>
+          <a:prstGeom prst="rect">
+            <a:avLst/>
+          </a:prstGeom>
+          <a:noFill/>
+        </p:spPr>
+        <p:txBody>
+          <a:bodyPr wrap="square">
+            <a:spAutoFit/>
+          </a:bodyPr>
+          <a:lstStyle/>
+          <a:p>
+            <a:pPr algn="l"/>
+            <a:r>
+              <a:rPr sz="3400" b="1" i="0">
+                <a:solidFill>
+                  <a:srgbClr val="E0E0E0"/>
+                </a:solidFill>
+                <a:latin typeface="Noto Sans KR"/>
+              </a:rPr>
+              <a:t>02</a:t>
+            </a:r>
+          </a:p>
+        </p:txBody>
+      </p:sp>
+      <p:sp>
+        <p:nvSpPr>
+          <p:cNvPr id="19" name="Rectangle 18"/>
+          <p:cNvSpPr/>
+          <p:nvPr/>
+        </p:nvSpPr>
+        <p:spPr>
+          <a:xfrm>
+            <a:off x="4762500" y="1244600"/>
+            <a:ext cx="412750" cy="127000"/>
+          </a:xfrm>
+          <a:prstGeom prst="rect">
+            <a:avLst/>
+          </a:prstGeom>
+          <a:solidFill>
+            <a:srgbClr val="FFFFFF"/>
+          </a:solidFill>
+          <a:ln w="12700">
+            <a:solidFill>
+              <a:srgbClr val="333333"/>
+            </a:solidFill>
+          </a:ln>
+        </p:spPr>
+        <p:style>
+          <a:lnRef idx="1">
+            <a:schemeClr val="accent1"/>
+          </a:lnRef>
+          <a:fillRef idx="3">
+            <a:schemeClr val="accent1"/>
+          </a:fillRef>
+          <a:effectRef idx="2">
+            <a:schemeClr val="accent1"/>
+          </a:effectRef>
+          <a:fontRef idx="minor">
+            <a:schemeClr val="lt1"/>
+          </a:fontRef>
+        </p:style>
+        <p:txBody>
+          <a:bodyPr rtlCol="0" anchor="ctr"/>
+          <a:lstStyle/>
+          <a:p>
+            <a:pPr algn="ctr"/>
+          </a:p>
+        </p:txBody>
+      </p:sp>
+      <p:sp>
+        <p:nvSpPr>
+          <p:cNvPr id="20" name="TextBox 19"/>
+          <p:cNvSpPr txBox="1"/>
+          <p:nvPr/>
+        </p:nvSpPr>
+        <p:spPr>
+          <a:xfrm>
+            <a:off x="4794250" y="1257300"/>
+            <a:ext cx="387350" cy="101600"/>
+          </a:xfrm>
+          <a:prstGeom prst="rect">
+            <a:avLst/>
+          </a:prstGeom>
+          <a:noFill/>
+        </p:spPr>
+        <p:txBody>
+          <a:bodyPr wrap="square">
+            <a:spAutoFit/>
+          </a:bodyPr>
+          <a:lstStyle/>
+          <a:p>
+            <a:pPr algn="l"/>
+            <a:r>
+              <a:rPr sz="800" b="1" i="0">
+                <a:solidFill>
+                  <a:srgbClr val="333333"/>
+                </a:solidFill>
+                <a:latin typeface="Noto Sans KR"/>
+              </a:rPr>
+              <a:t>AI / CV</a:t>
+            </a:r>
+          </a:p>
+        </p:txBody>
+      </p:sp>
+      <p:sp>
+        <p:nvSpPr>
+          <p:cNvPr id="21" name="TextBox 20"/>
+          <p:cNvSpPr txBox="1"/>
+          <p:nvPr/>
+        </p:nvSpPr>
+        <p:spPr>
+          <a:xfrm>
+            <a:off x="4762500" y="1409700"/>
+            <a:ext cx="3835400" cy="139700"/>
+          </a:xfrm>
+          <a:prstGeom prst="rect">
+            <a:avLst/>
+          </a:prstGeom>
+          <a:noFill/>
+        </p:spPr>
+        <p:txBody>
+          <a:bodyPr wrap="square">
+            <a:spAutoFit/>
+          </a:bodyPr>
+          <a:lstStyle/>
+          <a:p>
+            <a:pPr algn="l"/>
+            <a:r>
+              <a:rPr sz="1300" b="1" i="0">
+                <a:solidFill>
+                  <a:srgbClr val="111111"/>
+                </a:solidFill>
+                <a:latin typeface="Noto Sans KR"/>
+              </a:rPr>
+              <a:t>품질 검수 + 다국어 작업지시</a:t>
+            </a:r>
+          </a:p>
+        </p:txBody>
+      </p:sp>
+      <p:sp>
+        <p:nvSpPr>
+          <p:cNvPr id="22" name="TextBox 21"/>
+          <p:cNvSpPr txBox="1"/>
+          <p:nvPr/>
+        </p:nvSpPr>
+        <p:spPr>
+          <a:xfrm>
+            <a:off x="4762500" y="1562100"/>
+            <a:ext cx="3835400" cy="736600"/>
+          </a:xfrm>
+          <a:prstGeom prst="rect">
+            <a:avLst/>
+          </a:prstGeom>
+          <a:noFill/>
+        </p:spPr>
+        <p:txBody>
+          <a:bodyPr wrap="square">
+            <a:spAutoFit/>
+          </a:bodyPr>
+          <a:lstStyle/>
+          <a:p>
+            <a:pPr algn="l"/>
+            <a:r>
+              <a:rPr sz="1100" b="0" i="0">
+                <a:solidFill>
+                  <a:srgbClr val="555555"/>
+                </a:solidFill>
+                <a:latin typeface="Noto Sans KR"/>
+              </a:rPr>
+              <a:t>스마트폰 촬영만으로 수직·수평·마감 오류 실시간 AI 감지. 시공 지침을 베트남어·우즈벡어 등으로 즉시 변환 + 음성 안내. 언어 장벽 완전 제거.</a:t>
+            </a:r>
+          </a:p>
+        </p:txBody>
+      </p:sp>
+      <p:sp>
+        <p:nvSpPr>
+          <p:cNvPr id="23" name="Rectangle 22"/>
+          <p:cNvSpPr/>
+          <p:nvPr/>
+        </p:nvSpPr>
+        <p:spPr>
+          <a:xfrm>
+            <a:off x="4762500" y="2311400"/>
+            <a:ext cx="3835400" cy="6350"/>
+          </a:xfrm>
+          <a:prstGeom prst="rect">
+            <a:avLst/>
+          </a:prstGeom>
+          <a:solidFill>
+            <a:srgbClr val="E0E0E0"/>
+          </a:solidFill>
+          <a:ln>
+            <a:noFill/>
+          </a:ln>
+        </p:spPr>
+        <p:style>
+          <a:lnRef idx="1">
+            <a:schemeClr val="accent1"/>
+          </a:lnRef>
+          <a:fillRef idx="3">
+            <a:schemeClr val="accent1"/>
+          </a:fillRef>
+          <a:effectRef idx="2">
+            <a:schemeClr val="accent1"/>
+          </a:effectRef>
+          <a:fontRef idx="minor">
+            <a:schemeClr val="lt1"/>
+          </a:fontRef>
+        </p:style>
+        <p:txBody>
+          <a:bodyPr rtlCol="0" anchor="ctr"/>
+          <a:lstStyle/>
+          <a:p>
+            <a:pPr algn="ctr"/>
+          </a:p>
+        </p:txBody>
+      </p:sp>
+      <p:sp>
+        <p:nvSpPr>
+          <p:cNvPr id="24" name="TextBox 23"/>
+          <p:cNvSpPr txBox="1"/>
+          <p:nvPr/>
+        </p:nvSpPr>
+        <p:spPr>
+          <a:xfrm>
+            <a:off x="4762500" y="2336800"/>
+            <a:ext cx="3835400" cy="152400"/>
+          </a:xfrm>
+          <a:prstGeom prst="rect">
+            <a:avLst/>
+          </a:prstGeom>
+          <a:noFill/>
+        </p:spPr>
+        <p:txBody>
+          <a:bodyPr wrap="square">
+            <a:spAutoFit/>
+          </a:bodyPr>
+          <a:lstStyle/>
+          <a:p>
+            <a:r>
+              <a:rPr sz="900" b="0" i="0">
+                <a:solidFill>
+                  <a:srgbClr val="888888"/>
+                </a:solidFill>
+                <a:latin typeface="Noto Sans KR"/>
+              </a:rPr>
+              <a:t>→ 필요 전문가: </a:t>
+            </a:r>
+            <a:r>
+              <a:rPr sz="900" b="1" i="0">
+                <a:solidFill>
+                  <a:srgbClr val="333333"/>
+                </a:solidFill>
+                <a:latin typeface="Noto Sans KR"/>
+              </a:rPr>
+              <a:t>컴퓨터비전·NLP 데이터과학자</a:t>
+            </a:r>
+          </a:p>
+        </p:txBody>
+      </p:sp>
+      <p:sp>
+        <p:nvSpPr>
+          <p:cNvPr id="25" name="Rectangle 24"/>
+          <p:cNvSpPr/>
+          <p:nvPr/>
+        </p:nvSpPr>
+        <p:spPr>
+          <a:xfrm>
+            <a:off x="406400" y="2616200"/>
+            <a:ext cx="4114800" cy="1689100"/>
+          </a:xfrm>
+          <a:prstGeom prst="rect">
+            <a:avLst/>
+          </a:prstGeom>
+          <a:solidFill>
+            <a:srgbClr val="F5F5F5"/>
+          </a:solidFill>
+          <a:ln>
+            <a:noFill/>
+          </a:ln>
+        </p:spPr>
+        <p:style>
+          <a:lnRef idx="1">
+            <a:schemeClr val="accent1"/>
+          </a:lnRef>
+          <a:fillRef idx="3">
+            <a:schemeClr val="accent1"/>
+          </a:fillRef>
+          <a:effectRef idx="2">
+            <a:schemeClr val="accent1"/>
+          </a:effectRef>
+          <a:fontRef idx="minor">
+            <a:schemeClr val="lt1"/>
+          </a:fontRef>
+        </p:style>
+        <p:txBody>
+          <a:bodyPr rtlCol="0" anchor="ctr"/>
+          <a:lstStyle/>
+          <a:p>
+            <a:pPr algn="ctr"/>
+          </a:p>
+        </p:txBody>
+      </p:sp>
+      <p:sp>
+        <p:nvSpPr>
+          <p:cNvPr id="26" name="TextBox 25"/>
+          <p:cNvSpPr txBox="1"/>
+          <p:nvPr/>
+        </p:nvSpPr>
+        <p:spPr>
+          <a:xfrm>
+            <a:off x="546100" y="2705100"/>
+            <a:ext cx="444500" cy="304800"/>
+          </a:xfrm>
+          <a:prstGeom prst="rect">
+            <a:avLst/>
+          </a:prstGeom>
+          <a:noFill/>
+        </p:spPr>
+        <p:txBody>
+          <a:bodyPr wrap="square">
+            <a:spAutoFit/>
+          </a:bodyPr>
+          <a:lstStyle/>
+          <a:p>
+            <a:pPr algn="l"/>
+            <a:r>
+              <a:rPr sz="3400" b="1" i="0">
+                <a:solidFill>
+                  <a:srgbClr val="E0E0E0"/>
+                </a:solidFill>
+                <a:latin typeface="Noto Sans KR"/>
+              </a:rPr>
+              <a:t>03</a:t>
+            </a:r>
+          </a:p>
+        </p:txBody>
+      </p:sp>
+      <p:sp>
+        <p:nvSpPr>
+          <p:cNvPr id="27" name="Rectangle 26"/>
+          <p:cNvSpPr/>
+          <p:nvPr/>
+        </p:nvSpPr>
+        <p:spPr>
+          <a:xfrm>
+            <a:off x="546100" y="3035300"/>
+            <a:ext cx="946150" cy="127000"/>
+          </a:xfrm>
+          <a:prstGeom prst="rect">
+            <a:avLst/>
+          </a:prstGeom>
+          <a:solidFill>
+            <a:srgbClr val="FFFFFF"/>
+          </a:solidFill>
+          <a:ln w="12700">
+            <a:solidFill>
+              <a:srgbClr val="333333"/>
+            </a:solidFill>
+          </a:ln>
+        </p:spPr>
+        <p:style>
+          <a:lnRef idx="1">
+            <a:schemeClr val="accent1"/>
+          </a:lnRef>
+          <a:fillRef idx="3">
+            <a:schemeClr val="accent1"/>
+          </a:fillRef>
+          <a:effectRef idx="2">
+            <a:schemeClr val="accent1"/>
+          </a:effectRef>
+          <a:fontRef idx="minor">
+            <a:schemeClr val="lt1"/>
+          </a:fontRef>
+        </p:style>
+        <p:txBody>
+          <a:bodyPr rtlCol="0" anchor="ctr"/>
+          <a:lstStyle/>
+          <a:p>
+            <a:pPr algn="ctr"/>
+          </a:p>
+        </p:txBody>
+      </p:sp>
+      <p:sp>
+        <p:nvSpPr>
+          <p:cNvPr id="28" name="TextBox 27"/>
+          <p:cNvSpPr txBox="1"/>
+          <p:nvPr/>
+        </p:nvSpPr>
+        <p:spPr>
+          <a:xfrm>
+            <a:off x="577850" y="3048000"/>
+            <a:ext cx="920750" cy="101600"/>
+          </a:xfrm>
+          <a:prstGeom prst="rect">
+            <a:avLst/>
+          </a:prstGeom>
+          <a:noFill/>
+        </p:spPr>
+        <p:txBody>
+          <a:bodyPr wrap="square">
+            <a:spAutoFit/>
+          </a:bodyPr>
+          <a:lstStyle/>
+          <a:p>
+            <a:pPr algn="l"/>
+            <a:r>
+              <a:rPr sz="800" b="1" i="0">
+                <a:solidFill>
+                  <a:srgbClr val="333333"/>
+                </a:solidFill>
+                <a:latin typeface="Noto Sans KR"/>
+              </a:rPr>
+              <a:t>ROBOTICS + VR + EDU</a:t>
+            </a:r>
+          </a:p>
+        </p:txBody>
+      </p:sp>
+      <p:sp>
+        <p:nvSpPr>
+          <p:cNvPr id="29" name="TextBox 28"/>
+          <p:cNvSpPr txBox="1"/>
+          <p:nvPr/>
+        </p:nvSpPr>
+        <p:spPr>
+          <a:xfrm>
+            <a:off x="546100" y="3200400"/>
+            <a:ext cx="3835400" cy="139700"/>
+          </a:xfrm>
+          <a:prstGeom prst="rect">
+            <a:avLst/>
+          </a:prstGeom>
+          <a:noFill/>
+        </p:spPr>
+        <p:txBody>
+          <a:bodyPr wrap="square">
+            <a:spAutoFit/>
+          </a:bodyPr>
+          <a:lstStyle/>
+          <a:p>
+            <a:pPr algn="l"/>
+            <a:r>
+              <a:rPr sz="1300" b="1" i="0">
+                <a:solidFill>
+                  <a:srgbClr val="111111"/>
+                </a:solidFill>
+                <a:latin typeface="Noto Sans KR"/>
+              </a:rPr>
+              <a:t>현장 자동화 + 기능인력 교육 인프라</a:t>
+            </a:r>
+          </a:p>
+        </p:txBody>
+      </p:sp>
+      <p:sp>
+        <p:nvSpPr>
+          <p:cNvPr id="30" name="TextBox 29"/>
+          <p:cNvSpPr txBox="1"/>
+          <p:nvPr/>
+        </p:nvSpPr>
+        <p:spPr>
+          <a:xfrm>
+            <a:off x="546100" y="3352800"/>
+            <a:ext cx="3835400" cy="736600"/>
+          </a:xfrm>
+          <a:prstGeom prst="rect">
+            <a:avLst/>
+          </a:prstGeom>
+          <a:noFill/>
+        </p:spPr>
+        <p:txBody>
+          <a:bodyPr wrap="square">
+            <a:spAutoFit/>
+          </a:bodyPr>
+          <a:lstStyle/>
+          <a:p>
+            <a:pPr algn="l"/>
+            <a:r>
+              <a:rPr sz="1100" b="0" i="0">
+                <a:solidFill>
+                  <a:srgbClr val="555555"/>
+                </a:solidFill>
+                <a:latin typeface="Noto Sans KR"/>
+              </a:rPr>
+              <a:t>로봇이 반복 작업 수행 → 인간은 CQP(건설품질전문가)로 전환. 3-Layer: ① VR 시뮬레이션으로 숙련 노하우 계승 ② 한국폴리텍대학 연계 CQP 정규 트랙 + 블록체인 자격증 ③ 송출국 현지 사전 교육 → 입국 즉시 투입.</a:t>
+            </a:r>
+          </a:p>
+        </p:txBody>
+      </p:sp>
+      <p:sp>
+        <p:nvSpPr>
+          <p:cNvPr id="31" name="Rectangle 30"/>
+          <p:cNvSpPr/>
+          <p:nvPr/>
+        </p:nvSpPr>
+        <p:spPr>
+          <a:xfrm>
+            <a:off x="546100" y="4102100"/>
+            <a:ext cx="3835400" cy="6350"/>
+          </a:xfrm>
+          <a:prstGeom prst="rect">
+            <a:avLst/>
+          </a:prstGeom>
+          <a:solidFill>
+            <a:srgbClr val="E0E0E0"/>
+          </a:solidFill>
+          <a:ln>
+            <a:noFill/>
+          </a:ln>
+        </p:spPr>
+        <p:style>
+          <a:lnRef idx="1">
+            <a:schemeClr val="accent1"/>
+          </a:lnRef>
+          <a:fillRef idx="3">
+            <a:schemeClr val="accent1"/>
+          </a:fillRef>
+          <a:effectRef idx="2">
+            <a:schemeClr val="accent1"/>
+          </a:effectRef>
+          <a:fontRef idx="minor">
+            <a:schemeClr val="lt1"/>
+          </a:fontRef>
+        </p:style>
+        <p:txBody>
+          <a:bodyPr rtlCol="0" anchor="ctr"/>
+          <a:lstStyle/>
+          <a:p>
+            <a:pPr algn="ctr"/>
+          </a:p>
+        </p:txBody>
+      </p:sp>
+      <p:sp>
+        <p:nvSpPr>
+          <p:cNvPr id="32" name="TextBox 31"/>
+          <p:cNvSpPr txBox="1"/>
+          <p:nvPr/>
+        </p:nvSpPr>
+        <p:spPr>
+          <a:xfrm>
+            <a:off x="546100" y="4127500"/>
+            <a:ext cx="3835400" cy="152400"/>
+          </a:xfrm>
+          <a:prstGeom prst="rect">
+            <a:avLst/>
+          </a:prstGeom>
+          <a:noFill/>
+        </p:spPr>
+        <p:txBody>
+          <a:bodyPr wrap="square">
+            <a:spAutoFit/>
+          </a:bodyPr>
+          <a:lstStyle/>
+          <a:p>
+            <a:r>
+              <a:rPr sz="900" b="0" i="0">
+                <a:solidFill>
+                  <a:srgbClr val="888888"/>
+                </a:solidFill>
+                <a:latin typeface="Noto Sans KR"/>
+              </a:rPr>
+              <a:t>→ 필요 전문가: </a:t>
+            </a:r>
+            <a:r>
+              <a:rPr sz="900" b="1" i="0">
+                <a:solidFill>
+                  <a:srgbClr val="333333"/>
+                </a:solidFill>
+                <a:latin typeface="Noto Sans KR"/>
+              </a:rPr>
+              <a:t>로보틱스·HCI·VR·직업교육 연구자</a:t>
+            </a:r>
+          </a:p>
+        </p:txBody>
+      </p:sp>
+      <p:sp>
+        <p:nvSpPr>
+          <p:cNvPr id="33" name="Rectangle 32"/>
+          <p:cNvSpPr/>
+          <p:nvPr/>
+        </p:nvSpPr>
+        <p:spPr>
+          <a:xfrm>
+            <a:off x="4622800" y="2616200"/>
+            <a:ext cx="4114800" cy="1689100"/>
+          </a:xfrm>
+          <a:prstGeom prst="rect">
+            <a:avLst/>
+          </a:prstGeom>
+          <a:solidFill>
+            <a:srgbClr val="F5F5F5"/>
+          </a:solidFill>
+          <a:ln>
+            <a:noFill/>
+          </a:ln>
+        </p:spPr>
+        <p:style>
+          <a:lnRef idx="1">
+            <a:schemeClr val="accent1"/>
+          </a:lnRef>
+          <a:fillRef idx="3">
+            <a:schemeClr val="accent1"/>
+          </a:fillRef>
+          <a:effectRef idx="2">
+            <a:schemeClr val="accent1"/>
+          </a:effectRef>
+          <a:fontRef idx="minor">
+            <a:schemeClr val="lt1"/>
+          </a:fontRef>
+        </p:style>
+        <p:txBody>
+          <a:bodyPr rtlCol="0" anchor="ctr"/>
+          <a:lstStyle/>
+          <a:p>
+            <a:pPr algn="ctr"/>
+          </a:p>
+        </p:txBody>
+      </p:sp>
+      <p:sp>
+        <p:nvSpPr>
+          <p:cNvPr id="34" name="TextBox 33"/>
+          <p:cNvSpPr txBox="1"/>
+          <p:nvPr/>
+        </p:nvSpPr>
+        <p:spPr>
+          <a:xfrm>
+            <a:off x="4762500" y="2705100"/>
+            <a:ext cx="444500" cy="304800"/>
+          </a:xfrm>
+          <a:prstGeom prst="rect">
+            <a:avLst/>
+          </a:prstGeom>
+          <a:noFill/>
+        </p:spPr>
+        <p:txBody>
+          <a:bodyPr wrap="square">
+            <a:spAutoFit/>
+          </a:bodyPr>
+          <a:lstStyle/>
+          <a:p>
+            <a:pPr algn="l"/>
+            <a:r>
+              <a:rPr sz="3400" b="1" i="0">
+                <a:solidFill>
+                  <a:srgbClr val="E0E0E0"/>
+                </a:solidFill>
+                <a:latin typeface="Noto Sans KR"/>
+              </a:rPr>
+              <a:t>04</a:t>
+            </a:r>
+          </a:p>
+        </p:txBody>
+      </p:sp>
+      <p:sp>
+        <p:nvSpPr>
+          <p:cNvPr id="35" name="Rectangle 34"/>
+          <p:cNvSpPr/>
+          <p:nvPr/>
+        </p:nvSpPr>
+        <p:spPr>
+          <a:xfrm>
+            <a:off x="4762500" y="3035300"/>
+            <a:ext cx="546100" cy="127000"/>
+          </a:xfrm>
+          <a:prstGeom prst="rect">
+            <a:avLst/>
+          </a:prstGeom>
+          <a:solidFill>
+            <a:srgbClr val="FFFFFF"/>
+          </a:solidFill>
+          <a:ln w="12700">
+            <a:solidFill>
+              <a:srgbClr val="333333"/>
+            </a:solidFill>
+          </a:ln>
+        </p:spPr>
+        <p:style>
+          <a:lnRef idx="1">
+            <a:schemeClr val="accent1"/>
+          </a:lnRef>
+          <a:fillRef idx="3">
+            <a:schemeClr val="accent1"/>
+          </a:fillRef>
+          <a:effectRef idx="2">
+            <a:schemeClr val="accent1"/>
+          </a:effectRef>
+          <a:fontRef idx="minor">
+            <a:schemeClr val="lt1"/>
+          </a:fontRef>
+        </p:style>
+        <p:txBody>
+          <a:bodyPr rtlCol="0" anchor="ctr"/>
+          <a:lstStyle/>
+          <a:p>
+            <a:pPr algn="ctr"/>
+          </a:p>
+        </p:txBody>
+      </p:sp>
+      <p:sp>
+        <p:nvSpPr>
+          <p:cNvPr id="36" name="TextBox 35"/>
+          <p:cNvSpPr txBox="1"/>
+          <p:nvPr/>
+        </p:nvSpPr>
+        <p:spPr>
+          <a:xfrm>
+            <a:off x="4794250" y="3048000"/>
+            <a:ext cx="520700" cy="101600"/>
+          </a:xfrm>
+          <a:prstGeom prst="rect">
+            <a:avLst/>
+          </a:prstGeom>
+          <a:noFill/>
+        </p:spPr>
+        <p:txBody>
+          <a:bodyPr wrap="square">
+            <a:spAutoFit/>
+          </a:bodyPr>
+          <a:lstStyle/>
+          <a:p>
+            <a:pPr algn="l"/>
+            <a:r>
+              <a:rPr sz="800" b="1" i="0">
+                <a:solidFill>
+                  <a:srgbClr val="333333"/>
+                </a:solidFill>
+                <a:latin typeface="Noto Sans KR"/>
+              </a:rPr>
+              <a:t>BLOCKCHAIN</a:t>
+            </a:r>
+          </a:p>
+        </p:txBody>
+      </p:sp>
+      <p:sp>
+        <p:nvSpPr>
+          <p:cNvPr id="37" name="TextBox 36"/>
+          <p:cNvSpPr txBox="1"/>
+          <p:nvPr/>
+        </p:nvSpPr>
+        <p:spPr>
+          <a:xfrm>
+            <a:off x="4762500" y="3200400"/>
+            <a:ext cx="3835400" cy="139700"/>
+          </a:xfrm>
+          <a:prstGeom prst="rect">
+            <a:avLst/>
+          </a:prstGeom>
+          <a:noFill/>
+        </p:spPr>
+        <p:txBody>
+          <a:bodyPr wrap="square">
+            <a:spAutoFit/>
+          </a:bodyPr>
+          <a:lstStyle/>
+          <a:p>
+            <a:pPr algn="l"/>
+            <a:r>
+              <a:rPr sz="1300" b="1" i="0">
+                <a:solidFill>
+                  <a:srgbClr val="111111"/>
+                </a:solidFill>
+                <a:latin typeface="Noto Sans KR"/>
+              </a:rPr>
+              <a:t>설계 이력 보존 + 품질 인증</a:t>
+            </a:r>
+          </a:p>
+        </p:txBody>
+      </p:sp>
+      <p:sp>
+        <p:nvSpPr>
+          <p:cNvPr id="38" name="TextBox 37"/>
+          <p:cNvSpPr txBox="1"/>
+          <p:nvPr/>
+        </p:nvSpPr>
+        <p:spPr>
+          <a:xfrm>
+            <a:off x="4762500" y="3352800"/>
+            <a:ext cx="3835400" cy="736600"/>
+          </a:xfrm>
+          <a:prstGeom prst="rect">
+            <a:avLst/>
+          </a:prstGeom>
+          <a:noFill/>
+        </p:spPr>
+        <p:txBody>
+          <a:bodyPr wrap="square">
+            <a:spAutoFit/>
+          </a:bodyPr>
+          <a:lstStyle/>
+          <a:p>
+            <a:pPr algn="l"/>
+            <a:r>
+              <a:rPr sz="1100" b="0" i="0">
+                <a:solidFill>
+                  <a:srgbClr val="555555"/>
+                </a:solidFill>
+                <a:latin typeface="Noto Sans KR"/>
+              </a:rPr>
+              <a:t>BIM 원본·시공 전 과정·준공 데이터를 블록체인 등록. 조작 불가능한 품질 기록. 설계-시공 일치율 자동 산출 → 데이터가 품질을 증명.</a:t>
+            </a:r>
+          </a:p>
+        </p:txBody>
+      </p:sp>
+      <p:sp>
+        <p:nvSpPr>
+          <p:cNvPr id="39" name="Rectangle 38"/>
+          <p:cNvSpPr/>
+          <p:nvPr/>
+        </p:nvSpPr>
+        <p:spPr>
+          <a:xfrm>
+            <a:off x="4762500" y="4102100"/>
+            <a:ext cx="3835400" cy="6350"/>
+          </a:xfrm>
+          <a:prstGeom prst="rect">
+            <a:avLst/>
+          </a:prstGeom>
+          <a:solidFill>
+            <a:srgbClr val="E0E0E0"/>
+          </a:solidFill>
+          <a:ln>
+            <a:noFill/>
+          </a:ln>
+        </p:spPr>
+        <p:style>
+          <a:lnRef idx="1">
+            <a:schemeClr val="accent1"/>
+          </a:lnRef>
+          <a:fillRef idx="3">
+            <a:schemeClr val="accent1"/>
+          </a:fillRef>
+          <a:effectRef idx="2">
+            <a:schemeClr val="accent1"/>
+          </a:effectRef>
+          <a:fontRef idx="minor">
+            <a:schemeClr val="lt1"/>
+          </a:fontRef>
+        </p:style>
+        <p:txBody>
+          <a:bodyPr rtlCol="0" anchor="ctr"/>
+          <a:lstStyle/>
+          <a:p>
+            <a:pPr algn="ctr"/>
+          </a:p>
+        </p:txBody>
+      </p:sp>
+      <p:sp>
+        <p:nvSpPr>
+          <p:cNvPr id="40" name="TextBox 39"/>
+          <p:cNvSpPr txBox="1"/>
+          <p:nvPr/>
+        </p:nvSpPr>
+        <p:spPr>
+          <a:xfrm>
+            <a:off x="4762500" y="4127500"/>
+            <a:ext cx="3835400" cy="152400"/>
+          </a:xfrm>
+          <a:prstGeom prst="rect">
+            <a:avLst/>
+          </a:prstGeom>
+          <a:noFill/>
+        </p:spPr>
+        <p:txBody>
+          <a:bodyPr wrap="square">
+            <a:spAutoFit/>
+          </a:bodyPr>
+          <a:lstStyle/>
+          <a:p>
+            <a:r>
+              <a:rPr sz="900" b="0" i="0">
+                <a:solidFill>
+                  <a:srgbClr val="888888"/>
+                </a:solidFill>
+                <a:latin typeface="Noto Sans KR"/>
+              </a:rPr>
+              <a:t>→ 필요 전문가: </a:t>
+            </a:r>
+            <a:r>
+              <a:rPr sz="900" b="1" i="0">
+                <a:solidFill>
+                  <a:srgbClr val="333333"/>
+                </a:solidFill>
+                <a:latin typeface="Noto Sans KR"/>
+              </a:rPr>
+              <a:t>분산원장·공공정책·법제도 전문가</a:t>
+            </a:r>
+          </a:p>
+        </p:txBody>
+      </p:sp>
     </p:spTree>
   </p:cSld>
   <p:clrMapOvr>
@@ -3218,30 +7983,863 @@
         <p:nvPr/>
       </p:nvGrpSpPr>
       <p:grpSpPr/>
-      <p:pic>
-        <p:nvPicPr>
-          <p:cNvPr id="2" name="Picture 1" descr="ppt_slide_4.png"/>
-          <p:cNvPicPr>
-            <a:picLocks noChangeAspect="1"/>
-          </p:cNvPicPr>
-          <p:nvPr/>
-        </p:nvPicPr>
-        <p:blipFill>
-          <a:blip r:embed="rId2"/>
-          <a:stretch>
-            <a:fillRect/>
-          </a:stretch>
-        </p:blipFill>
-        <p:spPr>
-          <a:xfrm>
-            <a:off x="0" y="0"/>
-            <a:ext cx="9144000" cy="5143500"/>
-          </a:xfrm>
-          <a:prstGeom prst="rect">
-            <a:avLst/>
-          </a:prstGeom>
-        </p:spPr>
-      </p:pic>
+      <p:sp>
+        <p:nvSpPr>
+          <p:cNvPr id="2" name="TextBox 1"/>
+          <p:cNvSpPr txBox="1"/>
+          <p:nvPr/>
+        </p:nvSpPr>
+        <p:spPr>
+          <a:xfrm>
+            <a:off x="406400" y="165100"/>
+            <a:ext cx="1905000" cy="127000"/>
+          </a:xfrm>
+          <a:prstGeom prst="rect">
+            <a:avLst/>
+          </a:prstGeom>
+          <a:noFill/>
+        </p:spPr>
+        <p:txBody>
+          <a:bodyPr wrap="square">
+            <a:spAutoFit/>
+          </a:bodyPr>
+          <a:lstStyle/>
+          <a:p>
+            <a:pPr algn="l"/>
+            <a:r>
+              <a:rPr sz="1000" b="0" i="0">
+                <a:solidFill>
+                  <a:srgbClr val="555555"/>
+                </a:solidFill>
+                <a:latin typeface="Noto Sans KR"/>
+              </a:rPr>
+              <a:t>2026.07.08.</a:t>
+            </a:r>
+          </a:p>
+        </p:txBody>
+      </p:sp>
+      <p:sp>
+        <p:nvSpPr>
+          <p:cNvPr id="3" name="TextBox 2"/>
+          <p:cNvSpPr txBox="1"/>
+          <p:nvPr/>
+        </p:nvSpPr>
+        <p:spPr>
+          <a:xfrm>
+            <a:off x="8318500" y="139700"/>
+            <a:ext cx="419100" cy="165100"/>
+          </a:xfrm>
+          <a:prstGeom prst="rect">
+            <a:avLst/>
+          </a:prstGeom>
+          <a:noFill/>
+        </p:spPr>
+        <p:txBody>
+          <a:bodyPr wrap="square">
+            <a:spAutoFit/>
+          </a:bodyPr>
+          <a:lstStyle/>
+          <a:p>
+            <a:pPr algn="r"/>
+            <a:r>
+              <a:rPr sz="1800" b="0" i="0">
+                <a:solidFill>
+                  <a:srgbClr val="555555"/>
+                </a:solidFill>
+                <a:latin typeface="Noto Sans KR"/>
+              </a:rPr>
+              <a:t>×</a:t>
+            </a:r>
+          </a:p>
+        </p:txBody>
+      </p:sp>
+      <p:sp>
+        <p:nvSpPr>
+          <p:cNvPr id="4" name="TextBox 3"/>
+          <p:cNvSpPr txBox="1"/>
+          <p:nvPr/>
+        </p:nvSpPr>
+        <p:spPr>
+          <a:xfrm>
+            <a:off x="406400" y="317500"/>
+            <a:ext cx="381000" cy="190500"/>
+          </a:xfrm>
+          <a:prstGeom prst="rect">
+            <a:avLst/>
+          </a:prstGeom>
+          <a:noFill/>
+        </p:spPr>
+        <p:txBody>
+          <a:bodyPr wrap="square">
+            <a:spAutoFit/>
+          </a:bodyPr>
+          <a:lstStyle/>
+          <a:p>
+            <a:pPr algn="l"/>
+            <a:r>
+              <a:rPr sz="2000" b="1" i="0">
+                <a:solidFill>
+                  <a:srgbClr val="111111"/>
+                </a:solidFill>
+                <a:latin typeface="Noto Sans KR"/>
+              </a:rPr>
+              <a:t>03</a:t>
+            </a:r>
+          </a:p>
+        </p:txBody>
+      </p:sp>
+      <p:sp>
+        <p:nvSpPr>
+          <p:cNvPr id="5" name="TextBox 4"/>
+          <p:cNvSpPr txBox="1"/>
+          <p:nvPr/>
+        </p:nvSpPr>
+        <p:spPr>
+          <a:xfrm>
+            <a:off x="800100" y="342900"/>
+            <a:ext cx="7302500" cy="152400"/>
+          </a:xfrm>
+          <a:prstGeom prst="rect">
+            <a:avLst/>
+          </a:prstGeom>
+          <a:noFill/>
+        </p:spPr>
+        <p:txBody>
+          <a:bodyPr wrap="square">
+            <a:spAutoFit/>
+          </a:bodyPr>
+          <a:lstStyle/>
+          <a:p>
+            <a:pPr algn="l"/>
+            <a:r>
+              <a:rPr sz="1300" b="0" i="0">
+                <a:solidFill>
+                  <a:srgbClr val="333333"/>
+                </a:solidFill>
+                <a:latin typeface="Noto Sans KR"/>
+              </a:rPr>
+              <a:t>산학협력 방안: 초학제 연구팀 구성</a:t>
+            </a:r>
+          </a:p>
+        </p:txBody>
+      </p:sp>
+      <p:sp>
+        <p:nvSpPr>
+          <p:cNvPr id="6" name="Rectangle 5"/>
+          <p:cNvSpPr/>
+          <p:nvPr/>
+        </p:nvSpPr>
+        <p:spPr>
+          <a:xfrm>
+            <a:off x="406400" y="533400"/>
+            <a:ext cx="1841500" cy="25400"/>
+          </a:xfrm>
+          <a:prstGeom prst="rect">
+            <a:avLst/>
+          </a:prstGeom>
+          <a:solidFill>
+            <a:srgbClr val="111111"/>
+          </a:solidFill>
+          <a:ln>
+            <a:noFill/>
+          </a:ln>
+        </p:spPr>
+        <p:style>
+          <a:lnRef idx="1">
+            <a:schemeClr val="accent1"/>
+          </a:lnRef>
+          <a:fillRef idx="3">
+            <a:schemeClr val="accent1"/>
+          </a:fillRef>
+          <a:effectRef idx="2">
+            <a:schemeClr val="accent1"/>
+          </a:effectRef>
+          <a:fontRef idx="minor">
+            <a:schemeClr val="lt1"/>
+          </a:fontRef>
+        </p:style>
+        <p:txBody>
+          <a:bodyPr rtlCol="0" anchor="ctr"/>
+          <a:lstStyle/>
+          <a:p>
+            <a:pPr algn="ctr"/>
+          </a:p>
+        </p:txBody>
+      </p:sp>
+      <p:sp>
+        <p:nvSpPr>
+          <p:cNvPr id="7" name="Rectangle 6"/>
+          <p:cNvSpPr/>
+          <p:nvPr/>
+        </p:nvSpPr>
+        <p:spPr>
+          <a:xfrm>
+            <a:off x="2247900" y="546100"/>
+            <a:ext cx="6489700" cy="6350"/>
+          </a:xfrm>
+          <a:prstGeom prst="rect">
+            <a:avLst/>
+          </a:prstGeom>
+          <a:solidFill>
+            <a:srgbClr val="CCCCCC"/>
+          </a:solidFill>
+          <a:ln>
+            <a:noFill/>
+          </a:ln>
+        </p:spPr>
+        <p:style>
+          <a:lnRef idx="1">
+            <a:schemeClr val="accent1"/>
+          </a:lnRef>
+          <a:fillRef idx="3">
+            <a:schemeClr val="accent1"/>
+          </a:fillRef>
+          <a:effectRef idx="2">
+            <a:schemeClr val="accent1"/>
+          </a:effectRef>
+          <a:fontRef idx="minor">
+            <a:schemeClr val="lt1"/>
+          </a:fontRef>
+        </p:style>
+        <p:txBody>
+          <a:bodyPr rtlCol="0" anchor="ctr"/>
+          <a:lstStyle/>
+          <a:p>
+            <a:pPr algn="ctr"/>
+          </a:p>
+        </p:txBody>
+      </p:sp>
+      <p:sp>
+        <p:nvSpPr>
+          <p:cNvPr id="8" name="TextBox 7"/>
+          <p:cNvSpPr txBox="1"/>
+          <p:nvPr/>
+        </p:nvSpPr>
+        <p:spPr>
+          <a:xfrm>
+            <a:off x="406400" y="635000"/>
+            <a:ext cx="8331200" cy="279400"/>
+          </a:xfrm>
+          <a:prstGeom prst="rect">
+            <a:avLst/>
+          </a:prstGeom>
+          <a:noFill/>
+        </p:spPr>
+        <p:txBody>
+          <a:bodyPr wrap="square">
+            <a:spAutoFit/>
+          </a:bodyPr>
+          <a:lstStyle/>
+          <a:p>
+            <a:pPr algn="l"/>
+            <a:r>
+              <a:rPr sz="1200" b="1" i="1">
+                <a:solidFill>
+                  <a:srgbClr val="111111"/>
+                </a:solidFill>
+                <a:latin typeface="Noto Sans KR"/>
+              </a:rPr>
+              <a:t>"건설 디지털 전환은 어느 단일 기관이 독점할 수 없다. AR·AI·로보틱스·블록체인 각 레이어를 선도하는 연구팀과 기술을 공동 개발하고, 실제 현장 실증으로 상용화까지 연결한다."</a:t>
+            </a:r>
+          </a:p>
+        </p:txBody>
+      </p:sp>
+      <p:graphicFrame>
+        <p:nvGraphicFramePr>
+          <p:cNvPr id="9" name="Table 8"/>
+          <p:cNvGraphicFramePr>
+            <a:graphicFrameLocks noGrp="1"/>
+          </p:cNvGraphicFramePr>
+          <p:nvPr/>
+        </p:nvGraphicFramePr>
+        <p:xfrm>
+          <a:off x="406400" y="952500"/>
+          <a:ext cx="8331200" cy="3911600"/>
+        </p:xfrm>
+        <a:graphic>
+          <a:graphicData uri="http://schemas.openxmlformats.org/drawingml/2006/table">
+            <a:tbl>
+              <a:tblPr firstRow="1" bandRow="1">
+                <a:tableStyleId>{5C22544A-7EE6-4342-B048-85BDC9FD1C3A}</a:tableStyleId>
+              </a:tblPr>
+              <a:tblGrid>
+                <a:gridCol w="1333500"/>
+                <a:gridCol w="2540000"/>
+                <a:gridCol w="4457700"/>
+              </a:tblGrid>
+              <a:tr h="254000">
+                <a:tc>
+                  <a:txBody>
+                    <a:bodyPr/>
+                    <a:lstStyle/>
+                    <a:p>
+                      <a:pPr algn="l"/>
+                      <a:r>
+                        <a:rPr sz="1100" b="1" i="0">
+                          <a:solidFill>
+                            <a:srgbClr val="FFFFFF"/>
+                          </a:solidFill>
+                          <a:latin typeface="Noto Sans KR"/>
+                        </a:rPr>
+                        <a:t>협력 분야</a:t>
+                      </a:r>
+                    </a:p>
+                  </a:txBody>
+                  <a:tcPr>
+                    <a:solidFill>
+                      <a:srgbClr val="555555"/>
+                    </a:solidFill>
+                  </a:tcPr>
+                </a:tc>
+                <a:tc>
+                  <a:txBody>
+                    <a:bodyPr/>
+                    <a:lstStyle/>
+                    <a:p>
+                      <a:pPr algn="l"/>
+                      <a:r>
+                        <a:rPr sz="1100" b="1" i="0">
+                          <a:solidFill>
+                            <a:srgbClr val="FFFFFF"/>
+                          </a:solidFill>
+                          <a:latin typeface="Noto Sans KR"/>
+                        </a:rPr>
+                        <a:t>담당 연구실 / 기관</a:t>
+                      </a:r>
+                    </a:p>
+                  </a:txBody>
+                  <a:tcPr>
+                    <a:solidFill>
+                      <a:srgbClr val="111111"/>
+                    </a:solidFill>
+                  </a:tcPr>
+                </a:tc>
+                <a:tc>
+                  <a:txBody>
+                    <a:bodyPr/>
+                    <a:lstStyle/>
+                    <a:p>
+                      <a:pPr algn="l"/>
+                      <a:r>
+                        <a:rPr sz="1100" b="1" i="0">
+                          <a:solidFill>
+                            <a:srgbClr val="FFFFFF"/>
+                          </a:solidFill>
+                          <a:latin typeface="Noto Sans KR"/>
+                        </a:rPr>
+                        <a:t>주요 역할 및 추진 내용</a:t>
+                      </a:r>
+                    </a:p>
+                  </a:txBody>
+                  <a:tcPr>
+                    <a:solidFill>
+                      <a:srgbClr val="111111"/>
+                    </a:solidFill>
+                  </a:tcPr>
+                </a:tc>
+              </a:tr>
+              <a:tr h="609600">
+                <a:tc>
+                  <a:txBody>
+                    <a:bodyPr/>
+                    <a:lstStyle/>
+                    <a:p>
+                      <a:pPr algn="l"/>
+                      <a:r>
+                        <a:rPr sz="1000" b="1" i="0">
+                          <a:solidFill>
+                            <a:srgbClr val="111111"/>
+                          </a:solidFill>
+                          <a:latin typeface="Noto Sans KR"/>
+                        </a:rPr>
+                        <a:t>AR / XR</a:t>
+                      </a:r>
+                    </a:p>
+                  </a:txBody>
+                  <a:tcPr>
+                    <a:solidFill>
+                      <a:srgbClr val="F8F8F8"/>
+                    </a:solidFill>
+                  </a:tcPr>
+                </a:tc>
+                <a:tc>
+                  <a:txBody>
+                    <a:bodyPr wrap="square"/>
+                    <a:lstStyle/>
+                    <a:p>
+                      <a:pPr algn="l"/>
+                      <a:r>
+                        <a:rPr sz="1000" b="0" i="0">
+                          <a:solidFill>
+                            <a:srgbClr val="111111"/>
+                          </a:solidFill>
+                          <a:latin typeface="Noto Sans KR"/>
+                        </a:rPr>
+                        <a:t>서울대 전기정보공학부</a:t>
+                      </a:r>
+                    </a:p>
+                    <a:p>
+                      <a:pPr algn="l"/>
+                      <a:r>
+                        <a:rPr sz="900" b="0" i="0">
+                          <a:solidFill>
+                            <a:srgbClr val="888888"/>
+                          </a:solidFill>
+                          <a:latin typeface="Noto Sans KR"/>
+                        </a:rPr>
+                        <a:t>XR·3D 공간인식 연구실</a:t>
+                      </a:r>
+                    </a:p>
+                  </a:txBody>
+                  <a:tcPr>
+                    <a:solidFill>
+                      <a:srgbClr val="FFFFFF"/>
+                    </a:solidFill>
+                  </a:tcPr>
+                </a:tc>
+                <a:tc>
+                  <a:txBody>
+                    <a:bodyPr wrap="square"/>
+                    <a:lstStyle/>
+                    <a:p>
+                      <a:pPr algn="l"/>
+                      <a:r>
+                        <a:rPr sz="1000" b="0" i="0">
+                          <a:solidFill>
+                            <a:srgbClr val="333333"/>
+                          </a:solidFill>
+                          <a:latin typeface="Noto Sans KR"/>
+                        </a:rPr>
+                        <a:t>BIM-현장 실시간 공간 정합 알고리즘 개발, 스마트글라스 현장 UI 최적화 및 공공건물 PoC</a:t>
+                      </a:r>
+                    </a:p>
+                  </a:txBody>
+                  <a:tcPr>
+                    <a:solidFill>
+                      <a:srgbClr val="FFFFFF"/>
+                    </a:solidFill>
+                  </a:tcPr>
+                </a:tc>
+              </a:tr>
+              <a:tr h="609600">
+                <a:tc>
+                  <a:txBody>
+                    <a:bodyPr/>
+                    <a:lstStyle/>
+                    <a:p>
+                      <a:pPr algn="l"/>
+                      <a:r>
+                        <a:rPr sz="1000" b="1" i="0">
+                          <a:solidFill>
+                            <a:srgbClr val="111111"/>
+                          </a:solidFill>
+                          <a:latin typeface="Noto Sans KR"/>
+                        </a:rPr>
+                        <a:t>AI / CV · NLP</a:t>
+                      </a:r>
+                    </a:p>
+                  </a:txBody>
+                  <a:tcPr>
+                    <a:solidFill>
+                      <a:srgbClr val="EBEBEB"/>
+                    </a:solidFill>
+                  </a:tcPr>
+                </a:tc>
+                <a:tc>
+                  <a:txBody>
+                    <a:bodyPr wrap="square"/>
+                    <a:lstStyle/>
+                    <a:p>
+                      <a:pPr algn="l"/>
+                      <a:r>
+                        <a:rPr sz="1000" b="0" i="0">
+                          <a:solidFill>
+                            <a:srgbClr val="111111"/>
+                          </a:solidFill>
+                          <a:latin typeface="Noto Sans KR"/>
+                        </a:rPr>
+                        <a:t>서울대 AI연구원 (AIIS)</a:t>
+                      </a:r>
+                    </a:p>
+                    <a:p>
+                      <a:pPr algn="l"/>
+                      <a:r>
+                        <a:rPr sz="900" b="0" i="0">
+                          <a:solidFill>
+                            <a:srgbClr val="888888"/>
+                          </a:solidFill>
+                          <a:latin typeface="Noto Sans KR"/>
+                        </a:rPr>
+                        <a:t>컴퓨터비전·자연어처리</a:t>
+                      </a:r>
+                    </a:p>
+                  </a:txBody>
+                  <a:tcPr>
+                    <a:solidFill>
+                      <a:srgbClr val="F4F4F4"/>
+                    </a:solidFill>
+                  </a:tcPr>
+                </a:tc>
+                <a:tc>
+                  <a:txBody>
+                    <a:bodyPr wrap="square"/>
+                    <a:lstStyle/>
+                    <a:p>
+                      <a:pPr algn="l"/>
+                      <a:r>
+                        <a:rPr sz="1000" b="0" i="0">
+                          <a:solidFill>
+                            <a:srgbClr val="333333"/>
+                          </a:solidFill>
+                          <a:latin typeface="Noto Sans KR"/>
+                        </a:rPr>
+                        <a:t>시공 오류 실시간 감지 모델, 다국어 작업지시 번역·음성합성 엔진 개발</a:t>
+                      </a:r>
+                    </a:p>
+                  </a:txBody>
+                  <a:tcPr>
+                    <a:solidFill>
+                      <a:srgbClr val="F4F4F4"/>
+                    </a:solidFill>
+                  </a:tcPr>
+                </a:tc>
+              </a:tr>
+              <a:tr h="609600">
+                <a:tc>
+                  <a:txBody>
+                    <a:bodyPr/>
+                    <a:lstStyle/>
+                    <a:p>
+                      <a:pPr algn="l"/>
+                      <a:r>
+                        <a:rPr sz="1000" b="1" i="0">
+                          <a:solidFill>
+                            <a:srgbClr val="111111"/>
+                          </a:solidFill>
+                          <a:latin typeface="Noto Sans KR"/>
+                        </a:rPr>
+                        <a:t>로보틱스 · VR</a:t>
+                      </a:r>
+                    </a:p>
+                  </a:txBody>
+                  <a:tcPr>
+                    <a:solidFill>
+                      <a:srgbClr val="F8F8F8"/>
+                    </a:solidFill>
+                  </a:tcPr>
+                </a:tc>
+                <a:tc>
+                  <a:txBody>
+                    <a:bodyPr wrap="square"/>
+                    <a:lstStyle/>
+                    <a:p>
+                      <a:pPr algn="l"/>
+                      <a:r>
+                        <a:rPr sz="1000" b="0" i="0">
+                          <a:solidFill>
+                            <a:srgbClr val="111111"/>
+                          </a:solidFill>
+                          <a:latin typeface="Noto Sans KR"/>
+                        </a:rPr>
+                        <a:t>KAIST 로봇공학학제전공</a:t>
+                      </a:r>
+                    </a:p>
+                    <a:p>
+                      <a:pPr algn="l"/>
+                      <a:r>
+                        <a:rPr sz="900" b="0" i="0">
+                          <a:solidFill>
+                            <a:srgbClr val="888888"/>
+                          </a:solidFill>
+                          <a:latin typeface="Noto Sans KR"/>
+                        </a:rPr>
+                        <a:t>건설자동화·HRI 연구</a:t>
+                      </a:r>
+                    </a:p>
+                  </a:txBody>
+                  <a:tcPr>
+                    <a:solidFill>
+                      <a:srgbClr val="FFFFFF"/>
+                    </a:solidFill>
+                  </a:tcPr>
+                </a:tc>
+                <a:tc>
+                  <a:txBody>
+                    <a:bodyPr wrap="square"/>
+                    <a:lstStyle/>
+                    <a:p>
+                      <a:pPr algn="l"/>
+                      <a:r>
+                        <a:rPr sz="1000" b="0" i="0">
+                          <a:solidFill>
+                            <a:srgbClr val="333333"/>
+                          </a:solidFill>
+                          <a:latin typeface="Noto Sans KR"/>
+                        </a:rPr>
+                        <a:t>타일·미장 작업 로봇 시스템, 인간-로봇 협업 인터페이스, VR 기능 훈련 콘텐츠</a:t>
+                      </a:r>
+                    </a:p>
+                  </a:txBody>
+                  <a:tcPr>
+                    <a:solidFill>
+                      <a:srgbClr val="FFFFFF"/>
+                    </a:solidFill>
+                  </a:tcPr>
+                </a:tc>
+              </a:tr>
+              <a:tr h="609600">
+                <a:tc>
+                  <a:txBody>
+                    <a:bodyPr/>
+                    <a:lstStyle/>
+                    <a:p>
+                      <a:pPr algn="l"/>
+                      <a:r>
+                        <a:rPr sz="1000" b="1" i="0">
+                          <a:solidFill>
+                            <a:srgbClr val="111111"/>
+                          </a:solidFill>
+                          <a:latin typeface="Noto Sans KR"/>
+                        </a:rPr>
+                        <a:t>블록체인 · 정책</a:t>
+                      </a:r>
+                    </a:p>
+                  </a:txBody>
+                  <a:tcPr>
+                    <a:solidFill>
+                      <a:srgbClr val="EBEBEB"/>
+                    </a:solidFill>
+                  </a:tcPr>
+                </a:tc>
+                <a:tc>
+                  <a:txBody>
+                    <a:bodyPr wrap="square"/>
+                    <a:lstStyle/>
+                    <a:p>
+                      <a:pPr algn="l"/>
+                      <a:r>
+                        <a:rPr sz="1000" b="0" i="0">
+                          <a:solidFill>
+                            <a:srgbClr val="111111"/>
+                          </a:solidFill>
+                          <a:latin typeface="Noto Sans KR"/>
+                        </a:rPr>
+                        <a:t>서울대 컴퓨터공학부</a:t>
+                      </a:r>
+                    </a:p>
+                    <a:p>
+                      <a:pPr algn="l"/>
+                      <a:r>
+                        <a:rPr sz="900" b="0" i="0">
+                          <a:solidFill>
+                            <a:srgbClr val="888888"/>
+                          </a:solidFill>
+                          <a:latin typeface="Noto Sans KR"/>
+                        </a:rPr>
+                        <a:t>분산시스템 + 법학전문대학원</a:t>
+                      </a:r>
+                    </a:p>
+                  </a:txBody>
+                  <a:tcPr>
+                    <a:solidFill>
+                      <a:srgbClr val="F4F4F4"/>
+                    </a:solidFill>
+                  </a:tcPr>
+                </a:tc>
+                <a:tc>
+                  <a:txBody>
+                    <a:bodyPr wrap="square"/>
+                    <a:lstStyle/>
+                    <a:p>
+                      <a:pPr algn="l"/>
+                      <a:r>
+                        <a:rPr sz="1000" b="0" i="0">
+                          <a:solidFill>
+                            <a:srgbClr val="333333"/>
+                          </a:solidFill>
+                          <a:latin typeface="Noto Sans KR"/>
+                        </a:rPr>
+                        <a:t>시공 이력 불변 기록 스마트계약, 설계-시공 일치율 인증 제도화 법제 연구</a:t>
+                      </a:r>
+                    </a:p>
+                  </a:txBody>
+                  <a:tcPr>
+                    <a:solidFill>
+                      <a:srgbClr val="F4F4F4"/>
+                    </a:solidFill>
+                  </a:tcPr>
+                </a:tc>
+              </a:tr>
+              <a:tr h="609600">
+                <a:tc>
+                  <a:txBody>
+                    <a:bodyPr/>
+                    <a:lstStyle/>
+                    <a:p>
+                      <a:pPr algn="l"/>
+                      <a:r>
+                        <a:rPr sz="1000" b="1" i="0">
+                          <a:solidFill>
+                            <a:srgbClr val="111111"/>
+                          </a:solidFill>
+                          <a:latin typeface="Noto Sans KR"/>
+                        </a:rPr>
+                        <a:t>스마트건설 실증</a:t>
+                      </a:r>
+                    </a:p>
+                  </a:txBody>
+                  <a:tcPr>
+                    <a:solidFill>
+                      <a:srgbClr val="F8F8F8"/>
+                    </a:solidFill>
+                  </a:tcPr>
+                </a:tc>
+                <a:tc>
+                  <a:txBody>
+                    <a:bodyPr wrap="square"/>
+                    <a:lstStyle/>
+                    <a:p>
+                      <a:pPr algn="l"/>
+                      <a:r>
+                        <a:rPr sz="1000" b="0" i="0">
+                          <a:solidFill>
+                            <a:srgbClr val="111111"/>
+                          </a:solidFill>
+                          <a:latin typeface="Noto Sans KR"/>
+                        </a:rPr>
+                        <a:t>한국건설기술연구원 (KICT)</a:t>
+                      </a:r>
+                    </a:p>
+                    <a:p>
+                      <a:pPr algn="l"/>
+                      <a:r>
+                        <a:rPr sz="900" b="0" i="0">
+                          <a:solidFill>
+                            <a:srgbClr val="888888"/>
+                          </a:solidFill>
+                          <a:latin typeface="Noto Sans KR"/>
+                        </a:rPr>
+                        <a:t>스마트건설지원센터</a:t>
+                      </a:r>
+                    </a:p>
+                  </a:txBody>
+                  <a:tcPr>
+                    <a:solidFill>
+                      <a:srgbClr val="FFFFFF"/>
+                    </a:solidFill>
+                  </a:tcPr>
+                </a:tc>
+                <a:tc>
+                  <a:txBody>
+                    <a:bodyPr wrap="square"/>
+                    <a:lstStyle/>
+                    <a:p>
+                      <a:pPr algn="l"/>
+                      <a:r>
+                        <a:rPr sz="1000" b="0" i="0">
+                          <a:solidFill>
+                            <a:srgbClr val="333333"/>
+                          </a:solidFill>
+                          <a:latin typeface="Noto Sans KR"/>
+                        </a:rPr>
+                        <a:t>공공건물 현장 PoC 설계·운영, 국토부 스마트건설 표준화 연계, 정부 위탁과제</a:t>
+                      </a:r>
+                    </a:p>
+                  </a:txBody>
+                  <a:tcPr>
+                    <a:solidFill>
+                      <a:srgbClr val="FFFFFF"/>
+                    </a:solidFill>
+                  </a:tcPr>
+                </a:tc>
+              </a:tr>
+              <a:tr h="609600">
+                <a:tc>
+                  <a:txBody>
+                    <a:bodyPr/>
+                    <a:lstStyle/>
+                    <a:p>
+                      <a:pPr algn="l"/>
+                      <a:r>
+                        <a:rPr sz="1000" b="1" i="0">
+                          <a:solidFill>
+                            <a:srgbClr val="111111"/>
+                          </a:solidFill>
+                          <a:latin typeface="Noto Sans KR"/>
+                        </a:rPr>
+                        <a:t>기능인력 교육</a:t>
+                      </a:r>
+                    </a:p>
+                  </a:txBody>
+                  <a:tcPr>
+                    <a:solidFill>
+                      <a:srgbClr val="EBEBEB"/>
+                    </a:solidFill>
+                  </a:tcPr>
+                </a:tc>
+                <a:tc>
+                  <a:txBody>
+                    <a:bodyPr wrap="square"/>
+                    <a:lstStyle/>
+                    <a:p>
+                      <a:pPr algn="l"/>
+                      <a:r>
+                        <a:rPr sz="1000" b="0" i="0">
+                          <a:solidFill>
+                            <a:srgbClr val="111111"/>
+                          </a:solidFill>
+                          <a:latin typeface="Noto Sans KR"/>
+                        </a:rPr>
+                        <a:t>한국폴리텍대학</a:t>
+                      </a:r>
+                    </a:p>
+                    <a:p>
+                      <a:pPr algn="l"/>
+                      <a:r>
+                        <a:rPr sz="900" b="0" i="0">
+                          <a:solidFill>
+                            <a:srgbClr val="888888"/>
+                          </a:solidFill>
+                          <a:latin typeface="Noto Sans KR"/>
+                        </a:rPr>
+                        <a:t>+ 한국직업능력연구원 (KRIVET)</a:t>
+                      </a:r>
+                    </a:p>
+                  </a:txBody>
+                  <a:tcPr>
+                    <a:solidFill>
+                      <a:srgbClr val="F4F4F4"/>
+                    </a:solidFill>
+                  </a:tcPr>
+                </a:tc>
+                <a:tc>
+                  <a:txBody>
+                    <a:bodyPr wrap="square"/>
+                    <a:lstStyle/>
+                    <a:p>
+                      <a:pPr algn="l"/>
+                      <a:r>
+                        <a:rPr sz="1000" b="0" i="0">
+                          <a:solidFill>
+                            <a:srgbClr val="333333"/>
+                          </a:solidFill>
+                          <a:latin typeface="Noto Sans KR"/>
+                        </a:rPr>
+                        <a:t>CQP 정규 교육과정 개발·운영, VR 기능 훈련 콘텐츠 공동 제작, 해외 사전 교육 센터 연계</a:t>
+                      </a:r>
+                    </a:p>
+                  </a:txBody>
+                  <a:tcPr>
+                    <a:solidFill>
+                      <a:srgbClr val="F4F4F4"/>
+                    </a:solidFill>
+                  </a:tcPr>
+                </a:tc>
+              </a:tr>
+            </a:tbl>
+          </a:graphicData>
+        </a:graphic>
+      </p:graphicFrame>
     </p:spTree>
   </p:cSld>
   <p:clrMapOvr>
@@ -3260,30 +8858,1445 @@
         <p:nvPr/>
       </p:nvGrpSpPr>
       <p:grpSpPr/>
-      <p:pic>
-        <p:nvPicPr>
-          <p:cNvPr id="2" name="Picture 1" descr="ppt_slide_5.png"/>
-          <p:cNvPicPr>
-            <a:picLocks noChangeAspect="1"/>
-          </p:cNvPicPr>
-          <p:nvPr/>
-        </p:nvPicPr>
-        <p:blipFill>
-          <a:blip r:embed="rId2"/>
-          <a:stretch>
-            <a:fillRect/>
-          </a:stretch>
-        </p:blipFill>
-        <p:spPr>
-          <a:xfrm>
-            <a:off x="0" y="0"/>
-            <a:ext cx="9144000" cy="5143500"/>
-          </a:xfrm>
-          <a:prstGeom prst="rect">
-            <a:avLst/>
-          </a:prstGeom>
-        </p:spPr>
-      </p:pic>
+      <p:sp>
+        <p:nvSpPr>
+          <p:cNvPr id="2" name="TextBox 1"/>
+          <p:cNvSpPr txBox="1"/>
+          <p:nvPr/>
+        </p:nvSpPr>
+        <p:spPr>
+          <a:xfrm>
+            <a:off x="406400" y="165100"/>
+            <a:ext cx="1905000" cy="127000"/>
+          </a:xfrm>
+          <a:prstGeom prst="rect">
+            <a:avLst/>
+          </a:prstGeom>
+          <a:noFill/>
+        </p:spPr>
+        <p:txBody>
+          <a:bodyPr wrap="square">
+            <a:spAutoFit/>
+          </a:bodyPr>
+          <a:lstStyle/>
+          <a:p>
+            <a:pPr algn="l"/>
+            <a:r>
+              <a:rPr sz="1000" b="0" i="0">
+                <a:solidFill>
+                  <a:srgbClr val="555555"/>
+                </a:solidFill>
+                <a:latin typeface="Noto Sans KR"/>
+              </a:rPr>
+              <a:t>2026.07.08.</a:t>
+            </a:r>
+          </a:p>
+        </p:txBody>
+      </p:sp>
+      <p:sp>
+        <p:nvSpPr>
+          <p:cNvPr id="3" name="TextBox 2"/>
+          <p:cNvSpPr txBox="1"/>
+          <p:nvPr/>
+        </p:nvSpPr>
+        <p:spPr>
+          <a:xfrm>
+            <a:off x="8318500" y="139700"/>
+            <a:ext cx="419100" cy="165100"/>
+          </a:xfrm>
+          <a:prstGeom prst="rect">
+            <a:avLst/>
+          </a:prstGeom>
+          <a:noFill/>
+        </p:spPr>
+        <p:txBody>
+          <a:bodyPr wrap="square">
+            <a:spAutoFit/>
+          </a:bodyPr>
+          <a:lstStyle/>
+          <a:p>
+            <a:pPr algn="r"/>
+            <a:r>
+              <a:rPr sz="1800" b="0" i="0">
+                <a:solidFill>
+                  <a:srgbClr val="555555"/>
+                </a:solidFill>
+                <a:latin typeface="Noto Sans KR"/>
+              </a:rPr>
+              <a:t>×</a:t>
+            </a:r>
+          </a:p>
+        </p:txBody>
+      </p:sp>
+      <p:sp>
+        <p:nvSpPr>
+          <p:cNvPr id="4" name="TextBox 3"/>
+          <p:cNvSpPr txBox="1"/>
+          <p:nvPr/>
+        </p:nvSpPr>
+        <p:spPr>
+          <a:xfrm>
+            <a:off x="406400" y="317500"/>
+            <a:ext cx="381000" cy="190500"/>
+          </a:xfrm>
+          <a:prstGeom prst="rect">
+            <a:avLst/>
+          </a:prstGeom>
+          <a:noFill/>
+        </p:spPr>
+        <p:txBody>
+          <a:bodyPr wrap="square">
+            <a:spAutoFit/>
+          </a:bodyPr>
+          <a:lstStyle/>
+          <a:p>
+            <a:pPr algn="l"/>
+            <a:r>
+              <a:rPr sz="2000" b="1" i="0">
+                <a:solidFill>
+                  <a:srgbClr val="111111"/>
+                </a:solidFill>
+                <a:latin typeface="Noto Sans KR"/>
+              </a:rPr>
+              <a:t>04</a:t>
+            </a:r>
+          </a:p>
+        </p:txBody>
+      </p:sp>
+      <p:sp>
+        <p:nvSpPr>
+          <p:cNvPr id="5" name="TextBox 4"/>
+          <p:cNvSpPr txBox="1"/>
+          <p:nvPr/>
+        </p:nvSpPr>
+        <p:spPr>
+          <a:xfrm>
+            <a:off x="800100" y="342900"/>
+            <a:ext cx="7302500" cy="152400"/>
+          </a:xfrm>
+          <a:prstGeom prst="rect">
+            <a:avLst/>
+          </a:prstGeom>
+          <a:noFill/>
+        </p:spPr>
+        <p:txBody>
+          <a:bodyPr wrap="square">
+            <a:spAutoFit/>
+          </a:bodyPr>
+          <a:lstStyle/>
+          <a:p>
+            <a:pPr algn="l"/>
+            <a:r>
+              <a:rPr sz="1300" b="0" i="0">
+                <a:solidFill>
+                  <a:srgbClr val="333333"/>
+                </a:solidFill>
+                <a:latin typeface="Noto Sans KR"/>
+              </a:rPr>
+              <a:t>수익 및 기대효과: K-Architecture의 시작</a:t>
+            </a:r>
+          </a:p>
+        </p:txBody>
+      </p:sp>
+      <p:sp>
+        <p:nvSpPr>
+          <p:cNvPr id="6" name="Rectangle 5"/>
+          <p:cNvSpPr/>
+          <p:nvPr/>
+        </p:nvSpPr>
+        <p:spPr>
+          <a:xfrm>
+            <a:off x="406400" y="533400"/>
+            <a:ext cx="1841500" cy="25400"/>
+          </a:xfrm>
+          <a:prstGeom prst="rect">
+            <a:avLst/>
+          </a:prstGeom>
+          <a:solidFill>
+            <a:srgbClr val="111111"/>
+          </a:solidFill>
+          <a:ln>
+            <a:noFill/>
+          </a:ln>
+        </p:spPr>
+        <p:style>
+          <a:lnRef idx="1">
+            <a:schemeClr val="accent1"/>
+          </a:lnRef>
+          <a:fillRef idx="3">
+            <a:schemeClr val="accent1"/>
+          </a:fillRef>
+          <a:effectRef idx="2">
+            <a:schemeClr val="accent1"/>
+          </a:effectRef>
+          <a:fontRef idx="minor">
+            <a:schemeClr val="lt1"/>
+          </a:fontRef>
+        </p:style>
+        <p:txBody>
+          <a:bodyPr rtlCol="0" anchor="ctr"/>
+          <a:lstStyle/>
+          <a:p>
+            <a:pPr algn="ctr"/>
+          </a:p>
+        </p:txBody>
+      </p:sp>
+      <p:sp>
+        <p:nvSpPr>
+          <p:cNvPr id="7" name="Rectangle 6"/>
+          <p:cNvSpPr/>
+          <p:nvPr/>
+        </p:nvSpPr>
+        <p:spPr>
+          <a:xfrm>
+            <a:off x="2247900" y="546100"/>
+            <a:ext cx="6489700" cy="6350"/>
+          </a:xfrm>
+          <a:prstGeom prst="rect">
+            <a:avLst/>
+          </a:prstGeom>
+          <a:solidFill>
+            <a:srgbClr val="CCCCCC"/>
+          </a:solidFill>
+          <a:ln>
+            <a:noFill/>
+          </a:ln>
+        </p:spPr>
+        <p:style>
+          <a:lnRef idx="1">
+            <a:schemeClr val="accent1"/>
+          </a:lnRef>
+          <a:fillRef idx="3">
+            <a:schemeClr val="accent1"/>
+          </a:fillRef>
+          <a:effectRef idx="2">
+            <a:schemeClr val="accent1"/>
+          </a:effectRef>
+          <a:fontRef idx="minor">
+            <a:schemeClr val="lt1"/>
+          </a:fontRef>
+        </p:style>
+        <p:txBody>
+          <a:bodyPr rtlCol="0" anchor="ctr"/>
+          <a:lstStyle/>
+          <a:p>
+            <a:pPr algn="ctr"/>
+          </a:p>
+        </p:txBody>
+      </p:sp>
+      <p:graphicFrame>
+        <p:nvGraphicFramePr>
+          <p:cNvPr id="8" name="Table 7"/>
+          <p:cNvGraphicFramePr>
+            <a:graphicFrameLocks noGrp="1"/>
+          </p:cNvGraphicFramePr>
+          <p:nvPr/>
+        </p:nvGraphicFramePr>
+        <p:xfrm>
+          <a:off x="406400" y="635000"/>
+          <a:ext cx="8331200" cy="1511300"/>
+        </p:xfrm>
+        <a:graphic>
+          <a:graphicData uri="http://schemas.openxmlformats.org/drawingml/2006/table">
+            <a:tbl>
+              <a:tblPr firstRow="1" bandRow="1">
+                <a:tableStyleId>{5C22544A-7EE6-4342-B048-85BDC9FD1C3A}</a:tableStyleId>
+              </a:tblPr>
+              <a:tblGrid>
+                <a:gridCol w="2997200"/>
+                <a:gridCol w="1727200"/>
+                <a:gridCol w="1727200"/>
+                <a:gridCol w="1879600"/>
+              </a:tblGrid>
+              <a:tr h="266700">
+                <a:tc>
+                  <a:txBody>
+                    <a:bodyPr/>
+                    <a:lstStyle/>
+                    <a:p>
+                      <a:pPr algn="l"/>
+                      <a:r>
+                        <a:rPr sz="1100" b="1" i="0">
+                          <a:solidFill>
+                            <a:srgbClr val="FFFFFF"/>
+                          </a:solidFill>
+                          <a:latin typeface="Noto Sans KR"/>
+                        </a:rPr>
+                        <a:t>수익원</a:t>
+                      </a:r>
+                    </a:p>
+                  </a:txBody>
+                  <a:tcPr>
+                    <a:solidFill>
+                      <a:srgbClr val="111111"/>
+                    </a:solidFill>
+                  </a:tcPr>
+                </a:tc>
+                <a:tc>
+                  <a:txBody>
+                    <a:bodyPr/>
+                    <a:lstStyle/>
+                    <a:p>
+                      <a:pPr algn="ctr"/>
+                      <a:r>
+                        <a:rPr sz="1100" b="1" i="0">
+                          <a:solidFill>
+                            <a:srgbClr val="FFFFFF"/>
+                          </a:solidFill>
+                          <a:latin typeface="Noto Sans KR"/>
+                        </a:rPr>
+                        <a:t>단가</a:t>
+                      </a:r>
+                    </a:p>
+                  </a:txBody>
+                  <a:tcPr>
+                    <a:solidFill>
+                      <a:srgbClr val="111111"/>
+                    </a:solidFill>
+                  </a:tcPr>
+                </a:tc>
+                <a:tc>
+                  <a:txBody>
+                    <a:bodyPr/>
+                    <a:lstStyle/>
+                    <a:p>
+                      <a:pPr algn="ctr"/>
+                      <a:r>
+                        <a:rPr sz="1100" b="1" i="0">
+                          <a:solidFill>
+                            <a:srgbClr val="FFFFFF"/>
+                          </a:solidFill>
+                          <a:latin typeface="Noto Sans KR"/>
+                        </a:rPr>
+                        <a:t>초기 목표</a:t>
+                      </a:r>
+                    </a:p>
+                  </a:txBody>
+                  <a:tcPr>
+                    <a:solidFill>
+                      <a:srgbClr val="111111"/>
+                    </a:solidFill>
+                  </a:tcPr>
+                </a:tc>
+                <a:tc>
+                  <a:txBody>
+                    <a:bodyPr/>
+                    <a:lstStyle/>
+                    <a:p>
+                      <a:pPr algn="ctr"/>
+                      <a:r>
+                        <a:rPr sz="1100" b="1" i="0">
+                          <a:solidFill>
+                            <a:srgbClr val="FFFFFF"/>
+                          </a:solidFill>
+                          <a:latin typeface="Noto Sans KR"/>
+                        </a:rPr>
+                        <a:t>연 매출</a:t>
+                      </a:r>
+                    </a:p>
+                  </a:txBody>
+                  <a:tcPr>
+                    <a:solidFill>
+                      <a:srgbClr val="111111"/>
+                    </a:solidFill>
+                  </a:tcPr>
+                </a:tc>
+              </a:tr>
+              <a:tr h="311150">
+                <a:tc>
+                  <a:txBody>
+                    <a:bodyPr/>
+                    <a:lstStyle/>
+                    <a:p>
+                      <a:pPr algn="l"/>
+                      <a:r>
+                        <a:rPr sz="1100" b="0" i="0">
+                          <a:solidFill>
+                            <a:srgbClr val="444444"/>
+                          </a:solidFill>
+                          <a:latin typeface="Noto Sans KR"/>
+                        </a:rPr>
+                        <a:t>현장 SaaS (건설사·건축사)</a:t>
+                      </a:r>
+                    </a:p>
+                  </a:txBody>
+                  <a:tcPr>
+                    <a:solidFill>
+                      <a:srgbClr val="F8F8F8"/>
+                    </a:solidFill>
+                  </a:tcPr>
+                </a:tc>
+                <a:tc>
+                  <a:txBody>
+                    <a:bodyPr/>
+                    <a:lstStyle/>
+                    <a:p>
+                      <a:pPr algn="ctr"/>
+                      <a:r>
+                        <a:rPr sz="1100" b="0" i="0">
+                          <a:solidFill>
+                            <a:srgbClr val="444444"/>
+                          </a:solidFill>
+                          <a:latin typeface="Noto Sans KR"/>
+                        </a:rPr>
+                        <a:t>현장당 월 500만~2,000만원</a:t>
+                      </a:r>
+                    </a:p>
+                  </a:txBody>
+                  <a:tcPr>
+                    <a:solidFill>
+                      <a:srgbClr val="FFFFFF"/>
+                    </a:solidFill>
+                  </a:tcPr>
+                </a:tc>
+                <a:tc>
+                  <a:txBody>
+                    <a:bodyPr/>
+                    <a:lstStyle/>
+                    <a:p>
+                      <a:pPr algn="ctr"/>
+                      <a:r>
+                        <a:rPr sz="1100" b="0" i="0">
+                          <a:solidFill>
+                            <a:srgbClr val="444444"/>
+                          </a:solidFill>
+                          <a:latin typeface="Noto Sans KR"/>
+                        </a:rPr>
+                        <a:t>100개 현장</a:t>
+                      </a:r>
+                    </a:p>
+                  </a:txBody>
+                  <a:tcPr>
+                    <a:solidFill>
+                      <a:srgbClr val="FFFFFF"/>
+                    </a:solidFill>
+                  </a:tcPr>
+                </a:tc>
+                <a:tc>
+                  <a:txBody>
+                    <a:bodyPr/>
+                    <a:lstStyle/>
+                    <a:p>
+                      <a:pPr algn="ctr"/>
+                      <a:r>
+                        <a:rPr sz="1100" b="1" i="0">
+                          <a:solidFill>
+                            <a:srgbClr val="111111"/>
+                          </a:solidFill>
+                          <a:latin typeface="Noto Sans KR"/>
+                        </a:rPr>
+                        <a:t>60억~240억</a:t>
+                      </a:r>
+                    </a:p>
+                  </a:txBody>
+                  <a:tcPr>
+                    <a:solidFill>
+                      <a:srgbClr val="FFFFFF"/>
+                    </a:solidFill>
+                  </a:tcPr>
+                </a:tc>
+              </a:tr>
+              <a:tr h="311150">
+                <a:tc>
+                  <a:txBody>
+                    <a:bodyPr/>
+                    <a:lstStyle/>
+                    <a:p>
+                      <a:pPr algn="l"/>
+                      <a:r>
+                        <a:rPr sz="1100" b="0" i="0">
+                          <a:solidFill>
+                            <a:srgbClr val="444444"/>
+                          </a:solidFill>
+                          <a:latin typeface="Noto Sans KR"/>
+                        </a:rPr>
+                        <a:t>공공건물 품질 인증</a:t>
+                      </a:r>
+                    </a:p>
+                  </a:txBody>
+                  <a:tcPr>
+                    <a:solidFill>
+                      <a:srgbClr val="EBEBEB"/>
+                    </a:solidFill>
+                  </a:tcPr>
+                </a:tc>
+                <a:tc>
+                  <a:txBody>
+                    <a:bodyPr/>
+                    <a:lstStyle/>
+                    <a:p>
+                      <a:pPr algn="ctr"/>
+                      <a:r>
+                        <a:rPr sz="1100" b="0" i="0">
+                          <a:solidFill>
+                            <a:srgbClr val="444444"/>
+                          </a:solidFill>
+                          <a:latin typeface="Noto Sans KR"/>
+                        </a:rPr>
+                        <a:t>건당 5,000만~3억원</a:t>
+                      </a:r>
+                    </a:p>
+                  </a:txBody>
+                  <a:tcPr>
+                    <a:solidFill>
+                      <a:srgbClr val="F4F4F4"/>
+                    </a:solidFill>
+                  </a:tcPr>
+                </a:tc>
+                <a:tc>
+                  <a:txBody>
+                    <a:bodyPr/>
+                    <a:lstStyle/>
+                    <a:p>
+                      <a:pPr algn="ctr"/>
+                      <a:r>
+                        <a:rPr sz="1100" b="0" i="0">
+                          <a:solidFill>
+                            <a:srgbClr val="444444"/>
+                          </a:solidFill>
+                          <a:latin typeface="Noto Sans KR"/>
+                        </a:rPr>
+                        <a:t>연 50건</a:t>
+                      </a:r>
+                    </a:p>
+                  </a:txBody>
+                  <a:tcPr>
+                    <a:solidFill>
+                      <a:srgbClr val="F4F4F4"/>
+                    </a:solidFill>
+                  </a:tcPr>
+                </a:tc>
+                <a:tc>
+                  <a:txBody>
+                    <a:bodyPr/>
+                    <a:lstStyle/>
+                    <a:p>
+                      <a:pPr algn="ctr"/>
+                      <a:r>
+                        <a:rPr sz="1100" b="1" i="0">
+                          <a:solidFill>
+                            <a:srgbClr val="111111"/>
+                          </a:solidFill>
+                          <a:latin typeface="Noto Sans KR"/>
+                        </a:rPr>
+                        <a:t>25억~150억</a:t>
+                      </a:r>
+                    </a:p>
+                  </a:txBody>
+                  <a:tcPr>
+                    <a:solidFill>
+                      <a:srgbClr val="F4F4F4"/>
+                    </a:solidFill>
+                  </a:tcPr>
+                </a:tc>
+              </a:tr>
+              <a:tr h="311150">
+                <a:tc>
+                  <a:txBody>
+                    <a:bodyPr/>
+                    <a:lstStyle/>
+                    <a:p>
+                      <a:pPr algn="l"/>
+                      <a:r>
+                        <a:rPr sz="1100" b="0" i="0">
+                          <a:solidFill>
+                            <a:srgbClr val="444444"/>
+                          </a:solidFill>
+                          <a:latin typeface="Noto Sans KR"/>
+                        </a:rPr>
+                        <a:t>CQP 기능학교 + 정부위탁</a:t>
+                      </a:r>
+                    </a:p>
+                  </a:txBody>
+                  <a:tcPr>
+                    <a:solidFill>
+                      <a:srgbClr val="F8F8F8"/>
+                    </a:solidFill>
+                  </a:tcPr>
+                </a:tc>
+                <a:tc>
+                  <a:txBody>
+                    <a:bodyPr/>
+                    <a:lstStyle/>
+                    <a:p>
+                      <a:pPr algn="ctr"/>
+                      <a:r>
+                        <a:rPr sz="1100" b="0" i="0">
+                          <a:solidFill>
+                            <a:srgbClr val="444444"/>
+                          </a:solidFill>
+                          <a:latin typeface="Noto Sans KR"/>
+                        </a:rPr>
+                        <a:t>인당 300~500만 + 과제 수억</a:t>
+                      </a:r>
+                    </a:p>
+                  </a:txBody>
+                  <a:tcPr>
+                    <a:solidFill>
+                      <a:srgbClr val="FFFFFF"/>
+                    </a:solidFill>
+                  </a:tcPr>
+                </a:tc>
+                <a:tc>
+                  <a:txBody>
+                    <a:bodyPr/>
+                    <a:lstStyle/>
+                    <a:p>
+                      <a:pPr algn="ctr"/>
+                      <a:r>
+                        <a:rPr sz="1100" b="0" i="0">
+                          <a:solidFill>
+                            <a:srgbClr val="444444"/>
+                          </a:solidFill>
+                          <a:latin typeface="Noto Sans KR"/>
+                        </a:rPr>
+                        <a:t>연 1,000명 + 3건</a:t>
+                      </a:r>
+                    </a:p>
+                  </a:txBody>
+                  <a:tcPr>
+                    <a:solidFill>
+                      <a:srgbClr val="FFFFFF"/>
+                    </a:solidFill>
+                  </a:tcPr>
+                </a:tc>
+                <a:tc>
+                  <a:txBody>
+                    <a:bodyPr/>
+                    <a:lstStyle/>
+                    <a:p>
+                      <a:pPr algn="ctr"/>
+                      <a:r>
+                        <a:rPr sz="1100" b="1" i="0">
+                          <a:solidFill>
+                            <a:srgbClr val="111111"/>
+                          </a:solidFill>
+                          <a:latin typeface="Noto Sans KR"/>
+                        </a:rPr>
+                        <a:t>30억~100억</a:t>
+                      </a:r>
+                    </a:p>
+                  </a:txBody>
+                  <a:tcPr>
+                    <a:solidFill>
+                      <a:srgbClr val="FFFFFF"/>
+                    </a:solidFill>
+                  </a:tcPr>
+                </a:tc>
+              </a:tr>
+              <a:tr h="311150">
+                <a:tc>
+                  <a:txBody>
+                    <a:bodyPr/>
+                    <a:lstStyle/>
+                    <a:p>
+                      <a:pPr algn="l"/>
+                      <a:r>
+                        <a:rPr sz="1100" b="0" i="0">
+                          <a:solidFill>
+                            <a:srgbClr val="444444"/>
+                          </a:solidFill>
+                          <a:latin typeface="Noto Sans KR"/>
+                        </a:rPr>
+                        <a:t>해외 사전 교육</a:t>
+                      </a:r>
+                    </a:p>
+                  </a:txBody>
+                  <a:tcPr>
+                    <a:solidFill>
+                      <a:srgbClr val="EBEBEB"/>
+                    </a:solidFill>
+                  </a:tcPr>
+                </a:tc>
+                <a:tc>
+                  <a:txBody>
+                    <a:bodyPr/>
+                    <a:lstStyle/>
+                    <a:p>
+                      <a:pPr algn="ctr"/>
+                      <a:r>
+                        <a:rPr sz="1100" b="0" i="0">
+                          <a:solidFill>
+                            <a:srgbClr val="444444"/>
+                          </a:solidFill>
+                          <a:latin typeface="Noto Sans KR"/>
+                        </a:rPr>
+                        <a:t>인당 50~100만원</a:t>
+                      </a:r>
+                    </a:p>
+                  </a:txBody>
+                  <a:tcPr>
+                    <a:solidFill>
+                      <a:srgbClr val="F4F4F4"/>
+                    </a:solidFill>
+                  </a:tcPr>
+                </a:tc>
+                <a:tc>
+                  <a:txBody>
+                    <a:bodyPr/>
+                    <a:lstStyle/>
+                    <a:p>
+                      <a:pPr algn="ctr"/>
+                      <a:r>
+                        <a:rPr sz="1100" b="0" i="0">
+                          <a:solidFill>
+                            <a:srgbClr val="444444"/>
+                          </a:solidFill>
+                          <a:latin typeface="Noto Sans KR"/>
+                        </a:rPr>
+                        <a:t>연 2,000명</a:t>
+                      </a:r>
+                    </a:p>
+                  </a:txBody>
+                  <a:tcPr>
+                    <a:solidFill>
+                      <a:srgbClr val="F4F4F4"/>
+                    </a:solidFill>
+                  </a:tcPr>
+                </a:tc>
+                <a:tc>
+                  <a:txBody>
+                    <a:bodyPr/>
+                    <a:lstStyle/>
+                    <a:p>
+                      <a:pPr algn="ctr"/>
+                      <a:r>
+                        <a:rPr sz="1100" b="1" i="0">
+                          <a:solidFill>
+                            <a:srgbClr val="111111"/>
+                          </a:solidFill>
+                          <a:latin typeface="Noto Sans KR"/>
+                        </a:rPr>
+                        <a:t>10억~20억</a:t>
+                      </a:r>
+                    </a:p>
+                  </a:txBody>
+                  <a:tcPr>
+                    <a:solidFill>
+                      <a:srgbClr val="F4F4F4"/>
+                    </a:solidFill>
+                  </a:tcPr>
+                </a:tc>
+              </a:tr>
+            </a:tbl>
+          </a:graphicData>
+        </a:graphic>
+      </p:graphicFrame>
+      <p:sp>
+        <p:nvSpPr>
+          <p:cNvPr id="9" name="Rectangle 8"/>
+          <p:cNvSpPr/>
+          <p:nvPr/>
+        </p:nvSpPr>
+        <p:spPr>
+          <a:xfrm>
+            <a:off x="406400" y="2260600"/>
+            <a:ext cx="8331200" cy="571500"/>
+          </a:xfrm>
+          <a:prstGeom prst="rect">
+            <a:avLst/>
+          </a:prstGeom>
+          <a:solidFill>
+            <a:srgbClr val="111111"/>
+          </a:solidFill>
+          <a:ln>
+            <a:noFill/>
+          </a:ln>
+        </p:spPr>
+        <p:style>
+          <a:lnRef idx="1">
+            <a:schemeClr val="accent1"/>
+          </a:lnRef>
+          <a:fillRef idx="3">
+            <a:schemeClr val="accent1"/>
+          </a:fillRef>
+          <a:effectRef idx="2">
+            <a:schemeClr val="accent1"/>
+          </a:effectRef>
+          <a:fontRef idx="minor">
+            <a:schemeClr val="lt1"/>
+          </a:fontRef>
+        </p:style>
+        <p:txBody>
+          <a:bodyPr rtlCol="0" anchor="ctr"/>
+          <a:lstStyle/>
+          <a:p>
+            <a:pPr algn="ctr"/>
+          </a:p>
+        </p:txBody>
+      </p:sp>
+      <p:sp>
+        <p:nvSpPr>
+          <p:cNvPr id="10" name="TextBox 9"/>
+          <p:cNvSpPr txBox="1"/>
+          <p:nvPr/>
+        </p:nvSpPr>
+        <p:spPr>
+          <a:xfrm>
+            <a:off x="596900" y="2336800"/>
+            <a:ext cx="7950200" cy="444500"/>
+          </a:xfrm>
+          <a:prstGeom prst="rect">
+            <a:avLst/>
+          </a:prstGeom>
+          <a:noFill/>
+        </p:spPr>
+        <p:txBody>
+          <a:bodyPr wrap="square">
+            <a:spAutoFit/>
+          </a:bodyPr>
+          <a:lstStyle/>
+          <a:p>
+            <a:r>
+              <a:rPr sz="1300" b="1" i="0">
+                <a:solidFill>
+                  <a:srgbClr val="FFFFFF"/>
+                </a:solidFill>
+                <a:latin typeface="Noto Sans KR"/>
+              </a:rPr>
+              <a:t>건설은 수출 지표가 아니라 시민의 삶을 짓는 산업이다. </a:t>
+            </a:r>
+            <a:r>
+              <a:rPr sz="1300" b="0" i="0">
+                <a:solidFill>
+                  <a:srgbClr val="FFFFFF"/>
+                </a:solidFill>
+                <a:latin typeface="Noto Sans KR"/>
+              </a:rPr>
+              <a:t>GDP 20~25%가 곧 사람들이 매일 출근하고, 치료받고, 배우는 공간의 질이다.</a:t>
+            </a:r>
+          </a:p>
+          <a:p>
+            <a:r>
+              <a:rPr sz="1300" b="0" i="0">
+                <a:solidFill>
+                  <a:srgbClr val="FFFFFF"/>
+                </a:solidFill>
+                <a:latin typeface="Noto Sans KR"/>
+              </a:rPr>
+              <a:t>FieldBridge가 인증한 공공건물이 해외 건축상을 받고, 한국 건설사의 해외 수주 포트폴리오가 되는 날 — 그것이 </a:t>
+            </a:r>
+            <a:r>
+              <a:rPr sz="1300" b="1" i="0">
+                <a:solidFill>
+                  <a:srgbClr val="FFFFFF"/>
+                </a:solidFill>
+                <a:latin typeface="Noto Sans KR"/>
+              </a:rPr>
+              <a:t>K-Architecture</a:t>
+            </a:r>
+            <a:r>
+              <a:rPr sz="1300" b="0" i="0">
+                <a:solidFill>
+                  <a:srgbClr val="FFFFFF"/>
+                </a:solidFill>
+                <a:latin typeface="Noto Sans KR"/>
+              </a:rPr>
+              <a:t>의 시작이다.</a:t>
+            </a:r>
+          </a:p>
+        </p:txBody>
+      </p:sp>
+      <p:sp>
+        <p:nvSpPr>
+          <p:cNvPr id="11" name="TextBox 10"/>
+          <p:cNvSpPr txBox="1"/>
+          <p:nvPr/>
+        </p:nvSpPr>
+        <p:spPr>
+          <a:xfrm>
+            <a:off x="406400" y="2921000"/>
+            <a:ext cx="4445000" cy="114300"/>
+          </a:xfrm>
+          <a:prstGeom prst="rect">
+            <a:avLst/>
+          </a:prstGeom>
+          <a:noFill/>
+        </p:spPr>
+        <p:txBody>
+          <a:bodyPr wrap="square">
+            <a:spAutoFit/>
+          </a:bodyPr>
+          <a:lstStyle/>
+          <a:p>
+            <a:pPr algn="l"/>
+            <a:r>
+              <a:rPr sz="900" b="1" i="0">
+                <a:solidFill>
+                  <a:srgbClr val="999999"/>
+                </a:solidFill>
+                <a:latin typeface="Noto Sans KR"/>
+              </a:rPr>
+              <a:t>TAIC 원우들께 드리는 역할 제안 — 함께 만들 수 있는 팀</a:t>
+            </a:r>
+          </a:p>
+        </p:txBody>
+      </p:sp>
+      <p:sp>
+        <p:nvSpPr>
+          <p:cNvPr id="12" name="Rectangle 11"/>
+          <p:cNvSpPr/>
+          <p:nvPr/>
+        </p:nvSpPr>
+        <p:spPr>
+          <a:xfrm>
+            <a:off x="406400" y="3073400"/>
+            <a:ext cx="1612900" cy="1841500"/>
+          </a:xfrm>
+          <a:prstGeom prst="rect">
+            <a:avLst/>
+          </a:prstGeom>
+          <a:solidFill>
+            <a:srgbClr val="F5F5F5"/>
+          </a:solidFill>
+          <a:ln>
+            <a:noFill/>
+          </a:ln>
+        </p:spPr>
+        <p:style>
+          <a:lnRef idx="1">
+            <a:schemeClr val="accent1"/>
+          </a:lnRef>
+          <a:fillRef idx="3">
+            <a:schemeClr val="accent1"/>
+          </a:fillRef>
+          <a:effectRef idx="2">
+            <a:schemeClr val="accent1"/>
+          </a:effectRef>
+          <a:fontRef idx="minor">
+            <a:schemeClr val="lt1"/>
+          </a:fontRef>
+        </p:style>
+        <p:txBody>
+          <a:bodyPr rtlCol="0" anchor="ctr"/>
+          <a:lstStyle/>
+          <a:p>
+            <a:pPr algn="ctr"/>
+          </a:p>
+        </p:txBody>
+      </p:sp>
+      <p:sp>
+        <p:nvSpPr>
+          <p:cNvPr id="13" name="TextBox 12"/>
+          <p:cNvSpPr txBox="1"/>
+          <p:nvPr/>
+        </p:nvSpPr>
+        <p:spPr>
+          <a:xfrm>
+            <a:off x="469900" y="3149600"/>
+            <a:ext cx="1485900" cy="127000"/>
+          </a:xfrm>
+          <a:prstGeom prst="rect">
+            <a:avLst/>
+          </a:prstGeom>
+          <a:noFill/>
+        </p:spPr>
+        <p:txBody>
+          <a:bodyPr wrap="square">
+            <a:spAutoFit/>
+          </a:bodyPr>
+          <a:lstStyle/>
+          <a:p>
+            <a:pPr algn="l"/>
+            <a:r>
+              <a:rPr sz="1100" b="1" i="0">
+                <a:solidFill>
+                  <a:srgbClr val="111111"/>
+                </a:solidFill>
+                <a:latin typeface="Noto Sans KR"/>
+              </a:rPr>
+              <a:t>반도체·IoT</a:t>
+            </a:r>
+          </a:p>
+        </p:txBody>
+      </p:sp>
+      <p:sp>
+        <p:nvSpPr>
+          <p:cNvPr id="14" name="TextBox 13"/>
+          <p:cNvSpPr txBox="1"/>
+          <p:nvPr/>
+        </p:nvSpPr>
+        <p:spPr>
+          <a:xfrm>
+            <a:off x="469900" y="3289300"/>
+            <a:ext cx="1485900" cy="1549400"/>
+          </a:xfrm>
+          <a:prstGeom prst="rect">
+            <a:avLst/>
+          </a:prstGeom>
+          <a:noFill/>
+        </p:spPr>
+        <p:txBody>
+          <a:bodyPr wrap="square">
+            <a:spAutoFit/>
+          </a:bodyPr>
+          <a:lstStyle/>
+          <a:p>
+            <a:pPr algn="l"/>
+            <a:r>
+              <a:rPr sz="1000" b="0" i="0">
+                <a:solidFill>
+                  <a:srgbClr val="555555"/>
+                </a:solidFill>
+                <a:latin typeface="Noto Sans KR"/>
+              </a:rPr>
+              <a:t>AR 글라스·스마트 센서·현장 로봇 하드웨어 파트너</a:t>
+            </a:r>
+          </a:p>
+        </p:txBody>
+      </p:sp>
+      <p:sp>
+        <p:nvSpPr>
+          <p:cNvPr id="15" name="Rectangle 14"/>
+          <p:cNvSpPr/>
+          <p:nvPr/>
+        </p:nvSpPr>
+        <p:spPr>
+          <a:xfrm>
+            <a:off x="2082800" y="3073400"/>
+            <a:ext cx="1612900" cy="1841500"/>
+          </a:xfrm>
+          <a:prstGeom prst="rect">
+            <a:avLst/>
+          </a:prstGeom>
+          <a:solidFill>
+            <a:srgbClr val="F5F5F5"/>
+          </a:solidFill>
+          <a:ln>
+            <a:noFill/>
+          </a:ln>
+        </p:spPr>
+        <p:style>
+          <a:lnRef idx="1">
+            <a:schemeClr val="accent1"/>
+          </a:lnRef>
+          <a:fillRef idx="3">
+            <a:schemeClr val="accent1"/>
+          </a:fillRef>
+          <a:effectRef idx="2">
+            <a:schemeClr val="accent1"/>
+          </a:effectRef>
+          <a:fontRef idx="minor">
+            <a:schemeClr val="lt1"/>
+          </a:fontRef>
+        </p:style>
+        <p:txBody>
+          <a:bodyPr rtlCol="0" anchor="ctr"/>
+          <a:lstStyle/>
+          <a:p>
+            <a:pPr algn="ctr"/>
+          </a:p>
+        </p:txBody>
+      </p:sp>
+      <p:sp>
+        <p:nvSpPr>
+          <p:cNvPr id="16" name="TextBox 15"/>
+          <p:cNvSpPr txBox="1"/>
+          <p:nvPr/>
+        </p:nvSpPr>
+        <p:spPr>
+          <a:xfrm>
+            <a:off x="2146300" y="3149600"/>
+            <a:ext cx="1485900" cy="127000"/>
+          </a:xfrm>
+          <a:prstGeom prst="rect">
+            <a:avLst/>
+          </a:prstGeom>
+          <a:noFill/>
+        </p:spPr>
+        <p:txBody>
+          <a:bodyPr wrap="square">
+            <a:spAutoFit/>
+          </a:bodyPr>
+          <a:lstStyle/>
+          <a:p>
+            <a:pPr algn="l"/>
+            <a:r>
+              <a:rPr sz="1100" b="1" i="0">
+                <a:solidFill>
+                  <a:srgbClr val="111111"/>
+                </a:solidFill>
+                <a:latin typeface="Noto Sans KR"/>
+              </a:rPr>
+              <a:t>데이터과학·AI</a:t>
+            </a:r>
+          </a:p>
+        </p:txBody>
+      </p:sp>
+      <p:sp>
+        <p:nvSpPr>
+          <p:cNvPr id="17" name="TextBox 16"/>
+          <p:cNvSpPr txBox="1"/>
+          <p:nvPr/>
+        </p:nvSpPr>
+        <p:spPr>
+          <a:xfrm>
+            <a:off x="2146300" y="3289300"/>
+            <a:ext cx="1485900" cy="1549400"/>
+          </a:xfrm>
+          <a:prstGeom prst="rect">
+            <a:avLst/>
+          </a:prstGeom>
+          <a:noFill/>
+        </p:spPr>
+        <p:txBody>
+          <a:bodyPr wrap="square">
+            <a:spAutoFit/>
+          </a:bodyPr>
+          <a:lstStyle/>
+          <a:p>
+            <a:pPr algn="l"/>
+            <a:r>
+              <a:rPr sz="1000" b="0" i="0">
+                <a:solidFill>
+                  <a:srgbClr val="555555"/>
+                </a:solidFill>
+                <a:latin typeface="Noto Sans KR"/>
+              </a:rPr>
+              <a:t>컴퓨터비전 품질검수 + 다국어 NLP 엔진 개발자</a:t>
+            </a:r>
+          </a:p>
+        </p:txBody>
+      </p:sp>
+      <p:sp>
+        <p:nvSpPr>
+          <p:cNvPr id="18" name="Rectangle 17"/>
+          <p:cNvSpPr/>
+          <p:nvPr/>
+        </p:nvSpPr>
+        <p:spPr>
+          <a:xfrm>
+            <a:off x="3759200" y="3073400"/>
+            <a:ext cx="1612900" cy="1841500"/>
+          </a:xfrm>
+          <a:prstGeom prst="rect">
+            <a:avLst/>
+          </a:prstGeom>
+          <a:solidFill>
+            <a:srgbClr val="F5F5F5"/>
+          </a:solidFill>
+          <a:ln>
+            <a:noFill/>
+          </a:ln>
+        </p:spPr>
+        <p:style>
+          <a:lnRef idx="1">
+            <a:schemeClr val="accent1"/>
+          </a:lnRef>
+          <a:fillRef idx="3">
+            <a:schemeClr val="accent1"/>
+          </a:fillRef>
+          <a:effectRef idx="2">
+            <a:schemeClr val="accent1"/>
+          </a:effectRef>
+          <a:fontRef idx="minor">
+            <a:schemeClr val="lt1"/>
+          </a:fontRef>
+        </p:style>
+        <p:txBody>
+          <a:bodyPr rtlCol="0" anchor="ctr"/>
+          <a:lstStyle/>
+          <a:p>
+            <a:pPr algn="ctr"/>
+          </a:p>
+        </p:txBody>
+      </p:sp>
+      <p:sp>
+        <p:nvSpPr>
+          <p:cNvPr id="19" name="TextBox 18"/>
+          <p:cNvSpPr txBox="1"/>
+          <p:nvPr/>
+        </p:nvSpPr>
+        <p:spPr>
+          <a:xfrm>
+            <a:off x="3822700" y="3149600"/>
+            <a:ext cx="1485900" cy="127000"/>
+          </a:xfrm>
+          <a:prstGeom prst="rect">
+            <a:avLst/>
+          </a:prstGeom>
+          <a:noFill/>
+        </p:spPr>
+        <p:txBody>
+          <a:bodyPr wrap="square">
+            <a:spAutoFit/>
+          </a:bodyPr>
+          <a:lstStyle/>
+          <a:p>
+            <a:pPr algn="l"/>
+            <a:r>
+              <a:rPr sz="1100" b="1" i="0">
+                <a:solidFill>
+                  <a:srgbClr val="111111"/>
+                </a:solidFill>
+                <a:latin typeface="Noto Sans KR"/>
+              </a:rPr>
+              <a:t>의료·바이오</a:t>
+            </a:r>
+          </a:p>
+        </p:txBody>
+      </p:sp>
+      <p:sp>
+        <p:nvSpPr>
+          <p:cNvPr id="20" name="TextBox 19"/>
+          <p:cNvSpPr txBox="1"/>
+          <p:nvPr/>
+        </p:nvSpPr>
+        <p:spPr>
+          <a:xfrm>
+            <a:off x="3822700" y="3289300"/>
+            <a:ext cx="1485900" cy="1549400"/>
+          </a:xfrm>
+          <a:prstGeom prst="rect">
+            <a:avLst/>
+          </a:prstGeom>
+          <a:noFill/>
+        </p:spPr>
+        <p:txBody>
+          <a:bodyPr wrap="square">
+            <a:spAutoFit/>
+          </a:bodyPr>
+          <a:lstStyle/>
+          <a:p>
+            <a:pPr algn="l"/>
+            <a:r>
+              <a:rPr sz="1000" b="0" i="0">
+                <a:solidFill>
+                  <a:srgbClr val="555555"/>
+                </a:solidFill>
+                <a:latin typeface="Noto Sans KR"/>
+              </a:rPr>
+              <a:t>기능공 안전·병원건물 품질인증 특화 파트너</a:t>
+            </a:r>
+          </a:p>
+        </p:txBody>
+      </p:sp>
+      <p:sp>
+        <p:nvSpPr>
+          <p:cNvPr id="21" name="Rectangle 20"/>
+          <p:cNvSpPr/>
+          <p:nvPr/>
+        </p:nvSpPr>
+        <p:spPr>
+          <a:xfrm>
+            <a:off x="5435600" y="3073400"/>
+            <a:ext cx="1612900" cy="1841500"/>
+          </a:xfrm>
+          <a:prstGeom prst="rect">
+            <a:avLst/>
+          </a:prstGeom>
+          <a:solidFill>
+            <a:srgbClr val="F5F5F5"/>
+          </a:solidFill>
+          <a:ln>
+            <a:noFill/>
+          </a:ln>
+        </p:spPr>
+        <p:style>
+          <a:lnRef idx="1">
+            <a:schemeClr val="accent1"/>
+          </a:lnRef>
+          <a:fillRef idx="3">
+            <a:schemeClr val="accent1"/>
+          </a:fillRef>
+          <a:effectRef idx="2">
+            <a:schemeClr val="accent1"/>
+          </a:effectRef>
+          <a:fontRef idx="minor">
+            <a:schemeClr val="lt1"/>
+          </a:fontRef>
+        </p:style>
+        <p:txBody>
+          <a:bodyPr rtlCol="0" anchor="ctr"/>
+          <a:lstStyle/>
+          <a:p>
+            <a:pPr algn="ctr"/>
+          </a:p>
+        </p:txBody>
+      </p:sp>
+      <p:sp>
+        <p:nvSpPr>
+          <p:cNvPr id="22" name="TextBox 21"/>
+          <p:cNvSpPr txBox="1"/>
+          <p:nvPr/>
+        </p:nvSpPr>
+        <p:spPr>
+          <a:xfrm>
+            <a:off x="5499100" y="3149600"/>
+            <a:ext cx="1485900" cy="127000"/>
+          </a:xfrm>
+          <a:prstGeom prst="rect">
+            <a:avLst/>
+          </a:prstGeom>
+          <a:noFill/>
+        </p:spPr>
+        <p:txBody>
+          <a:bodyPr wrap="square">
+            <a:spAutoFit/>
+          </a:bodyPr>
+          <a:lstStyle/>
+          <a:p>
+            <a:pPr algn="l"/>
+            <a:r>
+              <a:rPr sz="1100" b="1" i="0">
+                <a:solidFill>
+                  <a:srgbClr val="111111"/>
+                </a:solidFill>
+                <a:latin typeface="Noto Sans KR"/>
+              </a:rPr>
+              <a:t>공공·정책</a:t>
+            </a:r>
+          </a:p>
+        </p:txBody>
+      </p:sp>
+      <p:sp>
+        <p:nvSpPr>
+          <p:cNvPr id="23" name="TextBox 22"/>
+          <p:cNvSpPr txBox="1"/>
+          <p:nvPr/>
+        </p:nvSpPr>
+        <p:spPr>
+          <a:xfrm>
+            <a:off x="5499100" y="3289300"/>
+            <a:ext cx="1485900" cy="1549400"/>
+          </a:xfrm>
+          <a:prstGeom prst="rect">
+            <a:avLst/>
+          </a:prstGeom>
+          <a:noFill/>
+        </p:spPr>
+        <p:txBody>
+          <a:bodyPr wrap="square">
+            <a:spAutoFit/>
+          </a:bodyPr>
+          <a:lstStyle/>
+          <a:p>
+            <a:pPr algn="l"/>
+            <a:r>
+              <a:rPr sz="1000" b="0" i="0">
+                <a:solidFill>
+                  <a:srgbClr val="555555"/>
+                </a:solidFill>
+                <a:latin typeface="Noto Sans KR"/>
+              </a:rPr>
+              <a:t>공공발주 인증 제도화 · 직종 정규화 파트너</a:t>
+            </a:r>
+          </a:p>
+        </p:txBody>
+      </p:sp>
+      <p:sp>
+        <p:nvSpPr>
+          <p:cNvPr id="24" name="Rectangle 23"/>
+          <p:cNvSpPr/>
+          <p:nvPr/>
+        </p:nvSpPr>
+        <p:spPr>
+          <a:xfrm>
+            <a:off x="7112000" y="3073400"/>
+            <a:ext cx="1612900" cy="1841500"/>
+          </a:xfrm>
+          <a:prstGeom prst="rect">
+            <a:avLst/>
+          </a:prstGeom>
+          <a:solidFill>
+            <a:srgbClr val="F5F5F5"/>
+          </a:solidFill>
+          <a:ln>
+            <a:noFill/>
+          </a:ln>
+        </p:spPr>
+        <p:style>
+          <a:lnRef idx="1">
+            <a:schemeClr val="accent1"/>
+          </a:lnRef>
+          <a:fillRef idx="3">
+            <a:schemeClr val="accent1"/>
+          </a:fillRef>
+          <a:effectRef idx="2">
+            <a:schemeClr val="accent1"/>
+          </a:effectRef>
+          <a:fontRef idx="minor">
+            <a:schemeClr val="lt1"/>
+          </a:fontRef>
+        </p:style>
+        <p:txBody>
+          <a:bodyPr rtlCol="0" anchor="ctr"/>
+          <a:lstStyle/>
+          <a:p>
+            <a:pPr algn="ctr"/>
+          </a:p>
+        </p:txBody>
+      </p:sp>
+      <p:sp>
+        <p:nvSpPr>
+          <p:cNvPr id="25" name="TextBox 24"/>
+          <p:cNvSpPr txBox="1"/>
+          <p:nvPr/>
+        </p:nvSpPr>
+        <p:spPr>
+          <a:xfrm>
+            <a:off x="7175500" y="3149600"/>
+            <a:ext cx="1485900" cy="127000"/>
+          </a:xfrm>
+          <a:prstGeom prst="rect">
+            <a:avLst/>
+          </a:prstGeom>
+          <a:noFill/>
+        </p:spPr>
+        <p:txBody>
+          <a:bodyPr wrap="square">
+            <a:spAutoFit/>
+          </a:bodyPr>
+          <a:lstStyle/>
+          <a:p>
+            <a:pPr algn="l"/>
+            <a:r>
+              <a:rPr sz="1100" b="1" i="0">
+                <a:solidFill>
+                  <a:srgbClr val="111111"/>
+                </a:solidFill>
+                <a:latin typeface="Noto Sans KR"/>
+              </a:rPr>
+              <a:t>경영·금융</a:t>
+            </a:r>
+          </a:p>
+        </p:txBody>
+      </p:sp>
+      <p:sp>
+        <p:nvSpPr>
+          <p:cNvPr id="26" name="TextBox 25"/>
+          <p:cNvSpPr txBox="1"/>
+          <p:nvPr/>
+        </p:nvSpPr>
+        <p:spPr>
+          <a:xfrm>
+            <a:off x="7175500" y="3289300"/>
+            <a:ext cx="1485900" cy="1549400"/>
+          </a:xfrm>
+          <a:prstGeom prst="rect">
+            <a:avLst/>
+          </a:prstGeom>
+          <a:noFill/>
+        </p:spPr>
+        <p:txBody>
+          <a:bodyPr wrap="square">
+            <a:spAutoFit/>
+          </a:bodyPr>
+          <a:lstStyle/>
+          <a:p>
+            <a:pPr algn="l"/>
+            <a:r>
+              <a:rPr sz="1000" b="0" i="0">
+                <a:solidFill>
+                  <a:srgbClr val="555555"/>
+                </a:solidFill>
+                <a:latin typeface="Noto Sans KR"/>
+              </a:rPr>
+              <a:t>플랫폼 사업화 · 기능인 금융공제 설계 파트너</a:t>
+            </a:r>
+          </a:p>
+        </p:txBody>
+      </p:sp>
     </p:spTree>
   </p:cSld>
   <p:clrMapOvr>
